--- a/slides/DGE-METRIC_Online_Day3_Slides.pptx
+++ b/slides/DGE-METRIC_Online_Day3_Slides.pptx
@@ -5,27 +5,28 @@
     <p:sldMasterId id="2147483648" r:id="rId1"/>
   </p:sldMasterIdLst>
   <p:sldIdLst>
-    <p:sldId id="256" r:id="rId7"/>
-    <p:sldId id="257" r:id="rId8"/>
-    <p:sldId id="258" r:id="rId9"/>
-    <p:sldId id="259" r:id="rId10"/>
-    <p:sldId id="260" r:id="rId11"/>
-    <p:sldId id="261" r:id="rId12"/>
-    <p:sldId id="262" r:id="rId13"/>
-    <p:sldId id="263" r:id="rId14"/>
-    <p:sldId id="264" r:id="rId15"/>
-    <p:sldId id="265" r:id="rId16"/>
-    <p:sldId id="266" r:id="rId17"/>
-    <p:sldId id="267" r:id="rId18"/>
-    <p:sldId id="268" r:id="rId19"/>
-    <p:sldId id="269" r:id="rId20"/>
-    <p:sldId id="270" r:id="rId21"/>
-    <p:sldId id="271" r:id="rId22"/>
-    <p:sldId id="272" r:id="rId23"/>
-    <p:sldId id="273" r:id="rId24"/>
-    <p:sldId id="274" r:id="rId25"/>
+    <p:sldId id="256" r:id="rId2"/>
+    <p:sldId id="257" r:id="rId3"/>
+    <p:sldId id="258" r:id="rId4"/>
+    <p:sldId id="259" r:id="rId5"/>
+    <p:sldId id="262" r:id="rId6"/>
+    <p:sldId id="260" r:id="rId7"/>
+    <p:sldId id="261" r:id="rId8"/>
+    <p:sldId id="263" r:id="rId9"/>
+    <p:sldId id="264" r:id="rId10"/>
+    <p:sldId id="265" r:id="rId11"/>
+    <p:sldId id="266" r:id="rId12"/>
+    <p:sldId id="267" r:id="rId13"/>
+    <p:sldId id="268" r:id="rId14"/>
+    <p:sldId id="269" r:id="rId15"/>
+    <p:sldId id="270" r:id="rId16"/>
+    <p:sldId id="271" r:id="rId17"/>
+    <p:sldId id="272" r:id="rId18"/>
+    <p:sldId id="273" r:id="rId19"/>
+    <p:sldId id="274" r:id="rId20"/>
+    <p:sldId id="275" r:id="rId21"/>
   </p:sldIdLst>
-  <p:sldSz cx="12191695" cy="6858000" type="screen4x3"/>
+  <p:sldSz cx="12192000" cy="6858000"/>
   <p:notesSz cx="6858000" cy="9144000"/>
   <p:defaultTextStyle>
     <a:defPPr>
@@ -122,6 +123,22 @@
       </a:defRPr>
     </a:lvl9pPr>
   </p:defaultTextStyle>
+  <p:extLst>
+    <p:ext uri="{EFAFB233-063F-42B5-8137-9DF3F51BA10A}">
+      <p15:sldGuideLst xmlns:p15="http://schemas.microsoft.com/office/powerpoint/2012/main">
+        <p15:guide id="1" orient="horz" pos="2160">
+          <p15:clr>
+            <a:srgbClr val="A4A3A4"/>
+          </p15:clr>
+        </p15:guide>
+        <p15:guide id="2" pos="2880">
+          <p15:clr>
+            <a:srgbClr val="A4A3A4"/>
+          </p15:clr>
+        </p15:guide>
+      </p15:sldGuideLst>
+    </p:ext>
+  </p:extLst>
 </p:presentation>
 </file>
 
@@ -163,10 +180,9 @@
           <a:lstStyle/>
           <a:p>
             <a:r>
-              <a:rPr lang="en-US" smtClean="0"/>
+              <a:rPr lang="en-US"/>
               <a:t>Click to edit Master title style</a:t>
             </a:r>
-            <a:endParaRPr lang="en-US"/>
           </a:p>
         </p:txBody>
       </p:sp>
@@ -282,10 +298,9 @@
           </a:lstStyle>
           <a:p>
             <a:r>
-              <a:rPr lang="en-US" smtClean="0"/>
+              <a:rPr lang="en-US"/>
               <a:t>Click to edit Master subtitle style</a:t>
             </a:r>
-            <a:endParaRPr lang="en-US"/>
           </a:p>
         </p:txBody>
       </p:sp>
@@ -306,7 +321,7 @@
           <a:p>
             <a:fld id="{5BCAD085-E8A6-8845-BD4E-CB4CCA059FC4}" type="datetimeFigureOut">
               <a:rPr lang="en-US" smtClean="0"/>
-              <a:t>1/27/13</a:t>
+              <a:t>7/20/2026</a:t>
             </a:fld>
             <a:endParaRPr lang="en-US"/>
           </a:p>
@@ -400,10 +415,9 @@
           <a:lstStyle/>
           <a:p>
             <a:r>
-              <a:rPr lang="en-US" smtClean="0"/>
+              <a:rPr lang="en-US"/>
               <a:t>Click to edit Master title style</a:t>
             </a:r>
-            <a:endParaRPr lang="en-US"/>
           </a:p>
         </p:txBody>
       </p:sp>
@@ -424,38 +438,37 @@
           <a:p>
             <a:pPr lvl="0"/>
             <a:r>
-              <a:rPr lang="en-US" smtClean="0"/>
+              <a:rPr lang="en-US"/>
               <a:t>Click to edit Master text styles</a:t>
             </a:r>
           </a:p>
           <a:p>
             <a:pPr lvl="1"/>
             <a:r>
-              <a:rPr lang="en-US" smtClean="0"/>
+              <a:rPr lang="en-US"/>
               <a:t>Second level</a:t>
             </a:r>
           </a:p>
           <a:p>
             <a:pPr lvl="2"/>
             <a:r>
-              <a:rPr lang="en-US" smtClean="0"/>
+              <a:rPr lang="en-US"/>
               <a:t>Third level</a:t>
             </a:r>
           </a:p>
           <a:p>
             <a:pPr lvl="3"/>
             <a:r>
-              <a:rPr lang="en-US" smtClean="0"/>
+              <a:rPr lang="en-US"/>
               <a:t>Fourth level</a:t>
             </a:r>
           </a:p>
           <a:p>
             <a:pPr lvl="4"/>
             <a:r>
-              <a:rPr lang="en-US" smtClean="0"/>
+              <a:rPr lang="en-US"/>
               <a:t>Fifth level</a:t>
             </a:r>
-            <a:endParaRPr lang="en-US"/>
           </a:p>
         </p:txBody>
       </p:sp>
@@ -476,7 +489,7 @@
           <a:p>
             <a:fld id="{5BCAD085-E8A6-8845-BD4E-CB4CCA059FC4}" type="datetimeFigureOut">
               <a:rPr lang="en-US" smtClean="0"/>
-              <a:t>1/27/13</a:t>
+              <a:t>7/20/2026</a:t>
             </a:fld>
             <a:endParaRPr lang="en-US"/>
           </a:p>
@@ -575,10 +588,9 @@
           <a:lstStyle/>
           <a:p>
             <a:r>
-              <a:rPr lang="en-US" smtClean="0"/>
+              <a:rPr lang="en-US"/>
               <a:t>Click to edit Master title style</a:t>
             </a:r>
-            <a:endParaRPr lang="en-US"/>
           </a:p>
         </p:txBody>
       </p:sp>
@@ -604,38 +616,37 @@
           <a:p>
             <a:pPr lvl="0"/>
             <a:r>
-              <a:rPr lang="en-US" smtClean="0"/>
+              <a:rPr lang="en-US"/>
               <a:t>Click to edit Master text styles</a:t>
             </a:r>
           </a:p>
           <a:p>
             <a:pPr lvl="1"/>
             <a:r>
-              <a:rPr lang="en-US" smtClean="0"/>
+              <a:rPr lang="en-US"/>
               <a:t>Second level</a:t>
             </a:r>
           </a:p>
           <a:p>
             <a:pPr lvl="2"/>
             <a:r>
-              <a:rPr lang="en-US" smtClean="0"/>
+              <a:rPr lang="en-US"/>
               <a:t>Third level</a:t>
             </a:r>
           </a:p>
           <a:p>
             <a:pPr lvl="3"/>
             <a:r>
-              <a:rPr lang="en-US" smtClean="0"/>
+              <a:rPr lang="en-US"/>
               <a:t>Fourth level</a:t>
             </a:r>
           </a:p>
           <a:p>
             <a:pPr lvl="4"/>
             <a:r>
-              <a:rPr lang="en-US" smtClean="0"/>
+              <a:rPr lang="en-US"/>
               <a:t>Fifth level</a:t>
             </a:r>
-            <a:endParaRPr lang="en-US"/>
           </a:p>
         </p:txBody>
       </p:sp>
@@ -656,7 +667,7 @@
           <a:p>
             <a:fld id="{5BCAD085-E8A6-8845-BD4E-CB4CCA059FC4}" type="datetimeFigureOut">
               <a:rPr lang="en-US" smtClean="0"/>
-              <a:t>1/27/13</a:t>
+              <a:t>7/20/2026</a:t>
             </a:fld>
             <a:endParaRPr lang="en-US"/>
           </a:p>
@@ -750,10 +761,9 @@
           <a:lstStyle/>
           <a:p>
             <a:r>
-              <a:rPr lang="en-US" smtClean="0"/>
+              <a:rPr lang="en-US"/>
               <a:t>Click to edit Master title style</a:t>
             </a:r>
-            <a:endParaRPr lang="en-US"/>
           </a:p>
         </p:txBody>
       </p:sp>
@@ -774,38 +784,37 @@
           <a:p>
             <a:pPr lvl="0"/>
             <a:r>
-              <a:rPr lang="en-US" smtClean="0"/>
+              <a:rPr lang="en-US"/>
               <a:t>Click to edit Master text styles</a:t>
             </a:r>
           </a:p>
           <a:p>
             <a:pPr lvl="1"/>
             <a:r>
-              <a:rPr lang="en-US" smtClean="0"/>
+              <a:rPr lang="en-US"/>
               <a:t>Second level</a:t>
             </a:r>
           </a:p>
           <a:p>
             <a:pPr lvl="2"/>
             <a:r>
-              <a:rPr lang="en-US" smtClean="0"/>
+              <a:rPr lang="en-US"/>
               <a:t>Third level</a:t>
             </a:r>
           </a:p>
           <a:p>
             <a:pPr lvl="3"/>
             <a:r>
-              <a:rPr lang="en-US" smtClean="0"/>
+              <a:rPr lang="en-US"/>
               <a:t>Fourth level</a:t>
             </a:r>
           </a:p>
           <a:p>
             <a:pPr lvl="4"/>
             <a:r>
-              <a:rPr lang="en-US" smtClean="0"/>
+              <a:rPr lang="en-US"/>
               <a:t>Fifth level</a:t>
             </a:r>
-            <a:endParaRPr lang="en-US"/>
           </a:p>
         </p:txBody>
       </p:sp>
@@ -826,7 +835,7 @@
           <a:p>
             <a:fld id="{5BCAD085-E8A6-8845-BD4E-CB4CCA059FC4}" type="datetimeFigureOut">
               <a:rPr lang="en-US" smtClean="0"/>
-              <a:t>1/27/13</a:t>
+              <a:t>7/20/2026</a:t>
             </a:fld>
             <a:endParaRPr lang="en-US"/>
           </a:p>
@@ -929,10 +938,9 @@
           </a:lstStyle>
           <a:p>
             <a:r>
-              <a:rPr lang="en-US" smtClean="0"/>
+              <a:rPr lang="en-US"/>
               <a:t>Click to edit Master title style</a:t>
             </a:r>
-            <a:endParaRPr lang="en-US"/>
           </a:p>
         </p:txBody>
       </p:sp>
@@ -1049,7 +1057,7 @@
           <a:p>
             <a:pPr lvl="0"/>
             <a:r>
-              <a:rPr lang="en-US" smtClean="0"/>
+              <a:rPr lang="en-US"/>
               <a:t>Click to edit Master text styles</a:t>
             </a:r>
           </a:p>
@@ -1072,7 +1080,7 @@
           <a:p>
             <a:fld id="{5BCAD085-E8A6-8845-BD4E-CB4CCA059FC4}" type="datetimeFigureOut">
               <a:rPr lang="en-US" smtClean="0"/>
-              <a:t>1/27/13</a:t>
+              <a:t>7/20/2026</a:t>
             </a:fld>
             <a:endParaRPr lang="en-US"/>
           </a:p>
@@ -1166,10 +1174,9 @@
           <a:lstStyle/>
           <a:p>
             <a:r>
-              <a:rPr lang="en-US" smtClean="0"/>
+              <a:rPr lang="en-US"/>
               <a:t>Click to edit Master title style</a:t>
             </a:r>
-            <a:endParaRPr lang="en-US"/>
           </a:p>
         </p:txBody>
       </p:sp>
@@ -1223,38 +1230,37 @@
           <a:p>
             <a:pPr lvl="0"/>
             <a:r>
-              <a:rPr lang="en-US" smtClean="0"/>
+              <a:rPr lang="en-US"/>
               <a:t>Click to edit Master text styles</a:t>
             </a:r>
           </a:p>
           <a:p>
             <a:pPr lvl="1"/>
             <a:r>
-              <a:rPr lang="en-US" smtClean="0"/>
+              <a:rPr lang="en-US"/>
               <a:t>Second level</a:t>
             </a:r>
           </a:p>
           <a:p>
             <a:pPr lvl="2"/>
             <a:r>
-              <a:rPr lang="en-US" smtClean="0"/>
+              <a:rPr lang="en-US"/>
               <a:t>Third level</a:t>
             </a:r>
           </a:p>
           <a:p>
             <a:pPr lvl="3"/>
             <a:r>
-              <a:rPr lang="en-US" smtClean="0"/>
+              <a:rPr lang="en-US"/>
               <a:t>Fourth level</a:t>
             </a:r>
           </a:p>
           <a:p>
             <a:pPr lvl="4"/>
             <a:r>
-              <a:rPr lang="en-US" smtClean="0"/>
+              <a:rPr lang="en-US"/>
               <a:t>Fifth level</a:t>
             </a:r>
-            <a:endParaRPr lang="en-US"/>
           </a:p>
         </p:txBody>
       </p:sp>
@@ -1308,38 +1314,37 @@
           <a:p>
             <a:pPr lvl="0"/>
             <a:r>
-              <a:rPr lang="en-US" smtClean="0"/>
+              <a:rPr lang="en-US"/>
               <a:t>Click to edit Master text styles</a:t>
             </a:r>
           </a:p>
           <a:p>
             <a:pPr lvl="1"/>
             <a:r>
-              <a:rPr lang="en-US" smtClean="0"/>
+              <a:rPr lang="en-US"/>
               <a:t>Second level</a:t>
             </a:r>
           </a:p>
           <a:p>
             <a:pPr lvl="2"/>
             <a:r>
-              <a:rPr lang="en-US" smtClean="0"/>
+              <a:rPr lang="en-US"/>
               <a:t>Third level</a:t>
             </a:r>
           </a:p>
           <a:p>
             <a:pPr lvl="3"/>
             <a:r>
-              <a:rPr lang="en-US" smtClean="0"/>
+              <a:rPr lang="en-US"/>
               <a:t>Fourth level</a:t>
             </a:r>
           </a:p>
           <a:p>
             <a:pPr lvl="4"/>
             <a:r>
-              <a:rPr lang="en-US" smtClean="0"/>
+              <a:rPr lang="en-US"/>
               <a:t>Fifth level</a:t>
             </a:r>
-            <a:endParaRPr lang="en-US"/>
           </a:p>
         </p:txBody>
       </p:sp>
@@ -1360,7 +1365,7 @@
           <a:p>
             <a:fld id="{5BCAD085-E8A6-8845-BD4E-CB4CCA059FC4}" type="datetimeFigureOut">
               <a:rPr lang="en-US" smtClean="0"/>
-              <a:t>1/27/13</a:t>
+              <a:t>7/20/2026</a:t>
             </a:fld>
             <a:endParaRPr lang="en-US"/>
           </a:p>
@@ -1458,10 +1463,9 @@
           </a:lstStyle>
           <a:p>
             <a:r>
-              <a:rPr lang="en-US" smtClean="0"/>
+              <a:rPr lang="en-US"/>
               <a:t>Click to edit Master title style</a:t>
             </a:r>
-            <a:endParaRPr lang="en-US"/>
           </a:p>
         </p:txBody>
       </p:sp>
@@ -1524,7 +1528,7 @@
           <a:p>
             <a:pPr lvl="0"/>
             <a:r>
-              <a:rPr lang="en-US" smtClean="0"/>
+              <a:rPr lang="en-US"/>
               <a:t>Click to edit Master text styles</a:t>
             </a:r>
           </a:p>
@@ -1580,38 +1584,37 @@
           <a:p>
             <a:pPr lvl="0"/>
             <a:r>
-              <a:rPr lang="en-US" smtClean="0"/>
+              <a:rPr lang="en-US"/>
               <a:t>Click to edit Master text styles</a:t>
             </a:r>
           </a:p>
           <a:p>
             <a:pPr lvl="1"/>
             <a:r>
-              <a:rPr lang="en-US" smtClean="0"/>
+              <a:rPr lang="en-US"/>
               <a:t>Second level</a:t>
             </a:r>
           </a:p>
           <a:p>
             <a:pPr lvl="2"/>
             <a:r>
-              <a:rPr lang="en-US" smtClean="0"/>
+              <a:rPr lang="en-US"/>
               <a:t>Third level</a:t>
             </a:r>
           </a:p>
           <a:p>
             <a:pPr lvl="3"/>
             <a:r>
-              <a:rPr lang="en-US" smtClean="0"/>
+              <a:rPr lang="en-US"/>
               <a:t>Fourth level</a:t>
             </a:r>
           </a:p>
           <a:p>
             <a:pPr lvl="4"/>
             <a:r>
-              <a:rPr lang="en-US" smtClean="0"/>
+              <a:rPr lang="en-US"/>
               <a:t>Fifth level</a:t>
             </a:r>
-            <a:endParaRPr lang="en-US"/>
           </a:p>
         </p:txBody>
       </p:sp>
@@ -1674,7 +1677,7 @@
           <a:p>
             <a:pPr lvl="0"/>
             <a:r>
-              <a:rPr lang="en-US" smtClean="0"/>
+              <a:rPr lang="en-US"/>
               <a:t>Click to edit Master text styles</a:t>
             </a:r>
           </a:p>
@@ -1730,38 +1733,37 @@
           <a:p>
             <a:pPr lvl="0"/>
             <a:r>
-              <a:rPr lang="en-US" smtClean="0"/>
+              <a:rPr lang="en-US"/>
               <a:t>Click to edit Master text styles</a:t>
             </a:r>
           </a:p>
           <a:p>
             <a:pPr lvl="1"/>
             <a:r>
-              <a:rPr lang="en-US" smtClean="0"/>
+              <a:rPr lang="en-US"/>
               <a:t>Second level</a:t>
             </a:r>
           </a:p>
           <a:p>
             <a:pPr lvl="2"/>
             <a:r>
-              <a:rPr lang="en-US" smtClean="0"/>
+              <a:rPr lang="en-US"/>
               <a:t>Third level</a:t>
             </a:r>
           </a:p>
           <a:p>
             <a:pPr lvl="3"/>
             <a:r>
-              <a:rPr lang="en-US" smtClean="0"/>
+              <a:rPr lang="en-US"/>
               <a:t>Fourth level</a:t>
             </a:r>
           </a:p>
           <a:p>
             <a:pPr lvl="4"/>
             <a:r>
-              <a:rPr lang="en-US" smtClean="0"/>
+              <a:rPr lang="en-US"/>
               <a:t>Fifth level</a:t>
             </a:r>
-            <a:endParaRPr lang="en-US"/>
           </a:p>
         </p:txBody>
       </p:sp>
@@ -1782,7 +1784,7 @@
           <a:p>
             <a:fld id="{5BCAD085-E8A6-8845-BD4E-CB4CCA059FC4}" type="datetimeFigureOut">
               <a:rPr lang="en-US" smtClean="0"/>
-              <a:t>1/27/13</a:t>
+              <a:t>7/20/2026</a:t>
             </a:fld>
             <a:endParaRPr lang="en-US"/>
           </a:p>
@@ -1876,10 +1878,9 @@
           <a:lstStyle/>
           <a:p>
             <a:r>
-              <a:rPr lang="en-US" smtClean="0"/>
+              <a:rPr lang="en-US"/>
               <a:t>Click to edit Master title style</a:t>
             </a:r>
-            <a:endParaRPr lang="en-US"/>
           </a:p>
         </p:txBody>
       </p:sp>
@@ -1900,7 +1901,7 @@
           <a:p>
             <a:fld id="{5BCAD085-E8A6-8845-BD4E-CB4CCA059FC4}" type="datetimeFigureOut">
               <a:rPr lang="en-US" smtClean="0"/>
-              <a:t>1/27/13</a:t>
+              <a:t>7/20/2026</a:t>
             </a:fld>
             <a:endParaRPr lang="en-US"/>
           </a:p>
@@ -1995,7 +1996,7 @@
           <a:p>
             <a:fld id="{5BCAD085-E8A6-8845-BD4E-CB4CCA059FC4}" type="datetimeFigureOut">
               <a:rPr lang="en-US" smtClean="0"/>
-              <a:t>1/27/13</a:t>
+              <a:t>7/20/2026</a:t>
             </a:fld>
             <a:endParaRPr lang="en-US"/>
           </a:p>
@@ -2098,10 +2099,9 @@
           </a:lstStyle>
           <a:p>
             <a:r>
-              <a:rPr lang="en-US" smtClean="0"/>
+              <a:rPr lang="en-US"/>
               <a:t>Click to edit Master title style</a:t>
             </a:r>
-            <a:endParaRPr lang="en-US"/>
           </a:p>
         </p:txBody>
       </p:sp>
@@ -2155,38 +2155,37 @@
           <a:p>
             <a:pPr lvl="0"/>
             <a:r>
-              <a:rPr lang="en-US" smtClean="0"/>
+              <a:rPr lang="en-US"/>
               <a:t>Click to edit Master text styles</a:t>
             </a:r>
           </a:p>
           <a:p>
             <a:pPr lvl="1"/>
             <a:r>
-              <a:rPr lang="en-US" smtClean="0"/>
+              <a:rPr lang="en-US"/>
               <a:t>Second level</a:t>
             </a:r>
           </a:p>
           <a:p>
             <a:pPr lvl="2"/>
             <a:r>
-              <a:rPr lang="en-US" smtClean="0"/>
+              <a:rPr lang="en-US"/>
               <a:t>Third level</a:t>
             </a:r>
           </a:p>
           <a:p>
             <a:pPr lvl="3"/>
             <a:r>
-              <a:rPr lang="en-US" smtClean="0"/>
+              <a:rPr lang="en-US"/>
               <a:t>Fourth level</a:t>
             </a:r>
           </a:p>
           <a:p>
             <a:pPr lvl="4"/>
             <a:r>
-              <a:rPr lang="en-US" smtClean="0"/>
+              <a:rPr lang="en-US"/>
               <a:t>Fifth level</a:t>
             </a:r>
-            <a:endParaRPr lang="en-US"/>
           </a:p>
         </p:txBody>
       </p:sp>
@@ -2249,7 +2248,7 @@
           <a:p>
             <a:pPr lvl="0"/>
             <a:r>
-              <a:rPr lang="en-US" smtClean="0"/>
+              <a:rPr lang="en-US"/>
               <a:t>Click to edit Master text styles</a:t>
             </a:r>
           </a:p>
@@ -2272,7 +2271,7 @@
           <a:p>
             <a:fld id="{5BCAD085-E8A6-8845-BD4E-CB4CCA059FC4}" type="datetimeFigureOut">
               <a:rPr lang="en-US" smtClean="0"/>
-              <a:t>1/27/13</a:t>
+              <a:t>7/20/2026</a:t>
             </a:fld>
             <a:endParaRPr lang="en-US"/>
           </a:p>
@@ -2375,10 +2374,9 @@
           </a:lstStyle>
           <a:p>
             <a:r>
-              <a:rPr lang="en-US" smtClean="0"/>
+              <a:rPr lang="en-US"/>
               <a:t>Click to edit Master title style</a:t>
             </a:r>
-            <a:endParaRPr lang="en-US"/>
           </a:p>
         </p:txBody>
       </p:sp>
@@ -2502,7 +2500,7 @@
           <a:p>
             <a:pPr lvl="0"/>
             <a:r>
-              <a:rPr lang="en-US" smtClean="0"/>
+              <a:rPr lang="en-US"/>
               <a:t>Click to edit Master text styles</a:t>
             </a:r>
           </a:p>
@@ -2525,7 +2523,7 @@
           <a:p>
             <a:fld id="{5BCAD085-E8A6-8845-BD4E-CB4CCA059FC4}" type="datetimeFigureOut">
               <a:rPr lang="en-US" smtClean="0"/>
-              <a:t>1/27/13</a:t>
+              <a:t>7/20/2026</a:t>
             </a:fld>
             <a:endParaRPr lang="en-US"/>
           </a:p>
@@ -2634,10 +2632,9 @@
           <a:lstStyle/>
           <a:p>
             <a:r>
-              <a:rPr lang="en-US" smtClean="0"/>
+              <a:rPr lang="en-US"/>
               <a:t>Click to edit Master title style</a:t>
             </a:r>
-            <a:endParaRPr lang="en-US"/>
           </a:p>
         </p:txBody>
       </p:sp>
@@ -2668,38 +2665,37 @@
           <a:p>
             <a:pPr lvl="0"/>
             <a:r>
-              <a:rPr lang="en-US" smtClean="0"/>
+              <a:rPr lang="en-US"/>
               <a:t>Click to edit Master text styles</a:t>
             </a:r>
           </a:p>
           <a:p>
             <a:pPr lvl="1"/>
             <a:r>
-              <a:rPr lang="en-US" smtClean="0"/>
+              <a:rPr lang="en-US"/>
               <a:t>Second level</a:t>
             </a:r>
           </a:p>
           <a:p>
             <a:pPr lvl="2"/>
             <a:r>
-              <a:rPr lang="en-US" smtClean="0"/>
+              <a:rPr lang="en-US"/>
               <a:t>Third level</a:t>
             </a:r>
           </a:p>
           <a:p>
             <a:pPr lvl="3"/>
             <a:r>
-              <a:rPr lang="en-US" smtClean="0"/>
+              <a:rPr lang="en-US"/>
               <a:t>Fourth level</a:t>
             </a:r>
           </a:p>
           <a:p>
             <a:pPr lvl="4"/>
             <a:r>
-              <a:rPr lang="en-US" smtClean="0"/>
+              <a:rPr lang="en-US"/>
               <a:t>Fifth level</a:t>
             </a:r>
-            <a:endParaRPr lang="en-US"/>
           </a:p>
         </p:txBody>
       </p:sp>
@@ -2738,7 +2734,7 @@
           <a:p>
             <a:fld id="{5BCAD085-E8A6-8845-BD4E-CB4CCA059FC4}" type="datetimeFigureOut">
               <a:rPr lang="en-US" smtClean="0"/>
-              <a:t>1/27/13</a:t>
+              <a:t>7/20/2026</a:t>
             </a:fld>
             <a:endParaRPr lang="en-US"/>
           </a:p>
@@ -3097,7 +3093,7 @@
 </file>
 
 <file path=ppt/slides/slide1.xml><?xml version="1.0" encoding="utf-8"?>
-<p:sld xmlns:a="http://schemas.openxmlformats.org/drawingml/2006/main" xmlns:p="http://schemas.openxmlformats.org/presentationml/2006/main" xmlns:r="http://schemas.openxmlformats.org/officeDocument/2006/relationships">
+<p:sld xmlns:a="http://schemas.openxmlformats.org/drawingml/2006/main" xmlns:r="http://schemas.openxmlformats.org/officeDocument/2006/relationships" xmlns:p="http://schemas.openxmlformats.org/presentationml/2006/main">
   <p:cSld>
     <p:spTree>
       <p:nvGrpSpPr>
@@ -3105,7 +3101,14 @@
         <p:cNvGrpSpPr/>
         <p:nvPr/>
       </p:nvGrpSpPr>
-      <p:grpSpPr/>
+      <p:grpSpPr>
+        <a:xfrm>
+          <a:off x="0" y="0"/>
+          <a:ext cx="0" cy="0"/>
+          <a:chOff x="0" y="0"/>
+          <a:chExt cx="0" cy="0"/>
+        </a:xfrm>
+      </p:grpSpPr>
       <p:sp>
         <p:nvSpPr>
           <p:cNvPr id="2" name="Rectangle 1"/>
@@ -3147,6 +3150,7 @@
           <a:lstStyle/>
           <a:p>
             <a:pPr algn="ctr"/>
+            <a:endParaRPr/>
           </a:p>
         </p:txBody>
       </p:sp>
@@ -3191,6 +3195,7 @@
           <a:lstStyle/>
           <a:p>
             <a:pPr algn="ctr"/>
+            <a:endParaRPr/>
           </a:p>
         </p:txBody>
       </p:sp>
@@ -3309,6 +3314,7 @@
           <a:lstStyle/>
           <a:p>
             <a:pPr algn="ctr"/>
+            <a:endParaRPr/>
           </a:p>
         </p:txBody>
       </p:sp>
@@ -3346,7 +3352,7 @@
                 </a:solidFill>
                 <a:latin typeface="Calibri"/>
               </a:rPr>
-              <a:t>Friday 24 July 2026 · Morning + Afternoon · 2 × 180 minutes</a:t>
+              <a:t>Friday 24 July 2026 · Morning 9:00-11:30 + Afternoon 13:00-17:00 (ICT, UTC+7)</a:t>
             </a:r>
           </a:p>
           <a:p>
@@ -3424,6 +3430,7 @@
           <a:lstStyle/>
           <a:p>
             <a:pPr algn="ctr"/>
+            <a:endParaRPr/>
           </a:p>
         </p:txBody>
       </p:sp>
@@ -3436,7 +3443,7 @@
 </file>
 
 <file path=ppt/slides/slide10.xml><?xml version="1.0" encoding="utf-8"?>
-<p:sld xmlns:a="http://schemas.openxmlformats.org/drawingml/2006/main" xmlns:p="http://schemas.openxmlformats.org/presentationml/2006/main" xmlns:r="http://schemas.openxmlformats.org/officeDocument/2006/relationships">
+<p:sld xmlns:a="http://schemas.openxmlformats.org/drawingml/2006/main" xmlns:r="http://schemas.openxmlformats.org/officeDocument/2006/relationships" xmlns:p="http://schemas.openxmlformats.org/presentationml/2006/main">
   <p:cSld>
     <p:spTree>
       <p:nvGrpSpPr>
@@ -3444,7 +3451,14 @@
         <p:cNvGrpSpPr/>
         <p:nvPr/>
       </p:nvGrpSpPr>
-      <p:grpSpPr/>
+      <p:grpSpPr>
+        <a:xfrm>
+          <a:off x="0" y="0"/>
+          <a:ext cx="0" cy="0"/>
+          <a:chOff x="0" y="0"/>
+          <a:chExt cx="0" cy="0"/>
+        </a:xfrm>
+      </p:grpSpPr>
       <p:sp>
         <p:nvSpPr>
           <p:cNvPr id="2" name="Rectangle 1"/>
@@ -3455,6 +3469,51 @@
           <a:xfrm>
             <a:off x="0" y="0"/>
             <a:ext cx="12191695" cy="6858000"/>
+          </a:xfrm>
+          <a:prstGeom prst="rect">
+            <a:avLst/>
+          </a:prstGeom>
+          <a:solidFill>
+            <a:srgbClr val="FFFFFF"/>
+          </a:solidFill>
+          <a:ln>
+            <a:noFill/>
+          </a:ln>
+          <a:effectLst/>
+        </p:spPr>
+        <p:style>
+          <a:lnRef idx="1">
+            <a:schemeClr val="accent1"/>
+          </a:lnRef>
+          <a:fillRef idx="3">
+            <a:schemeClr val="accent1"/>
+          </a:fillRef>
+          <a:effectRef idx="2">
+            <a:schemeClr val="accent1"/>
+          </a:effectRef>
+          <a:fontRef idx="minor">
+            <a:schemeClr val="lt1"/>
+          </a:fontRef>
+        </p:style>
+        <p:txBody>
+          <a:bodyPr rtlCol="0" anchor="ctr"/>
+          <a:lstStyle/>
+          <a:p>
+            <a:pPr algn="ctr"/>
+            <a:endParaRPr/>
+          </a:p>
+        </p:txBody>
+      </p:sp>
+      <p:sp>
+        <p:nvSpPr>
+          <p:cNvPr id="3" name="Rectangle 2"/>
+          <p:cNvSpPr/>
+          <p:nvPr/>
+        </p:nvSpPr>
+        <p:spPr>
+          <a:xfrm>
+            <a:off x="0" y="0"/>
+            <a:ext cx="12191695" cy="1280160"/>
           </a:xfrm>
           <a:prstGeom prst="rect">
             <a:avLst/>
@@ -3486,12 +3545,63 @@
           <a:lstStyle/>
           <a:p>
             <a:pPr algn="ctr"/>
+            <a:endParaRPr/>
+          </a:p>
+        </p:txBody>
+      </p:sp>
+      <p:sp>
+        <p:nvSpPr>
+          <p:cNvPr id="4" name="TextBox 3"/>
+          <p:cNvSpPr txBox="1"/>
+          <p:nvPr/>
+        </p:nvSpPr>
+        <p:spPr>
+          <a:xfrm>
+            <a:off x="502920" y="91440"/>
+            <a:ext cx="8778240" cy="1097280"/>
+          </a:xfrm>
+          <a:prstGeom prst="rect">
+            <a:avLst/>
+          </a:prstGeom>
+          <a:noFill/>
+        </p:spPr>
+        <p:txBody>
+          <a:bodyPr wrap="square" anchor="ctr">
+            <a:spAutoFit/>
+          </a:bodyPr>
+          <a:lstStyle/>
+          <a:p>
+            <a:pPr>
+              <a:spcAft>
+                <a:spcPts val="1400"/>
+              </a:spcAft>
+            </a:pPr>
+            <a:r>
+              <a:rPr sz="1100" b="1" i="0">
+                <a:solidFill>
+                  <a:srgbClr val="FFD2D2"/>
+                </a:solidFill>
+                <a:latin typeface="Calibri"/>
+              </a:rPr>
+              <a:t>BLOCK 4 · 15 MIN</a:t>
+            </a:r>
+          </a:p>
+          <a:p>
+            <a:r>
+              <a:rPr sz="2400" b="1" i="0">
+                <a:solidFill>
+                  <a:srgbClr val="FFFFFF"/>
+                </a:solidFill>
+                <a:latin typeface="Calibri"/>
+              </a:rPr>
+              <a:t>This Morning's Output &amp; Debrief</a:t>
+            </a:r>
           </a:p>
         </p:txBody>
       </p:sp>
       <p:pic>
         <p:nvPicPr>
-          <p:cNvPr id="3" name="Picture 2" descr="GIZ_Logo.png"/>
+          <p:cNvPr id="5" name="Picture 4" descr="GIZ_Logo.png"/>
           <p:cNvPicPr>
             <a:picLocks noChangeAspect="1"/>
           </p:cNvPicPr>
@@ -3505,8 +3615,8 @@
         </p:blipFill>
         <p:spPr>
           <a:xfrm>
-            <a:off x="10088575" y="457200"/>
-            <a:ext cx="1656522" cy="457200"/>
+            <a:off x="10454335" y="420624"/>
+            <a:ext cx="1590261" cy="438912"/>
           </a:xfrm>
           <a:prstGeom prst="rect">
             <a:avLst/>
@@ -3515,14 +3625,128 @@
       </p:pic>
       <p:sp>
         <p:nvSpPr>
-          <p:cNvPr id="4" name="TextBox 3"/>
+          <p:cNvPr id="6" name="Rectangle 5"/>
+          <p:cNvSpPr/>
+          <p:nvPr/>
+        </p:nvSpPr>
+        <p:spPr>
+          <a:xfrm>
+            <a:off x="0" y="6565392"/>
+            <a:ext cx="12191695" cy="292608"/>
+          </a:xfrm>
+          <a:prstGeom prst="rect">
+            <a:avLst/>
+          </a:prstGeom>
+          <a:solidFill>
+            <a:srgbClr val="FFFFFF"/>
+          </a:solidFill>
+          <a:ln>
+            <a:noFill/>
+          </a:ln>
+          <a:effectLst/>
+        </p:spPr>
+        <p:style>
+          <a:lnRef idx="1">
+            <a:schemeClr val="accent1"/>
+          </a:lnRef>
+          <a:fillRef idx="3">
+            <a:schemeClr val="accent1"/>
+          </a:fillRef>
+          <a:effectRef idx="2">
+            <a:schemeClr val="accent1"/>
+          </a:effectRef>
+          <a:fontRef idx="minor">
+            <a:schemeClr val="lt1"/>
+          </a:fontRef>
+        </p:style>
+        <p:txBody>
+          <a:bodyPr rtlCol="0" anchor="ctr"/>
+          <a:lstStyle/>
+          <a:p>
+            <a:pPr algn="ctr"/>
+            <a:endParaRPr/>
+          </a:p>
+        </p:txBody>
+      </p:sp>
+      <p:sp>
+        <p:nvSpPr>
+          <p:cNvPr id="7" name="TextBox 6"/>
           <p:cNvSpPr txBox="1"/>
           <p:nvPr/>
         </p:nvSpPr>
         <p:spPr>
           <a:xfrm>
-            <a:off x="822960" y="2651760"/>
-            <a:ext cx="10058400" cy="2011680"/>
+            <a:off x="457200" y="6547104"/>
+            <a:ext cx="7315200" cy="274320"/>
+          </a:xfrm>
+          <a:prstGeom prst="rect">
+            <a:avLst/>
+          </a:prstGeom>
+          <a:noFill/>
+        </p:spPr>
+        <p:txBody>
+          <a:bodyPr wrap="none" tIns="0" bIns="0">
+            <a:spAutoFit/>
+          </a:bodyPr>
+          <a:lstStyle/>
+          <a:p>
+            <a:r>
+              <a:rPr sz="1000" b="0" i="0">
+                <a:solidFill>
+                  <a:srgbClr val="787878"/>
+                </a:solidFill>
+                <a:latin typeface="Calibri"/>
+              </a:rPr>
+              <a:t>DGE-METRIC Online Training — Online Day 3 — Fri 24 Jul 2026</a:t>
+            </a:r>
+          </a:p>
+        </p:txBody>
+      </p:sp>
+      <p:sp>
+        <p:nvSpPr>
+          <p:cNvPr id="8" name="TextBox 7"/>
+          <p:cNvSpPr txBox="1"/>
+          <p:nvPr/>
+        </p:nvSpPr>
+        <p:spPr>
+          <a:xfrm>
+            <a:off x="11002975" y="6547104"/>
+            <a:ext cx="822960" cy="274320"/>
+          </a:xfrm>
+          <a:prstGeom prst="rect">
+            <a:avLst/>
+          </a:prstGeom>
+          <a:noFill/>
+        </p:spPr>
+        <p:txBody>
+          <a:bodyPr wrap="none" tIns="0">
+            <a:spAutoFit/>
+          </a:bodyPr>
+          <a:lstStyle/>
+          <a:p>
+            <a:pPr algn="r"/>
+            <a:r>
+              <a:rPr sz="1000" b="0" i="0">
+                <a:solidFill>
+                  <a:srgbClr val="787878"/>
+                </a:solidFill>
+                <a:latin typeface="Calibri"/>
+              </a:rPr>
+              <a:t>8</a:t>
+            </a:r>
+          </a:p>
+        </p:txBody>
+      </p:sp>
+      <p:sp>
+        <p:nvSpPr>
+          <p:cNvPr id="9" name="TextBox 8"/>
+          <p:cNvSpPr txBox="1"/>
+          <p:nvPr/>
+        </p:nvSpPr>
+        <p:spPr>
+          <a:xfrm>
+            <a:off x="502920" y="1554480"/>
+            <a:ext cx="11185855" cy="4892040"/>
           </a:xfrm>
           <a:prstGeom prst="rect">
             <a:avLst/>
@@ -3535,46 +3759,83 @@
           </a:bodyPr>
           <a:lstStyle/>
           <a:p>
-            <a:pPr>
+            <a:pPr marL="0" indent="0">
               <a:spcAft>
                 <a:spcPts val="1000"/>
               </a:spcAft>
             </a:pPr>
             <a:r>
-              <a:rPr sz="1500" b="1" i="0">
-                <a:solidFill>
-                  <a:srgbClr val="FFD2D2"/>
-                </a:solidFill>
-                <a:latin typeface="Calibri"/>
-              </a:rPr>
-              <a:t>ONLINE DAY 3 — AFTERNOON</a:t>
-            </a:r>
-          </a:p>
-          <a:p>
-            <a:r>
-              <a:rPr sz="3400" b="1" i="0">
-                <a:solidFill>
-                  <a:srgbClr val="FFFFFF"/>
-                </a:solidFill>
-                <a:latin typeface="Calibri"/>
-              </a:rPr>
-              <a:t>Calibration Internals</a:t>
-            </a:r>
-          </a:p>
-          <a:p>
-            <a:pPr>
-              <a:spcBef>
-                <a:spcPts val="1400"/>
-              </a:spcBef>
+              <a:rPr sz="1700" b="0" i="0">
+                <a:solidFill>
+                  <a:srgbClr val="232323"/>
+                </a:solidFill>
+                <a:latin typeface="Calibri"/>
+              </a:rPr>
+              <a:t>•  You leave with: one completed shortage-scenario analysis note per group</a:t>
+            </a:r>
+          </a:p>
+          <a:p>
+            <a:pPr marL="0" indent="0">
+              <a:spcAft>
+                <a:spcPts val="1000"/>
+              </a:spcAft>
             </a:pPr>
             <a:r>
               <a:rPr sz="1700" b="0" i="0">
                 <a:solidFill>
-                  <a:srgbClr val="FFFFFF"/>
-                </a:solidFill>
-                <a:latin typeface="Calibri"/>
-              </a:rPr>
-              <a:t>Modification &amp; sensitivity analysis, + course close · 180 minutes</a:t>
+                  <a:srgbClr val="232323"/>
+                </a:solidFill>
+                <a:latin typeface="Calibri"/>
+              </a:rPr>
+              <a:t>•  And one short DGE-METRIC application note with GDP-loss estimates for the shortage cases you compared</a:t>
+            </a:r>
+          </a:p>
+          <a:p>
+            <a:pPr marL="0" indent="0">
+              <a:spcAft>
+                <a:spcPts val="1000"/>
+              </a:spcAft>
+            </a:pPr>
+            <a:r>
+              <a:rPr sz="1700" b="0" i="0">
+                <a:solidFill>
+                  <a:srgbClr val="232323"/>
+                </a:solidFill>
+                <a:latin typeface="Calibri"/>
+              </a:rPr>
+              <a:t>•  And one toy-model transition-loss implementation note (Scenario 4 vs Scenario 1 on E, Y, I)</a:t>
+            </a:r>
+          </a:p>
+          <a:p>
+            <a:pPr marL="0" indent="0">
+              <a:spcAft>
+                <a:spcPts val="1000"/>
+              </a:spcAft>
+            </a:pPr>
+            <a:r>
+              <a:rPr sz="1700" b="0" i="0">
+                <a:solidFill>
+                  <a:srgbClr val="232323"/>
+                </a:solidFill>
+                <a:latin typeface="Calibri"/>
+              </a:rPr>
+              <a:t>•  Debrief: which shortage scenario produced the largest GDP loss, and why?</a:t>
+            </a:r>
+          </a:p>
+          <a:p>
+            <a:pPr marL="0" indent="0">
+              <a:spcAft>
+                <a:spcPts val="1000"/>
+              </a:spcAft>
+            </a:pPr>
+            <a:r>
+              <a:rPr sz="1700" b="0" i="0">
+                <a:solidFill>
+                  <a:srgbClr val="232323"/>
+                </a:solidFill>
+                <a:latin typeface="Calibri"/>
+              </a:rPr>
+              <a:t>•  Debrief: what caveat matters most when comparing GDP-loss estimates across scenarios?</a:t>
             </a:r>
           </a:p>
         </p:txBody>
@@ -3588,7 +3849,7 @@
 </file>
 
 <file path=ppt/slides/slide11.xml><?xml version="1.0" encoding="utf-8"?>
-<p:sld xmlns:a="http://schemas.openxmlformats.org/drawingml/2006/main" xmlns:p="http://schemas.openxmlformats.org/presentationml/2006/main" xmlns:r="http://schemas.openxmlformats.org/officeDocument/2006/relationships">
+<p:sld xmlns:a="http://schemas.openxmlformats.org/drawingml/2006/main" xmlns:r="http://schemas.openxmlformats.org/officeDocument/2006/relationships" xmlns:p="http://schemas.openxmlformats.org/presentationml/2006/main">
   <p:cSld>
     <p:spTree>
       <p:nvGrpSpPr>
@@ -3596,7 +3857,174 @@
         <p:cNvGrpSpPr/>
         <p:nvPr/>
       </p:nvGrpSpPr>
-      <p:grpSpPr/>
+      <p:grpSpPr>
+        <a:xfrm>
+          <a:off x="0" y="0"/>
+          <a:ext cx="0" cy="0"/>
+          <a:chOff x="0" y="0"/>
+          <a:chExt cx="0" cy="0"/>
+        </a:xfrm>
+      </p:grpSpPr>
+      <p:sp>
+        <p:nvSpPr>
+          <p:cNvPr id="2" name="Rectangle 1"/>
+          <p:cNvSpPr/>
+          <p:nvPr/>
+        </p:nvSpPr>
+        <p:spPr>
+          <a:xfrm>
+            <a:off x="0" y="0"/>
+            <a:ext cx="12191695" cy="6858000"/>
+          </a:xfrm>
+          <a:prstGeom prst="rect">
+            <a:avLst/>
+          </a:prstGeom>
+          <a:solidFill>
+            <a:srgbClr val="CC071E"/>
+          </a:solidFill>
+          <a:ln>
+            <a:noFill/>
+          </a:ln>
+          <a:effectLst/>
+        </p:spPr>
+        <p:style>
+          <a:lnRef idx="1">
+            <a:schemeClr val="accent1"/>
+          </a:lnRef>
+          <a:fillRef idx="3">
+            <a:schemeClr val="accent1"/>
+          </a:fillRef>
+          <a:effectRef idx="2">
+            <a:schemeClr val="accent1"/>
+          </a:effectRef>
+          <a:fontRef idx="minor">
+            <a:schemeClr val="lt1"/>
+          </a:fontRef>
+        </p:style>
+        <p:txBody>
+          <a:bodyPr rtlCol="0" anchor="ctr"/>
+          <a:lstStyle/>
+          <a:p>
+            <a:pPr algn="ctr"/>
+            <a:endParaRPr/>
+          </a:p>
+        </p:txBody>
+      </p:sp>
+      <p:pic>
+        <p:nvPicPr>
+          <p:cNvPr id="3" name="Picture 2" descr="GIZ_Logo.png"/>
+          <p:cNvPicPr>
+            <a:picLocks noChangeAspect="1"/>
+          </p:cNvPicPr>
+          <p:nvPr/>
+        </p:nvPicPr>
+        <p:blipFill>
+          <a:blip r:embed="rId2"/>
+          <a:stretch>
+            <a:fillRect/>
+          </a:stretch>
+        </p:blipFill>
+        <p:spPr>
+          <a:xfrm>
+            <a:off x="10088575" y="457200"/>
+            <a:ext cx="1656522" cy="457200"/>
+          </a:xfrm>
+          <a:prstGeom prst="rect">
+            <a:avLst/>
+          </a:prstGeom>
+        </p:spPr>
+      </p:pic>
+      <p:sp>
+        <p:nvSpPr>
+          <p:cNvPr id="4" name="TextBox 3"/>
+          <p:cNvSpPr txBox="1"/>
+          <p:nvPr/>
+        </p:nvSpPr>
+        <p:spPr>
+          <a:xfrm>
+            <a:off x="822960" y="2651760"/>
+            <a:ext cx="10058400" cy="2011680"/>
+          </a:xfrm>
+          <a:prstGeom prst="rect">
+            <a:avLst/>
+          </a:prstGeom>
+          <a:noFill/>
+        </p:spPr>
+        <p:txBody>
+          <a:bodyPr wrap="square">
+            <a:spAutoFit/>
+          </a:bodyPr>
+          <a:lstStyle/>
+          <a:p>
+            <a:pPr>
+              <a:spcAft>
+                <a:spcPts val="1000"/>
+              </a:spcAft>
+            </a:pPr>
+            <a:r>
+              <a:rPr sz="1500" b="1" i="0">
+                <a:solidFill>
+                  <a:srgbClr val="FFD2D2"/>
+                </a:solidFill>
+                <a:latin typeface="Calibri"/>
+              </a:rPr>
+              <a:t>ONLINE DAY 3 — AFTERNOON</a:t>
+            </a:r>
+          </a:p>
+          <a:p>
+            <a:r>
+              <a:rPr sz="3400" b="1" i="0">
+                <a:solidFill>
+                  <a:srgbClr val="FFFFFF"/>
+                </a:solidFill>
+                <a:latin typeface="Calibri"/>
+              </a:rPr>
+              <a:t>Calibration Internals</a:t>
+            </a:r>
+          </a:p>
+          <a:p>
+            <a:pPr>
+              <a:spcBef>
+                <a:spcPts val="1400"/>
+              </a:spcBef>
+            </a:pPr>
+            <a:r>
+              <a:rPr sz="1700" b="0" i="0">
+                <a:solidFill>
+                  <a:srgbClr val="FFFFFF"/>
+                </a:solidFill>
+                <a:latin typeface="Calibri"/>
+              </a:rPr>
+              <a:t>Modification &amp; sensitivity analysis, + course close · 180 minutes</a:t>
+            </a:r>
+          </a:p>
+        </p:txBody>
+      </p:sp>
+    </p:spTree>
+  </p:cSld>
+  <p:clrMapOvr>
+    <a:masterClrMapping/>
+  </p:clrMapOvr>
+</p:sld>
+</file>
+
+<file path=ppt/slides/slide12.xml><?xml version="1.0" encoding="utf-8"?>
+<p:sld xmlns:a="http://schemas.openxmlformats.org/drawingml/2006/main" xmlns:r="http://schemas.openxmlformats.org/officeDocument/2006/relationships" xmlns:p="http://schemas.openxmlformats.org/presentationml/2006/main">
+  <p:cSld>
+    <p:spTree>
+      <p:nvGrpSpPr>
+        <p:cNvPr id="1" name=""/>
+        <p:cNvGrpSpPr/>
+        <p:nvPr/>
+      </p:nvGrpSpPr>
+      <p:grpSpPr>
+        <a:xfrm>
+          <a:off x="0" y="0"/>
+          <a:ext cx="0" cy="0"/>
+          <a:chOff x="0" y="0"/>
+          <a:chExt cx="0" cy="0"/>
+        </a:xfrm>
+      </p:grpSpPr>
       <p:sp>
         <p:nvSpPr>
           <p:cNvPr id="2" name="Rectangle 1"/>
@@ -3638,6 +4066,7 @@
           <a:lstStyle/>
           <a:p>
             <a:pPr algn="ctr"/>
+            <a:endParaRPr/>
           </a:p>
         </p:txBody>
       </p:sp>
@@ -3682,6 +4111,7 @@
           <a:lstStyle/>
           <a:p>
             <a:pPr algn="ctr"/>
+            <a:endParaRPr/>
           </a:p>
         </p:txBody>
       </p:sp>
@@ -3714,7 +4144,7 @@
                 </a:solidFill>
                 <a:latin typeface="Calibri"/>
               </a:rPr>
-              <a:t>This Afternoon's Agenda — 7 Blocks, 180 Minutes (+1 break)</a:t>
+              <a:t>This Afternoon's Agenda — 7 Blocks, 240 Minutes (+1 break)</a:t>
             </a:r>
           </a:p>
         </p:txBody>
@@ -3784,6 +4214,7 @@
           <a:lstStyle/>
           <a:p>
             <a:pPr algn="ctr"/>
+            <a:endParaRPr/>
           </a:p>
         </p:txBody>
       </p:sp>
@@ -3851,7 +4282,7 @@
                 </a:solidFill>
                 <a:latin typeface="Calibri"/>
               </a:rPr>
-              <a:t>8</a:t>
+              <a:t>9</a:t>
             </a:r>
           </a:p>
         </p:txBody>
@@ -3875,9 +4306,27 @@
                 <a:tableStyleId>{5C22544A-7EE6-4342-B048-85BDC9FD1C3A}</a:tableStyleId>
               </a:tblPr>
               <a:tblGrid>
-                <a:gridCol w="4003358"/>
-                <a:gridCol w="941966"/>
-                <a:gridCol w="6240529"/>
+                <a:gridCol w="4003358">
+                  <a:extLst>
+                    <a:ext uri="{9D8B030D-6E8A-4147-A177-3AD203B41FA5}">
+                      <a16:colId xmlns:a16="http://schemas.microsoft.com/office/drawing/2014/main" val="20000"/>
+                    </a:ext>
+                  </a:extLst>
+                </a:gridCol>
+                <a:gridCol w="941966">
+                  <a:extLst>
+                    <a:ext uri="{9D8B030D-6E8A-4147-A177-3AD203B41FA5}">
+                      <a16:colId xmlns:a16="http://schemas.microsoft.com/office/drawing/2014/main" val="20001"/>
+                    </a:ext>
+                  </a:extLst>
+                </a:gridCol>
+                <a:gridCol w="6240529">
+                  <a:extLst>
+                    <a:ext uri="{9D8B030D-6E8A-4147-A177-3AD203B41FA5}">
+                      <a16:colId xmlns:a16="http://schemas.microsoft.com/office/drawing/2014/main" val="20002"/>
+                    </a:ext>
+                  </a:extLst>
+                </a:gridCol>
               </a:tblGrid>
               <a:tr h="543560">
                 <a:tc>
@@ -3896,7 +4345,7 @@
                       </a:r>
                     </a:p>
                   </a:txBody>
-                  <a:tcPr anchor="ctr" marT="50800" marB="50800">
+                  <a:tcPr marT="50800" marB="50800" anchor="ctr">
                     <a:solidFill>
                       <a:srgbClr val="CC071E"/>
                     </a:solidFill>
@@ -3918,7 +4367,7 @@
                       </a:r>
                     </a:p>
                   </a:txBody>
-                  <a:tcPr anchor="ctr" marT="50800" marB="50800">
+                  <a:tcPr marT="50800" marB="50800" anchor="ctr">
                     <a:solidFill>
                       <a:srgbClr val="CC071E"/>
                     </a:solidFill>
@@ -3940,17 +4389,22 @@
                       </a:r>
                     </a:p>
                   </a:txBody>
-                  <a:tcPr anchor="ctr" marT="50800" marB="50800">
+                  <a:tcPr marT="50800" marB="50800" anchor="ctr">
                     <a:solidFill>
                       <a:srgbClr val="CC071E"/>
                     </a:solidFill>
                   </a:tcPr>
                 </a:tc>
+                <a:extLst>
+                  <a:ext uri="{0D108BD9-81ED-4DB2-BD59-A6C34878D82A}">
+                    <a16:rowId xmlns:a16="http://schemas.microsoft.com/office/drawing/2014/main" val="10000"/>
+                  </a:ext>
+                </a:extLst>
               </a:tr>
               <a:tr h="543560">
                 <a:tc>
                   <a:txBody>
-                    <a:bodyPr wrap="square"/>
+                    <a:bodyPr/>
                     <a:lstStyle/>
                     <a:p>
                       <a:r>
@@ -3964,7 +4418,7 @@
                       </a:r>
                     </a:p>
                   </a:txBody>
-                  <a:tcPr anchor="ctr" marT="38100" marB="38100">
+                  <a:tcPr marT="38100" marB="38100" anchor="ctr">
                     <a:solidFill>
                       <a:srgbClr val="FFFFFF"/>
                     </a:solidFill>
@@ -3972,7 +4426,7 @@
                 </a:tc>
                 <a:tc>
                   <a:txBody>
-                    <a:bodyPr wrap="square"/>
+                    <a:bodyPr/>
                     <a:lstStyle/>
                     <a:p>
                       <a:r>
@@ -3982,11 +4436,11 @@
                           </a:solidFill>
                           <a:latin typeface="Calibri"/>
                         </a:rPr>
-                        <a:t>10</a:t>
+                        <a:t>15</a:t>
                       </a:r>
                     </a:p>
                   </a:txBody>
-                  <a:tcPr anchor="ctr" marT="38100" marB="38100">
+                  <a:tcPr marT="38100" marB="38100" anchor="ctr">
                     <a:solidFill>
                       <a:srgbClr val="FFFFFF"/>
                     </a:solidFill>
@@ -3994,7 +4448,7 @@
                 </a:tc>
                 <a:tc>
                   <a:txBody>
-                    <a:bodyPr wrap="square"/>
+                    <a:bodyPr/>
                     <a:lstStyle/>
                     <a:p>
                       <a:r>
@@ -4008,17 +4462,22 @@
                       </a:r>
                     </a:p>
                   </a:txBody>
-                  <a:tcPr anchor="ctr" marT="38100" marB="38100">
+                  <a:tcPr marT="38100" marB="38100" anchor="ctr">
                     <a:solidFill>
                       <a:srgbClr val="FFFFFF"/>
                     </a:solidFill>
                   </a:tcPr>
                 </a:tc>
+                <a:extLst>
+                  <a:ext uri="{0D108BD9-81ED-4DB2-BD59-A6C34878D82A}">
+                    <a16:rowId xmlns:a16="http://schemas.microsoft.com/office/drawing/2014/main" val="10001"/>
+                  </a:ext>
+                </a:extLst>
               </a:tr>
               <a:tr h="543560">
                 <a:tc>
                   <a:txBody>
-                    <a:bodyPr wrap="square"/>
+                    <a:bodyPr/>
                     <a:lstStyle/>
                     <a:p>
                       <a:r>
@@ -4032,7 +4491,7 @@
                       </a:r>
                     </a:p>
                   </a:txBody>
-                  <a:tcPr anchor="ctr" marT="38100" marB="38100">
+                  <a:tcPr marT="38100" marB="38100" anchor="ctr">
                     <a:solidFill>
                       <a:srgbClr val="F5F5F5"/>
                     </a:solidFill>
@@ -4040,7 +4499,7 @@
                 </a:tc>
                 <a:tc>
                   <a:txBody>
-                    <a:bodyPr wrap="square"/>
+                    <a:bodyPr/>
                     <a:lstStyle/>
                     <a:p>
                       <a:r>
@@ -4050,11 +4509,11 @@
                           </a:solidFill>
                           <a:latin typeface="Calibri"/>
                         </a:rPr>
-                        <a:t>30</a:t>
+                        <a:t>40</a:t>
                       </a:r>
                     </a:p>
                   </a:txBody>
-                  <a:tcPr anchor="ctr" marT="38100" marB="38100">
+                  <a:tcPr marT="38100" marB="38100" anchor="ctr">
                     <a:solidFill>
                       <a:srgbClr val="F5F5F5"/>
                     </a:solidFill>
@@ -4062,7 +4521,7 @@
                 </a:tc>
                 <a:tc>
                   <a:txBody>
-                    <a:bodyPr wrap="square"/>
+                    <a:bodyPr/>
                     <a:lstStyle/>
                     <a:p>
                       <a:r>
@@ -4076,17 +4535,22 @@
                       </a:r>
                     </a:p>
                   </a:txBody>
-                  <a:tcPr anchor="ctr" marT="38100" marB="38100">
+                  <a:tcPr marT="38100" marB="38100" anchor="ctr">
                     <a:solidFill>
                       <a:srgbClr val="F5F5F5"/>
                     </a:solidFill>
                   </a:tcPr>
                 </a:tc>
+                <a:extLst>
+                  <a:ext uri="{0D108BD9-81ED-4DB2-BD59-A6C34878D82A}">
+                    <a16:rowId xmlns:a16="http://schemas.microsoft.com/office/drawing/2014/main" val="10002"/>
+                  </a:ext>
+                </a:extLst>
               </a:tr>
               <a:tr h="543560">
                 <a:tc>
                   <a:txBody>
-                    <a:bodyPr wrap="square"/>
+                    <a:bodyPr/>
                     <a:lstStyle/>
                     <a:p>
                       <a:r>
@@ -4100,7 +4564,7 @@
                       </a:r>
                     </a:p>
                   </a:txBody>
-                  <a:tcPr anchor="ctr" marT="38100" marB="38100">
+                  <a:tcPr marT="38100" marB="38100" anchor="ctr">
                     <a:solidFill>
                       <a:srgbClr val="FFFFFF"/>
                     </a:solidFill>
@@ -4108,7 +4572,7 @@
                 </a:tc>
                 <a:tc>
                   <a:txBody>
-                    <a:bodyPr wrap="square"/>
+                    <a:bodyPr/>
                     <a:lstStyle/>
                     <a:p>
                       <a:r>
@@ -4118,11 +4582,11 @@
                           </a:solidFill>
                           <a:latin typeface="Calibri"/>
                         </a:rPr>
-                        <a:t>25</a:t>
+                        <a:t>35</a:t>
                       </a:r>
                     </a:p>
                   </a:txBody>
-                  <a:tcPr anchor="ctr" marT="38100" marB="38100">
+                  <a:tcPr marT="38100" marB="38100" anchor="ctr">
                     <a:solidFill>
                       <a:srgbClr val="FFFFFF"/>
                     </a:solidFill>
@@ -4130,7 +4594,7 @@
                 </a:tc>
                 <a:tc>
                   <a:txBody>
-                    <a:bodyPr wrap="square"/>
+                    <a:bodyPr/>
                     <a:lstStyle/>
                     <a:p>
                       <a:r>
@@ -4144,17 +4608,22 @@
                       </a:r>
                     </a:p>
                   </a:txBody>
-                  <a:tcPr anchor="ctr" marT="38100" marB="38100">
+                  <a:tcPr marT="38100" marB="38100" anchor="ctr">
                     <a:solidFill>
                       <a:srgbClr val="FFFFFF"/>
                     </a:solidFill>
                   </a:tcPr>
                 </a:tc>
+                <a:extLst>
+                  <a:ext uri="{0D108BD9-81ED-4DB2-BD59-A6C34878D82A}">
+                    <a16:rowId xmlns:a16="http://schemas.microsoft.com/office/drawing/2014/main" val="10003"/>
+                  </a:ext>
+                </a:extLst>
               </a:tr>
               <a:tr h="543560">
                 <a:tc>
                   <a:txBody>
-                    <a:bodyPr wrap="square"/>
+                    <a:bodyPr/>
                     <a:lstStyle/>
                     <a:p>
                       <a:r>
@@ -4168,7 +4637,7 @@
                       </a:r>
                     </a:p>
                   </a:txBody>
-                  <a:tcPr anchor="ctr" marT="38100" marB="38100">
+                  <a:tcPr marT="38100" marB="38100" anchor="ctr">
                     <a:solidFill>
                       <a:srgbClr val="F5F5F5"/>
                     </a:solidFill>
@@ -4176,7 +4645,7 @@
                 </a:tc>
                 <a:tc>
                   <a:txBody>
-                    <a:bodyPr wrap="square"/>
+                    <a:bodyPr/>
                     <a:lstStyle/>
                     <a:p>
                       <a:r>
@@ -4190,7 +4659,7 @@
                       </a:r>
                     </a:p>
                   </a:txBody>
-                  <a:tcPr anchor="ctr" marT="38100" marB="38100">
+                  <a:tcPr marT="38100" marB="38100" anchor="ctr">
                     <a:solidFill>
                       <a:srgbClr val="F5F5F5"/>
                     </a:solidFill>
@@ -4198,31 +4667,28 @@
                 </a:tc>
                 <a:tc>
                   <a:txBody>
-                    <a:bodyPr wrap="square"/>
+                    <a:bodyPr/>
                     <a:lstStyle/>
                     <a:p>
-                      <a:r>
-                        <a:rPr sz="1300" b="0" i="0">
-                          <a:solidFill>
-                            <a:srgbClr val="232323"/>
-                          </a:solidFill>
-                          <a:latin typeface="Calibri"/>
-                        </a:rPr>
-                        <a:t/>
-                      </a:r>
+                      <a:endParaRPr/>
                     </a:p>
                   </a:txBody>
-                  <a:tcPr anchor="ctr" marT="38100" marB="38100">
+                  <a:tcPr marT="38100" marB="38100" anchor="ctr">
                     <a:solidFill>
                       <a:srgbClr val="F5F5F5"/>
                     </a:solidFill>
                   </a:tcPr>
                 </a:tc>
+                <a:extLst>
+                  <a:ext uri="{0D108BD9-81ED-4DB2-BD59-A6C34878D82A}">
+                    <a16:rowId xmlns:a16="http://schemas.microsoft.com/office/drawing/2014/main" val="10004"/>
+                  </a:ext>
+                </a:extLst>
               </a:tr>
               <a:tr h="543560">
                 <a:tc>
                   <a:txBody>
-                    <a:bodyPr wrap="square"/>
+                    <a:bodyPr/>
                     <a:lstStyle/>
                     <a:p>
                       <a:r>
@@ -4236,7 +4702,7 @@
                       </a:r>
                     </a:p>
                   </a:txBody>
-                  <a:tcPr anchor="ctr" marT="38100" marB="38100">
+                  <a:tcPr marT="38100" marB="38100" anchor="ctr">
                     <a:solidFill>
                       <a:srgbClr val="FFFFFF"/>
                     </a:solidFill>
@@ -4244,7 +4710,7 @@
                 </a:tc>
                 <a:tc>
                   <a:txBody>
-                    <a:bodyPr wrap="square"/>
+                    <a:bodyPr/>
                     <a:lstStyle/>
                     <a:p>
                       <a:r>
@@ -4254,11 +4720,11 @@
                           </a:solidFill>
                           <a:latin typeface="Calibri"/>
                         </a:rPr>
-                        <a:t>30</a:t>
+                        <a:t>40</a:t>
                       </a:r>
                     </a:p>
                   </a:txBody>
-                  <a:tcPr anchor="ctr" marT="38100" marB="38100">
+                  <a:tcPr marT="38100" marB="38100" anchor="ctr">
                     <a:solidFill>
                       <a:srgbClr val="FFFFFF"/>
                     </a:solidFill>
@@ -4266,7 +4732,7 @@
                 </a:tc>
                 <a:tc>
                   <a:txBody>
-                    <a:bodyPr wrap="square"/>
+                    <a:bodyPr/>
                     <a:lstStyle/>
                     <a:p>
                       <a:r>
@@ -4280,17 +4746,22 @@
                       </a:r>
                     </a:p>
                   </a:txBody>
-                  <a:tcPr anchor="ctr" marT="38100" marB="38100">
+                  <a:tcPr marT="38100" marB="38100" anchor="ctr">
                     <a:solidFill>
                       <a:srgbClr val="FFFFFF"/>
                     </a:solidFill>
                   </a:tcPr>
                 </a:tc>
+                <a:extLst>
+                  <a:ext uri="{0D108BD9-81ED-4DB2-BD59-A6C34878D82A}">
+                    <a16:rowId xmlns:a16="http://schemas.microsoft.com/office/drawing/2014/main" val="10005"/>
+                  </a:ext>
+                </a:extLst>
               </a:tr>
               <a:tr h="543560">
                 <a:tc>
                   <a:txBody>
-                    <a:bodyPr wrap="square"/>
+                    <a:bodyPr/>
                     <a:lstStyle/>
                     <a:p>
                       <a:r>
@@ -4304,7 +4775,7 @@
                       </a:r>
                     </a:p>
                   </a:txBody>
-                  <a:tcPr anchor="ctr" marT="38100" marB="38100">
+                  <a:tcPr marT="38100" marB="38100" anchor="ctr">
                     <a:solidFill>
                       <a:srgbClr val="F5F5F5"/>
                     </a:solidFill>
@@ -4312,7 +4783,7 @@
                 </a:tc>
                 <a:tc>
                   <a:txBody>
-                    <a:bodyPr wrap="square"/>
+                    <a:bodyPr/>
                     <a:lstStyle/>
                     <a:p>
                       <a:r>
@@ -4322,11 +4793,11 @@
                           </a:solidFill>
                           <a:latin typeface="Calibri"/>
                         </a:rPr>
-                        <a:t>30</a:t>
+                        <a:t>40</a:t>
                       </a:r>
                     </a:p>
                   </a:txBody>
-                  <a:tcPr anchor="ctr" marT="38100" marB="38100">
+                  <a:tcPr marT="38100" marB="38100" anchor="ctr">
                     <a:solidFill>
                       <a:srgbClr val="F5F5F5"/>
                     </a:solidFill>
@@ -4334,7 +4805,7 @@
                 </a:tc>
                 <a:tc>
                   <a:txBody>
-                    <a:bodyPr wrap="square"/>
+                    <a:bodyPr/>
                     <a:lstStyle/>
                     <a:p>
                       <a:r>
@@ -4348,17 +4819,22 @@
                       </a:r>
                     </a:p>
                   </a:txBody>
-                  <a:tcPr anchor="ctr" marT="38100" marB="38100">
+                  <a:tcPr marT="38100" marB="38100" anchor="ctr">
                     <a:solidFill>
                       <a:srgbClr val="F5F5F5"/>
                     </a:solidFill>
                   </a:tcPr>
                 </a:tc>
+                <a:extLst>
+                  <a:ext uri="{0D108BD9-81ED-4DB2-BD59-A6C34878D82A}">
+                    <a16:rowId xmlns:a16="http://schemas.microsoft.com/office/drawing/2014/main" val="10006"/>
+                  </a:ext>
+                </a:extLst>
               </a:tr>
               <a:tr h="543560">
                 <a:tc>
                   <a:txBody>
-                    <a:bodyPr wrap="square"/>
+                    <a:bodyPr/>
                     <a:lstStyle/>
                     <a:p>
                       <a:r>
@@ -4372,7 +4848,7 @@
                       </a:r>
                     </a:p>
                   </a:txBody>
-                  <a:tcPr anchor="ctr" marT="38100" marB="38100">
+                  <a:tcPr marT="38100" marB="38100" anchor="ctr">
                     <a:solidFill>
                       <a:srgbClr val="FFFFFF"/>
                     </a:solidFill>
@@ -4380,7 +4856,7 @@
                 </a:tc>
                 <a:tc>
                   <a:txBody>
-                    <a:bodyPr wrap="square"/>
+                    <a:bodyPr/>
                     <a:lstStyle/>
                     <a:p>
                       <a:r>
@@ -4390,11 +4866,11 @@
                           </a:solidFill>
                           <a:latin typeface="Calibri"/>
                         </a:rPr>
-                        <a:t>10</a:t>
+                        <a:t>15</a:t>
                       </a:r>
                     </a:p>
                   </a:txBody>
-                  <a:tcPr anchor="ctr" marT="38100" marB="38100">
+                  <a:tcPr marT="38100" marB="38100" anchor="ctr">
                     <a:solidFill>
                       <a:srgbClr val="FFFFFF"/>
                     </a:solidFill>
@@ -4402,7 +4878,7 @@
                 </a:tc>
                 <a:tc>
                   <a:txBody>
-                    <a:bodyPr wrap="square"/>
+                    <a:bodyPr/>
                     <a:lstStyle/>
                     <a:p>
                       <a:r>
@@ -4416,17 +4892,22 @@
                       </a:r>
                     </a:p>
                   </a:txBody>
-                  <a:tcPr anchor="ctr" marT="38100" marB="38100">
+                  <a:tcPr marT="38100" marB="38100" anchor="ctr">
                     <a:solidFill>
                       <a:srgbClr val="FFFFFF"/>
                     </a:solidFill>
                   </a:tcPr>
                 </a:tc>
+                <a:extLst>
+                  <a:ext uri="{0D108BD9-81ED-4DB2-BD59-A6C34878D82A}">
+                    <a16:rowId xmlns:a16="http://schemas.microsoft.com/office/drawing/2014/main" val="10007"/>
+                  </a:ext>
+                </a:extLst>
               </a:tr>
               <a:tr h="543560">
                 <a:tc>
                   <a:txBody>
-                    <a:bodyPr wrap="square"/>
+                    <a:bodyPr/>
                     <a:lstStyle/>
                     <a:p>
                       <a:r>
@@ -4440,7 +4921,7 @@
                       </a:r>
                     </a:p>
                   </a:txBody>
-                  <a:tcPr anchor="ctr" marT="38100" marB="38100">
+                  <a:tcPr marT="38100" marB="38100" anchor="ctr">
                     <a:solidFill>
                       <a:srgbClr val="F5F5F5"/>
                     </a:solidFill>
@@ -4448,7 +4929,7 @@
                 </a:tc>
                 <a:tc>
                   <a:txBody>
-                    <a:bodyPr wrap="square"/>
+                    <a:bodyPr/>
                     <a:lstStyle/>
                     <a:p>
                       <a:r>
@@ -4458,11 +4939,11 @@
                           </a:solidFill>
                           <a:latin typeface="Calibri"/>
                         </a:rPr>
-                        <a:t>30</a:t>
+                        <a:t>40</a:t>
                       </a:r>
                     </a:p>
                   </a:txBody>
-                  <a:tcPr anchor="ctr" marT="38100" marB="38100">
+                  <a:tcPr marT="38100" marB="38100" anchor="ctr">
                     <a:solidFill>
                       <a:srgbClr val="F5F5F5"/>
                     </a:solidFill>
@@ -4470,7 +4951,7 @@
                 </a:tc>
                 <a:tc>
                   <a:txBody>
-                    <a:bodyPr wrap="square"/>
+                    <a:bodyPr/>
                     <a:lstStyle/>
                     <a:p>
                       <a:r>
@@ -4484,12 +4965,17 @@
                       </a:r>
                     </a:p>
                   </a:txBody>
-                  <a:tcPr anchor="ctr" marT="38100" marB="38100">
+                  <a:tcPr marT="38100" marB="38100" anchor="ctr">
                     <a:solidFill>
                       <a:srgbClr val="F5F5F5"/>
                     </a:solidFill>
                   </a:tcPr>
                 </a:tc>
+                <a:extLst>
+                  <a:ext uri="{0D108BD9-81ED-4DB2-BD59-A6C34878D82A}">
+                    <a16:rowId xmlns:a16="http://schemas.microsoft.com/office/drawing/2014/main" val="10008"/>
+                  </a:ext>
+                </a:extLst>
               </a:tr>
             </a:tbl>
           </a:graphicData>
@@ -4503,8 +4989,8 @@
 </p:sld>
 </file>
 
-<file path=ppt/slides/slide12.xml><?xml version="1.0" encoding="utf-8"?>
-<p:sld xmlns:a="http://schemas.openxmlformats.org/drawingml/2006/main" xmlns:p="http://schemas.openxmlformats.org/presentationml/2006/main" xmlns:r="http://schemas.openxmlformats.org/officeDocument/2006/relationships">
+<file path=ppt/slides/slide13.xml><?xml version="1.0" encoding="utf-8"?>
+<p:sld xmlns:a="http://schemas.openxmlformats.org/drawingml/2006/main" xmlns:r="http://schemas.openxmlformats.org/officeDocument/2006/relationships" xmlns:p="http://schemas.openxmlformats.org/presentationml/2006/main">
   <p:cSld>
     <p:spTree>
       <p:nvGrpSpPr>
@@ -4512,7 +4998,14 @@
         <p:cNvGrpSpPr/>
         <p:nvPr/>
       </p:nvGrpSpPr>
-      <p:grpSpPr/>
+      <p:grpSpPr>
+        <a:xfrm>
+          <a:off x="0" y="0"/>
+          <a:ext cx="0" cy="0"/>
+          <a:chOff x="0" y="0"/>
+          <a:chExt cx="0" cy="0"/>
+        </a:xfrm>
+      </p:grpSpPr>
       <p:sp>
         <p:nvSpPr>
           <p:cNvPr id="2" name="Rectangle 1"/>
@@ -4554,6 +5047,7 @@
           <a:lstStyle/>
           <a:p>
             <a:pPr algn="ctr"/>
+            <a:endParaRPr/>
           </a:p>
         </p:txBody>
       </p:sp>
@@ -4598,6 +5092,7 @@
           <a:lstStyle/>
           <a:p>
             <a:pPr algn="ctr"/>
+            <a:endParaRPr/>
           </a:p>
         </p:txBody>
       </p:sp>
@@ -4635,7 +5130,7 @@
                 </a:solidFill>
                 <a:latin typeface="Calibri"/>
               </a:rPr>
-              <a:t>BLOCK 1 · 10 MIN</a:t>
+              <a:t>BLOCK 1 · 15 MIN</a:t>
             </a:r>
           </a:p>
           <a:p>
@@ -4716,6 +5211,7 @@
           <a:lstStyle/>
           <a:p>
             <a:pPr algn="ctr"/>
+            <a:endParaRPr/>
           </a:p>
         </p:txBody>
       </p:sp>
@@ -4783,7 +5279,7 @@
                 </a:solidFill>
                 <a:latin typeface="Calibri"/>
               </a:rPr>
-              <a:t>9</a:t>
+              <a:t>10</a:t>
             </a:r>
           </a:p>
         </p:txBody>
@@ -4807,9 +5303,27 @@
                 <a:tableStyleId>{5C22544A-7EE6-4342-B048-85BDC9FD1C3A}</a:tableStyleId>
               </a:tblPr>
               <a:tblGrid>
-                <a:gridCol w="1665978"/>
-                <a:gridCol w="4283944"/>
-                <a:gridCol w="5235932"/>
+                <a:gridCol w="1665978">
+                  <a:extLst>
+                    <a:ext uri="{9D8B030D-6E8A-4147-A177-3AD203B41FA5}">
+                      <a16:colId xmlns:a16="http://schemas.microsoft.com/office/drawing/2014/main" val="20000"/>
+                    </a:ext>
+                  </a:extLst>
+                </a:gridCol>
+                <a:gridCol w="4283944">
+                  <a:extLst>
+                    <a:ext uri="{9D8B030D-6E8A-4147-A177-3AD203B41FA5}">
+                      <a16:colId xmlns:a16="http://schemas.microsoft.com/office/drawing/2014/main" val="20001"/>
+                    </a:ext>
+                  </a:extLst>
+                </a:gridCol>
+                <a:gridCol w="5235932">
+                  <a:extLst>
+                    <a:ext uri="{9D8B030D-6E8A-4147-A177-3AD203B41FA5}">
+                      <a16:colId xmlns:a16="http://schemas.microsoft.com/office/drawing/2014/main" val="20002"/>
+                    </a:ext>
+                  </a:extLst>
+                </a:gridCol>
               </a:tblGrid>
               <a:tr h="877824">
                 <a:tc>
@@ -4828,7 +5342,7 @@
                       </a:r>
                     </a:p>
                   </a:txBody>
-                  <a:tcPr anchor="ctr" marT="50800" marB="50800">
+                  <a:tcPr marT="50800" marB="50800" anchor="ctr">
                     <a:solidFill>
                       <a:srgbClr val="CC071E"/>
                     </a:solidFill>
@@ -4850,7 +5364,7 @@
                       </a:r>
                     </a:p>
                   </a:txBody>
-                  <a:tcPr anchor="ctr" marT="50800" marB="50800">
+                  <a:tcPr marT="50800" marB="50800" anchor="ctr">
                     <a:solidFill>
                       <a:srgbClr val="CC071E"/>
                     </a:solidFill>
@@ -4872,17 +5386,22 @@
                       </a:r>
                     </a:p>
                   </a:txBody>
-                  <a:tcPr anchor="ctr" marT="50800" marB="50800">
+                  <a:tcPr marT="50800" marB="50800" anchor="ctr">
                     <a:solidFill>
                       <a:srgbClr val="CC071E"/>
                     </a:solidFill>
                   </a:tcPr>
                 </a:tc>
+                <a:extLst>
+                  <a:ext uri="{0D108BD9-81ED-4DB2-BD59-A6C34878D82A}">
+                    <a16:rowId xmlns:a16="http://schemas.microsoft.com/office/drawing/2014/main" val="10000"/>
+                  </a:ext>
+                </a:extLst>
               </a:tr>
               <a:tr h="877824">
                 <a:tc>
                   <a:txBody>
-                    <a:bodyPr wrap="square"/>
+                    <a:bodyPr/>
                     <a:lstStyle/>
                     <a:p>
                       <a:r>
@@ -4896,7 +5415,7 @@
                       </a:r>
                     </a:p>
                   </a:txBody>
-                  <a:tcPr anchor="ctr" marT="38100" marB="38100">
+                  <a:tcPr marT="38100" marB="38100" anchor="ctr">
                     <a:solidFill>
                       <a:srgbClr val="FFFFFF"/>
                     </a:solidFill>
@@ -4904,7 +5423,7 @@
                 </a:tc>
                 <a:tc>
                   <a:txBody>
-                    <a:bodyPr wrap="square"/>
+                    <a:bodyPr/>
                     <a:lstStyle/>
                     <a:p>
                       <a:r>
@@ -4918,7 +5437,7 @@
                       </a:r>
                     </a:p>
                   </a:txBody>
-                  <a:tcPr anchor="ctr" marT="38100" marB="38100">
+                  <a:tcPr marT="38100" marB="38100" anchor="ctr">
                     <a:solidFill>
                       <a:srgbClr val="FFFFFF"/>
                     </a:solidFill>
@@ -4926,7 +5445,7 @@
                 </a:tc>
                 <a:tc>
                   <a:txBody>
-                    <a:bodyPr wrap="square"/>
+                    <a:bodyPr/>
                     <a:lstStyle/>
                     <a:p>
                       <a:r>
@@ -4940,17 +5459,22 @@
                       </a:r>
                     </a:p>
                   </a:txBody>
-                  <a:tcPr anchor="ctr" marT="38100" marB="38100">
+                  <a:tcPr marT="38100" marB="38100" anchor="ctr">
                     <a:solidFill>
                       <a:srgbClr val="FFFFFF"/>
                     </a:solidFill>
                   </a:tcPr>
                 </a:tc>
+                <a:extLst>
+                  <a:ext uri="{0D108BD9-81ED-4DB2-BD59-A6C34878D82A}">
+                    <a16:rowId xmlns:a16="http://schemas.microsoft.com/office/drawing/2014/main" val="10001"/>
+                  </a:ext>
+                </a:extLst>
               </a:tr>
               <a:tr h="877824">
                 <a:tc>
                   <a:txBody>
-                    <a:bodyPr wrap="square"/>
+                    <a:bodyPr/>
                     <a:lstStyle/>
                     <a:p>
                       <a:r>
@@ -4964,7 +5488,7 @@
                       </a:r>
                     </a:p>
                   </a:txBody>
-                  <a:tcPr anchor="ctr" marT="38100" marB="38100">
+                  <a:tcPr marT="38100" marB="38100" anchor="ctr">
                     <a:solidFill>
                       <a:srgbClr val="F5F5F5"/>
                     </a:solidFill>
@@ -4972,7 +5496,7 @@
                 </a:tc>
                 <a:tc>
                   <a:txBody>
-                    <a:bodyPr wrap="square"/>
+                    <a:bodyPr/>
                     <a:lstStyle/>
                     <a:p>
                       <a:r>
@@ -4986,7 +5510,7 @@
                       </a:r>
                     </a:p>
                   </a:txBody>
-                  <a:tcPr anchor="ctr" marT="38100" marB="38100">
+                  <a:tcPr marT="38100" marB="38100" anchor="ctr">
                     <a:solidFill>
                       <a:srgbClr val="F5F5F5"/>
                     </a:solidFill>
@@ -4994,7 +5518,7 @@
                 </a:tc>
                 <a:tc>
                   <a:txBody>
-                    <a:bodyPr wrap="square"/>
+                    <a:bodyPr/>
                     <a:lstStyle/>
                     <a:p>
                       <a:r>
@@ -5008,17 +5532,22 @@
                       </a:r>
                     </a:p>
                   </a:txBody>
-                  <a:tcPr anchor="ctr" marT="38100" marB="38100">
+                  <a:tcPr marT="38100" marB="38100" anchor="ctr">
                     <a:solidFill>
                       <a:srgbClr val="F5F5F5"/>
                     </a:solidFill>
                   </a:tcPr>
                 </a:tc>
+                <a:extLst>
+                  <a:ext uri="{0D108BD9-81ED-4DB2-BD59-A6C34878D82A}">
+                    <a16:rowId xmlns:a16="http://schemas.microsoft.com/office/drawing/2014/main" val="10002"/>
+                  </a:ext>
+                </a:extLst>
               </a:tr>
               <a:tr h="877824">
                 <a:tc>
                   <a:txBody>
-                    <a:bodyPr wrap="square"/>
+                    <a:bodyPr/>
                     <a:lstStyle/>
                     <a:p>
                       <a:r>
@@ -5032,7 +5561,7 @@
                       </a:r>
                     </a:p>
                   </a:txBody>
-                  <a:tcPr anchor="ctr" marT="38100" marB="38100">
+                  <a:tcPr marT="38100" marB="38100" anchor="ctr">
                     <a:solidFill>
                       <a:srgbClr val="FFFFFF"/>
                     </a:solidFill>
@@ -5040,7 +5569,7 @@
                 </a:tc>
                 <a:tc>
                   <a:txBody>
-                    <a:bodyPr wrap="square"/>
+                    <a:bodyPr/>
                     <a:lstStyle/>
                     <a:p>
                       <a:r>
@@ -5054,7 +5583,7 @@
                       </a:r>
                     </a:p>
                   </a:txBody>
-                  <a:tcPr anchor="ctr" marT="38100" marB="38100">
+                  <a:tcPr marT="38100" marB="38100" anchor="ctr">
                     <a:solidFill>
                       <a:srgbClr val="FFFFFF"/>
                     </a:solidFill>
@@ -5062,7 +5591,7 @@
                 </a:tc>
                 <a:tc>
                   <a:txBody>
-                    <a:bodyPr wrap="square"/>
+                    <a:bodyPr/>
                     <a:lstStyle/>
                     <a:p>
                       <a:r>
@@ -5076,17 +5605,22 @@
                       </a:r>
                     </a:p>
                   </a:txBody>
-                  <a:tcPr anchor="ctr" marT="38100" marB="38100">
+                  <a:tcPr marT="38100" marB="38100" anchor="ctr">
                     <a:solidFill>
                       <a:srgbClr val="FFFFFF"/>
                     </a:solidFill>
                   </a:tcPr>
                 </a:tc>
+                <a:extLst>
+                  <a:ext uri="{0D108BD9-81ED-4DB2-BD59-A6C34878D82A}">
+                    <a16:rowId xmlns:a16="http://schemas.microsoft.com/office/drawing/2014/main" val="10003"/>
+                  </a:ext>
+                </a:extLst>
               </a:tr>
               <a:tr h="877824">
                 <a:tc>
                   <a:txBody>
-                    <a:bodyPr wrap="square"/>
+                    <a:bodyPr/>
                     <a:lstStyle/>
                     <a:p>
                       <a:r>
@@ -5100,7 +5634,7 @@
                       </a:r>
                     </a:p>
                   </a:txBody>
-                  <a:tcPr anchor="ctr" marT="38100" marB="38100">
+                  <a:tcPr marT="38100" marB="38100" anchor="ctr">
                     <a:solidFill>
                       <a:srgbClr val="F5F5F5"/>
                     </a:solidFill>
@@ -5108,7 +5642,7 @@
                 </a:tc>
                 <a:tc>
                   <a:txBody>
-                    <a:bodyPr wrap="square"/>
+                    <a:bodyPr/>
                     <a:lstStyle/>
                     <a:p>
                       <a:r>
@@ -5122,7 +5656,7 @@
                       </a:r>
                     </a:p>
                   </a:txBody>
-                  <a:tcPr anchor="ctr" marT="38100" marB="38100">
+                  <a:tcPr marT="38100" marB="38100" anchor="ctr">
                     <a:solidFill>
                       <a:srgbClr val="F5F5F5"/>
                     </a:solidFill>
@@ -5130,7 +5664,7 @@
                 </a:tc>
                 <a:tc>
                   <a:txBody>
-                    <a:bodyPr wrap="square"/>
+                    <a:bodyPr/>
                     <a:lstStyle/>
                     <a:p>
                       <a:r>
@@ -5144,12 +5678,17 @@
                       </a:r>
                     </a:p>
                   </a:txBody>
-                  <a:tcPr anchor="ctr" marT="38100" marB="38100">
+                  <a:tcPr marT="38100" marB="38100" anchor="ctr">
                     <a:solidFill>
                       <a:srgbClr val="F5F5F5"/>
                     </a:solidFill>
                   </a:tcPr>
                 </a:tc>
+                <a:extLst>
+                  <a:ext uri="{0D108BD9-81ED-4DB2-BD59-A6C34878D82A}">
+                    <a16:rowId xmlns:a16="http://schemas.microsoft.com/office/drawing/2014/main" val="10004"/>
+                  </a:ext>
+                </a:extLst>
               </a:tr>
             </a:tbl>
           </a:graphicData>
@@ -5194,7 +5733,7 @@
           </a:fontRef>
         </p:style>
         <p:txBody>
-          <a:bodyPr rtlCol="0" anchor="ctr" wrap="square" lIns="137160" rIns="137160" tIns="54864" bIns="54864"/>
+          <a:bodyPr wrap="square" lIns="137160" tIns="54864" rIns="137160" bIns="54864" rtlCol="0" anchor="ctr"/>
           <a:lstStyle/>
           <a:p>
             <a:pPr algn="ctr"/>
@@ -5206,402 +5745,6 @@
                 <a:latin typeface="Calibri"/>
               </a:rPr>
               <a:t>Today closes the loop back to calibration — the foundation everything else this week depended on.</a:t>
-            </a:r>
-          </a:p>
-        </p:txBody>
-      </p:sp>
-    </p:spTree>
-  </p:cSld>
-  <p:clrMapOvr>
-    <a:masterClrMapping/>
-  </p:clrMapOvr>
-</p:sld>
-</file>
-
-<file path=ppt/slides/slide13.xml><?xml version="1.0" encoding="utf-8"?>
-<p:sld xmlns:a="http://schemas.openxmlformats.org/drawingml/2006/main" xmlns:p="http://schemas.openxmlformats.org/presentationml/2006/main" xmlns:r="http://schemas.openxmlformats.org/officeDocument/2006/relationships">
-  <p:cSld>
-    <p:spTree>
-      <p:nvGrpSpPr>
-        <p:cNvPr id="1" name=""/>
-        <p:cNvGrpSpPr/>
-        <p:nvPr/>
-      </p:nvGrpSpPr>
-      <p:grpSpPr/>
-      <p:sp>
-        <p:nvSpPr>
-          <p:cNvPr id="2" name="Rectangle 1"/>
-          <p:cNvSpPr/>
-          <p:nvPr/>
-        </p:nvSpPr>
-        <p:spPr>
-          <a:xfrm>
-            <a:off x="0" y="0"/>
-            <a:ext cx="12191695" cy="6858000"/>
-          </a:xfrm>
-          <a:prstGeom prst="rect">
-            <a:avLst/>
-          </a:prstGeom>
-          <a:solidFill>
-            <a:srgbClr val="FFFFFF"/>
-          </a:solidFill>
-          <a:ln>
-            <a:noFill/>
-          </a:ln>
-          <a:effectLst/>
-        </p:spPr>
-        <p:style>
-          <a:lnRef idx="1">
-            <a:schemeClr val="accent1"/>
-          </a:lnRef>
-          <a:fillRef idx="3">
-            <a:schemeClr val="accent1"/>
-          </a:fillRef>
-          <a:effectRef idx="2">
-            <a:schemeClr val="accent1"/>
-          </a:effectRef>
-          <a:fontRef idx="minor">
-            <a:schemeClr val="lt1"/>
-          </a:fontRef>
-        </p:style>
-        <p:txBody>
-          <a:bodyPr rtlCol="0" anchor="ctr"/>
-          <a:lstStyle/>
-          <a:p>
-            <a:pPr algn="ctr"/>
-          </a:p>
-        </p:txBody>
-      </p:sp>
-      <p:sp>
-        <p:nvSpPr>
-          <p:cNvPr id="3" name="Rectangle 2"/>
-          <p:cNvSpPr/>
-          <p:nvPr/>
-        </p:nvSpPr>
-        <p:spPr>
-          <a:xfrm>
-            <a:off x="0" y="0"/>
-            <a:ext cx="12191695" cy="1280160"/>
-          </a:xfrm>
-          <a:prstGeom prst="rect">
-            <a:avLst/>
-          </a:prstGeom>
-          <a:solidFill>
-            <a:srgbClr val="CC071E"/>
-          </a:solidFill>
-          <a:ln>
-            <a:noFill/>
-          </a:ln>
-          <a:effectLst/>
-        </p:spPr>
-        <p:style>
-          <a:lnRef idx="1">
-            <a:schemeClr val="accent1"/>
-          </a:lnRef>
-          <a:fillRef idx="3">
-            <a:schemeClr val="accent1"/>
-          </a:fillRef>
-          <a:effectRef idx="2">
-            <a:schemeClr val="accent1"/>
-          </a:effectRef>
-          <a:fontRef idx="minor">
-            <a:schemeClr val="lt1"/>
-          </a:fontRef>
-        </p:style>
-        <p:txBody>
-          <a:bodyPr rtlCol="0" anchor="ctr"/>
-          <a:lstStyle/>
-          <a:p>
-            <a:pPr algn="ctr"/>
-          </a:p>
-        </p:txBody>
-      </p:sp>
-      <p:sp>
-        <p:nvSpPr>
-          <p:cNvPr id="4" name="TextBox 3"/>
-          <p:cNvSpPr txBox="1"/>
-          <p:nvPr/>
-        </p:nvSpPr>
-        <p:spPr>
-          <a:xfrm>
-            <a:off x="502920" y="91440"/>
-            <a:ext cx="8778240" cy="1097280"/>
-          </a:xfrm>
-          <a:prstGeom prst="rect">
-            <a:avLst/>
-          </a:prstGeom>
-          <a:noFill/>
-        </p:spPr>
-        <p:txBody>
-          <a:bodyPr wrap="square" anchor="ctr">
-            <a:spAutoFit/>
-          </a:bodyPr>
-          <a:lstStyle/>
-          <a:p>
-            <a:pPr>
-              <a:spcAft>
-                <a:spcPts val="1400"/>
-              </a:spcAft>
-            </a:pPr>
-            <a:r>
-              <a:rPr sz="1100" b="1" i="0">
-                <a:solidFill>
-                  <a:srgbClr val="FFD2D2"/>
-                </a:solidFill>
-                <a:latin typeface="Calibri"/>
-              </a:rPr>
-              <a:t>BLOCK 2 · 30 MIN</a:t>
-            </a:r>
-          </a:p>
-          <a:p>
-            <a:r>
-              <a:rPr sz="2400" b="1" i="0">
-                <a:solidFill>
-                  <a:srgbClr val="FFFFFF"/>
-                </a:solidFill>
-                <a:latin typeface="Calibri"/>
-              </a:rPr>
-              <a:t>Calibration Internals</a:t>
-            </a:r>
-          </a:p>
-        </p:txBody>
-      </p:sp>
-      <p:pic>
-        <p:nvPicPr>
-          <p:cNvPr id="5" name="Picture 4" descr="GIZ_Logo.png"/>
-          <p:cNvPicPr>
-            <a:picLocks noChangeAspect="1"/>
-          </p:cNvPicPr>
-          <p:nvPr/>
-        </p:nvPicPr>
-        <p:blipFill>
-          <a:blip r:embed="rId2"/>
-          <a:stretch>
-            <a:fillRect/>
-          </a:stretch>
-        </p:blipFill>
-        <p:spPr>
-          <a:xfrm>
-            <a:off x="10454335" y="420624"/>
-            <a:ext cx="1590261" cy="438912"/>
-          </a:xfrm>
-          <a:prstGeom prst="rect">
-            <a:avLst/>
-          </a:prstGeom>
-        </p:spPr>
-      </p:pic>
-      <p:sp>
-        <p:nvSpPr>
-          <p:cNvPr id="6" name="Rectangle 5"/>
-          <p:cNvSpPr/>
-          <p:nvPr/>
-        </p:nvSpPr>
-        <p:spPr>
-          <a:xfrm>
-            <a:off x="0" y="6565392"/>
-            <a:ext cx="12191695" cy="292608"/>
-          </a:xfrm>
-          <a:prstGeom prst="rect">
-            <a:avLst/>
-          </a:prstGeom>
-          <a:solidFill>
-            <a:srgbClr val="FFFFFF"/>
-          </a:solidFill>
-          <a:ln>
-            <a:noFill/>
-          </a:ln>
-          <a:effectLst/>
-        </p:spPr>
-        <p:style>
-          <a:lnRef idx="1">
-            <a:schemeClr val="accent1"/>
-          </a:lnRef>
-          <a:fillRef idx="3">
-            <a:schemeClr val="accent1"/>
-          </a:fillRef>
-          <a:effectRef idx="2">
-            <a:schemeClr val="accent1"/>
-          </a:effectRef>
-          <a:fontRef idx="minor">
-            <a:schemeClr val="lt1"/>
-          </a:fontRef>
-        </p:style>
-        <p:txBody>
-          <a:bodyPr rtlCol="0" anchor="ctr"/>
-          <a:lstStyle/>
-          <a:p>
-            <a:pPr algn="ctr"/>
-          </a:p>
-        </p:txBody>
-      </p:sp>
-      <p:sp>
-        <p:nvSpPr>
-          <p:cNvPr id="7" name="TextBox 6"/>
-          <p:cNvSpPr txBox="1"/>
-          <p:nvPr/>
-        </p:nvSpPr>
-        <p:spPr>
-          <a:xfrm>
-            <a:off x="457200" y="6547104"/>
-            <a:ext cx="7315200" cy="274320"/>
-          </a:xfrm>
-          <a:prstGeom prst="rect">
-            <a:avLst/>
-          </a:prstGeom>
-          <a:noFill/>
-        </p:spPr>
-        <p:txBody>
-          <a:bodyPr wrap="none" tIns="0" bIns="0">
-            <a:spAutoFit/>
-          </a:bodyPr>
-          <a:lstStyle/>
-          <a:p>
-            <a:r>
-              <a:rPr sz="1000" b="0" i="0">
-                <a:solidFill>
-                  <a:srgbClr val="787878"/>
-                </a:solidFill>
-                <a:latin typeface="Calibri"/>
-              </a:rPr>
-              <a:t>DGE-METRIC Online Training — Online Day 3 — Fri 24 Jul 2026</a:t>
-            </a:r>
-          </a:p>
-        </p:txBody>
-      </p:sp>
-      <p:sp>
-        <p:nvSpPr>
-          <p:cNvPr id="8" name="TextBox 7"/>
-          <p:cNvSpPr txBox="1"/>
-          <p:nvPr/>
-        </p:nvSpPr>
-        <p:spPr>
-          <a:xfrm>
-            <a:off x="11002975" y="6547104"/>
-            <a:ext cx="822960" cy="274320"/>
-          </a:xfrm>
-          <a:prstGeom prst="rect">
-            <a:avLst/>
-          </a:prstGeom>
-          <a:noFill/>
-        </p:spPr>
-        <p:txBody>
-          <a:bodyPr wrap="none" tIns="0">
-            <a:spAutoFit/>
-          </a:bodyPr>
-          <a:lstStyle/>
-          <a:p>
-            <a:pPr algn="r"/>
-            <a:r>
-              <a:rPr sz="1000" b="0" i="0">
-                <a:solidFill>
-                  <a:srgbClr val="787878"/>
-                </a:solidFill>
-                <a:latin typeface="Calibri"/>
-              </a:rPr>
-              <a:t>10</a:t>
-            </a:r>
-          </a:p>
-        </p:txBody>
-      </p:sp>
-      <p:sp>
-        <p:nvSpPr>
-          <p:cNvPr id="9" name="TextBox 8"/>
-          <p:cNvSpPr txBox="1"/>
-          <p:nvPr/>
-        </p:nvSpPr>
-        <p:spPr>
-          <a:xfrm>
-            <a:off x="502920" y="1554480"/>
-            <a:ext cx="11185855" cy="4892040"/>
-          </a:xfrm>
-          <a:prstGeom prst="rect">
-            <a:avLst/>
-          </a:prstGeom>
-          <a:noFill/>
-        </p:spPr>
-        <p:txBody>
-          <a:bodyPr wrap="square">
-            <a:spAutoFit/>
-          </a:bodyPr>
-          <a:lstStyle/>
-          <a:p>
-            <a:pPr marL="0" indent="0">
-              <a:spcAft>
-                <a:spcPts val="1000"/>
-              </a:spcAft>
-            </a:pPr>
-            <a:r>
-              <a:rPr sz="1700" b="0" i="0">
-                <a:solidFill>
-                  <a:srgbClr val="232323"/>
-                </a:solidFill>
-                <a:latin typeface="Calibri"/>
-              </a:rPr>
-              <a:t>•  Data inputs pinning down the steady state: sectoral employment, value-added, labour cost, export, import, emission shares</a:t>
-            </a:r>
-          </a:p>
-          <a:p>
-            <a:pPr marL="0" indent="0">
-              <a:spcAft>
-                <a:spcPts val="1000"/>
-              </a:spcAft>
-            </a:pPr>
-            <a:r>
-              <a:rPr sz="1700" b="0" i="0">
-                <a:solidFill>
-                  <a:srgbClr val="232323"/>
-                </a:solidFill>
-                <a:latin typeface="Calibri"/>
-              </a:rPr>
-              <a:t>•  Structural parameters: discount factor, depreciation, elasticities of substitution, tax rates, adjustment costs</a:t>
-            </a:r>
-          </a:p>
-          <a:p>
-            <a:pPr marL="0" indent="0">
-              <a:spcAft>
-                <a:spcPts val="1000"/>
-              </a:spcAft>
-            </a:pPr>
-            <a:r>
-              <a:rPr sz="1700" b="1" i="0">
-                <a:solidFill>
-                  <a:srgbClr val="232323"/>
-                </a:solidFill>
-                <a:latin typeface="Calibri"/>
-              </a:rPr>
-              <a:t>•  Calibration credibility rests on accounting coherence — value-added shares, intermediate-input shares, and import decomposition must sum consistently</a:t>
-            </a:r>
-          </a:p>
-          <a:p>
-            <a:pPr marL="0" indent="0">
-              <a:spcAft>
-                <a:spcPts val="1000"/>
-              </a:spcAft>
-            </a:pPr>
-            <a:r>
-              <a:rPr sz="1700" b="0" i="0">
-                <a:solidFill>
-                  <a:srgbClr val="232323"/>
-                </a:solidFill>
-                <a:latin typeface="Calibri"/>
-              </a:rPr>
-              <a:t>•  The IO calibration pipeline: run_pipeline.m → split_utilities_sector.m → aggregate_for_dge.m, with validation/audit CSV outputs</a:t>
-            </a:r>
-          </a:p>
-          <a:p>
-            <a:pPr marL="0" indent="0">
-              <a:spcAft>
-                <a:spcPts val="1000"/>
-              </a:spcAft>
-            </a:pPr>
-            <a:r>
-              <a:rPr sz="1700" b="0" i="0">
-                <a:solidFill>
-                  <a:srgbClr val="232323"/>
-                </a:solidFill>
-                <a:latin typeface="Calibri"/>
-              </a:rPr>
-              <a:t>•  Quality checks: output conservation, import conservation, value-added consistency, non-negativity</a:t>
             </a:r>
           </a:p>
         </p:txBody>
@@ -5615,7 +5758,7 @@
 </file>
 
 <file path=ppt/slides/slide14.xml><?xml version="1.0" encoding="utf-8"?>
-<p:sld xmlns:a="http://schemas.openxmlformats.org/drawingml/2006/main" xmlns:p="http://schemas.openxmlformats.org/presentationml/2006/main" xmlns:r="http://schemas.openxmlformats.org/officeDocument/2006/relationships">
+<p:sld xmlns:a="http://schemas.openxmlformats.org/drawingml/2006/main" xmlns:r="http://schemas.openxmlformats.org/officeDocument/2006/relationships" xmlns:p="http://schemas.openxmlformats.org/presentationml/2006/main">
   <p:cSld>
     <p:spTree>
       <p:nvGrpSpPr>
@@ -5623,7 +5766,14 @@
         <p:cNvGrpSpPr/>
         <p:nvPr/>
       </p:nvGrpSpPr>
-      <p:grpSpPr/>
+      <p:grpSpPr>
+        <a:xfrm>
+          <a:off x="0" y="0"/>
+          <a:ext cx="0" cy="0"/>
+          <a:chOff x="0" y="0"/>
+          <a:chExt cx="0" cy="0"/>
+        </a:xfrm>
+      </p:grpSpPr>
       <p:sp>
         <p:nvSpPr>
           <p:cNvPr id="2" name="Rectangle 1"/>
@@ -5665,6 +5815,7 @@
           <a:lstStyle/>
           <a:p>
             <a:pPr algn="ctr"/>
+            <a:endParaRPr/>
           </a:p>
         </p:txBody>
       </p:sp>
@@ -5709,6 +5860,7 @@
           <a:lstStyle/>
           <a:p>
             <a:pPr algn="ctr"/>
+            <a:endParaRPr/>
           </a:p>
         </p:txBody>
       </p:sp>
@@ -5746,7 +5898,7 @@
                 </a:solidFill>
                 <a:latin typeface="Calibri"/>
               </a:rPr>
-              <a:t>BLOCK 3 · 25 MIN</a:t>
+              <a:t>BLOCK 2 · 40 MIN</a:t>
             </a:r>
           </a:p>
           <a:p>
@@ -5757,7 +5909,7 @@
                 </a:solidFill>
                 <a:latin typeface="Calibri"/>
               </a:rPr>
-              <a:t>How to Modify Calibration</a:t>
+              <a:t>Calibration Internals</a:t>
             </a:r>
           </a:p>
         </p:txBody>
@@ -5827,6 +5979,7 @@
           <a:lstStyle/>
           <a:p>
             <a:pPr algn="ctr"/>
+            <a:endParaRPr/>
           </a:p>
         </p:txBody>
       </p:sp>
@@ -5933,7 +6086,7 @@
                 </a:solidFill>
                 <a:latin typeface="Calibri"/>
               </a:rPr>
-              <a:t>•  Changing a data input (e.g. a sectoral value-added share): edit the calibration workbook in ExcelFiles/, then re-run the pipeline and re-check validation/audit outputs</a:t>
+              <a:t>•  Data inputs pinning down the steady state: sectoral employment, value-added, labour cost, export, import, emission shares</a:t>
             </a:r>
           </a:p>
           <a:p>
@@ -5949,7 +6102,7 @@
                 </a:solidFill>
                 <a:latin typeface="Calibri"/>
               </a:rPr>
-              <a:t>•  Changing a structural parameter (e.g. an elasticity of substitution): typically set via a Functions/ helper or a named range in the workbook — confirm the exact location before editing</a:t>
+              <a:t>•  Structural parameters: discount factor, depreciation, elasticities of substitution, tax rates, adjustment costs</a:t>
             </a:r>
           </a:p>
           <a:p>
@@ -5965,7 +6118,39 @@
                 </a:solidFill>
                 <a:latin typeface="Calibri"/>
               </a:rPr>
-              <a:t>•  Either change requires re-running the full calibration-to-baseline chain and re-validating accounting coherence</a:t>
+              <a:t>•  Calibration credibility rests on accounting coherence — value-added shares, intermediate-input shares, and import decomposition must sum consistently</a:t>
+            </a:r>
+          </a:p>
+          <a:p>
+            <a:pPr marL="0" indent="0">
+              <a:spcAft>
+                <a:spcPts val="1000"/>
+              </a:spcAft>
+            </a:pPr>
+            <a:r>
+              <a:rPr sz="1700" b="0" i="0">
+                <a:solidFill>
+                  <a:srgbClr val="232323"/>
+                </a:solidFill>
+                <a:latin typeface="Calibri"/>
+              </a:rPr>
+              <a:t>•  The IO calibration pipeline: run_pipeline.m → split_utilities_sector.m → aggregate_for_dge.m, with validation/audit CSV outputs</a:t>
+            </a:r>
+          </a:p>
+          <a:p>
+            <a:pPr marL="0" indent="0">
+              <a:spcAft>
+                <a:spcPts val="1000"/>
+              </a:spcAft>
+            </a:pPr>
+            <a:r>
+              <a:rPr sz="1700" b="0" i="0">
+                <a:solidFill>
+                  <a:srgbClr val="232323"/>
+                </a:solidFill>
+                <a:latin typeface="Calibri"/>
+              </a:rPr>
+              <a:t>•  Quality checks: output conservation, import conservation, value-added consistency, non-negativity</a:t>
             </a:r>
           </a:p>
         </p:txBody>
@@ -5979,7 +6164,7 @@
 </file>
 
 <file path=ppt/slides/slide15.xml><?xml version="1.0" encoding="utf-8"?>
-<p:sld xmlns:a="http://schemas.openxmlformats.org/drawingml/2006/main" xmlns:p="http://schemas.openxmlformats.org/presentationml/2006/main" xmlns:r="http://schemas.openxmlformats.org/officeDocument/2006/relationships">
+<p:sld xmlns:a="http://schemas.openxmlformats.org/drawingml/2006/main" xmlns:r="http://schemas.openxmlformats.org/officeDocument/2006/relationships" xmlns:p="http://schemas.openxmlformats.org/presentationml/2006/main">
   <p:cSld>
     <p:spTree>
       <p:nvGrpSpPr>
@@ -5987,7 +6172,14 @@
         <p:cNvGrpSpPr/>
         <p:nvPr/>
       </p:nvGrpSpPr>
-      <p:grpSpPr/>
+      <p:grpSpPr>
+        <a:xfrm>
+          <a:off x="0" y="0"/>
+          <a:ext cx="0" cy="0"/>
+          <a:chOff x="0" y="0"/>
+          <a:chExt cx="0" cy="0"/>
+        </a:xfrm>
+      </p:grpSpPr>
       <p:sp>
         <p:nvSpPr>
           <p:cNvPr id="2" name="Rectangle 1"/>
@@ -5998,6 +6190,51 @@
           <a:xfrm>
             <a:off x="0" y="0"/>
             <a:ext cx="12191695" cy="6858000"/>
+          </a:xfrm>
+          <a:prstGeom prst="rect">
+            <a:avLst/>
+          </a:prstGeom>
+          <a:solidFill>
+            <a:srgbClr val="FFFFFF"/>
+          </a:solidFill>
+          <a:ln>
+            <a:noFill/>
+          </a:ln>
+          <a:effectLst/>
+        </p:spPr>
+        <p:style>
+          <a:lnRef idx="1">
+            <a:schemeClr val="accent1"/>
+          </a:lnRef>
+          <a:fillRef idx="3">
+            <a:schemeClr val="accent1"/>
+          </a:fillRef>
+          <a:effectRef idx="2">
+            <a:schemeClr val="accent1"/>
+          </a:effectRef>
+          <a:fontRef idx="minor">
+            <a:schemeClr val="lt1"/>
+          </a:fontRef>
+        </p:style>
+        <p:txBody>
+          <a:bodyPr rtlCol="0" anchor="ctr"/>
+          <a:lstStyle/>
+          <a:p>
+            <a:pPr algn="ctr"/>
+            <a:endParaRPr/>
+          </a:p>
+        </p:txBody>
+      </p:sp>
+      <p:sp>
+        <p:nvSpPr>
+          <p:cNvPr id="3" name="Rectangle 2"/>
+          <p:cNvSpPr/>
+          <p:nvPr/>
+        </p:nvSpPr>
+        <p:spPr>
+          <a:xfrm>
+            <a:off x="0" y="0"/>
+            <a:ext cx="12191695" cy="1280160"/>
           </a:xfrm>
           <a:prstGeom prst="rect">
             <a:avLst/>
@@ -6029,12 +6266,63 @@
           <a:lstStyle/>
           <a:p>
             <a:pPr algn="ctr"/>
+            <a:endParaRPr/>
+          </a:p>
+        </p:txBody>
+      </p:sp>
+      <p:sp>
+        <p:nvSpPr>
+          <p:cNvPr id="4" name="TextBox 3"/>
+          <p:cNvSpPr txBox="1"/>
+          <p:nvPr/>
+        </p:nvSpPr>
+        <p:spPr>
+          <a:xfrm>
+            <a:off x="502920" y="91440"/>
+            <a:ext cx="8778240" cy="1097280"/>
+          </a:xfrm>
+          <a:prstGeom prst="rect">
+            <a:avLst/>
+          </a:prstGeom>
+          <a:noFill/>
+        </p:spPr>
+        <p:txBody>
+          <a:bodyPr wrap="square" anchor="ctr">
+            <a:spAutoFit/>
+          </a:bodyPr>
+          <a:lstStyle/>
+          <a:p>
+            <a:pPr>
+              <a:spcAft>
+                <a:spcPts val="1400"/>
+              </a:spcAft>
+            </a:pPr>
+            <a:r>
+              <a:rPr sz="1100" b="1" i="0">
+                <a:solidFill>
+                  <a:srgbClr val="FFD2D2"/>
+                </a:solidFill>
+                <a:latin typeface="Calibri"/>
+              </a:rPr>
+              <a:t>BLOCK 3 · 35 MIN</a:t>
+            </a:r>
+          </a:p>
+          <a:p>
+            <a:r>
+              <a:rPr sz="2400" b="1" i="0">
+                <a:solidFill>
+                  <a:srgbClr val="FFFFFF"/>
+                </a:solidFill>
+                <a:latin typeface="Calibri"/>
+              </a:rPr>
+              <a:t>How to Modify Calibration</a:t>
+            </a:r>
           </a:p>
         </p:txBody>
       </p:sp>
       <p:pic>
         <p:nvPicPr>
-          <p:cNvPr id="3" name="Picture 2" descr="GIZ_Logo.png"/>
+          <p:cNvPr id="5" name="Picture 4" descr="GIZ_Logo.png"/>
           <p:cNvPicPr>
             <a:picLocks noChangeAspect="1"/>
           </p:cNvPicPr>
@@ -6048,8 +6336,8 @@
         </p:blipFill>
         <p:spPr>
           <a:xfrm>
-            <a:off x="10088575" y="457200"/>
-            <a:ext cx="1656522" cy="457200"/>
+            <a:off x="10454335" y="420624"/>
+            <a:ext cx="1590261" cy="438912"/>
           </a:xfrm>
           <a:prstGeom prst="rect">
             <a:avLst/>
@@ -6058,14 +6346,128 @@
       </p:pic>
       <p:sp>
         <p:nvSpPr>
-          <p:cNvPr id="4" name="TextBox 3"/>
+          <p:cNvPr id="6" name="Rectangle 5"/>
+          <p:cNvSpPr/>
+          <p:nvPr/>
+        </p:nvSpPr>
+        <p:spPr>
+          <a:xfrm>
+            <a:off x="0" y="6565392"/>
+            <a:ext cx="12191695" cy="292608"/>
+          </a:xfrm>
+          <a:prstGeom prst="rect">
+            <a:avLst/>
+          </a:prstGeom>
+          <a:solidFill>
+            <a:srgbClr val="FFFFFF"/>
+          </a:solidFill>
+          <a:ln>
+            <a:noFill/>
+          </a:ln>
+          <a:effectLst/>
+        </p:spPr>
+        <p:style>
+          <a:lnRef idx="1">
+            <a:schemeClr val="accent1"/>
+          </a:lnRef>
+          <a:fillRef idx="3">
+            <a:schemeClr val="accent1"/>
+          </a:fillRef>
+          <a:effectRef idx="2">
+            <a:schemeClr val="accent1"/>
+          </a:effectRef>
+          <a:fontRef idx="minor">
+            <a:schemeClr val="lt1"/>
+          </a:fontRef>
+        </p:style>
+        <p:txBody>
+          <a:bodyPr rtlCol="0" anchor="ctr"/>
+          <a:lstStyle/>
+          <a:p>
+            <a:pPr algn="ctr"/>
+            <a:endParaRPr/>
+          </a:p>
+        </p:txBody>
+      </p:sp>
+      <p:sp>
+        <p:nvSpPr>
+          <p:cNvPr id="7" name="TextBox 6"/>
           <p:cNvSpPr txBox="1"/>
           <p:nvPr/>
         </p:nvSpPr>
         <p:spPr>
           <a:xfrm>
-            <a:off x="822960" y="2651760"/>
-            <a:ext cx="10058400" cy="2011680"/>
+            <a:off x="457200" y="6547104"/>
+            <a:ext cx="7315200" cy="274320"/>
+          </a:xfrm>
+          <a:prstGeom prst="rect">
+            <a:avLst/>
+          </a:prstGeom>
+          <a:noFill/>
+        </p:spPr>
+        <p:txBody>
+          <a:bodyPr wrap="none" tIns="0" bIns="0">
+            <a:spAutoFit/>
+          </a:bodyPr>
+          <a:lstStyle/>
+          <a:p>
+            <a:r>
+              <a:rPr sz="1000" b="0" i="0">
+                <a:solidFill>
+                  <a:srgbClr val="787878"/>
+                </a:solidFill>
+                <a:latin typeface="Calibri"/>
+              </a:rPr>
+              <a:t>DGE-METRIC Online Training — Online Day 3 — Fri 24 Jul 2026</a:t>
+            </a:r>
+          </a:p>
+        </p:txBody>
+      </p:sp>
+      <p:sp>
+        <p:nvSpPr>
+          <p:cNvPr id="8" name="TextBox 7"/>
+          <p:cNvSpPr txBox="1"/>
+          <p:nvPr/>
+        </p:nvSpPr>
+        <p:spPr>
+          <a:xfrm>
+            <a:off x="11002975" y="6547104"/>
+            <a:ext cx="822960" cy="274320"/>
+          </a:xfrm>
+          <a:prstGeom prst="rect">
+            <a:avLst/>
+          </a:prstGeom>
+          <a:noFill/>
+        </p:spPr>
+        <p:txBody>
+          <a:bodyPr wrap="none" tIns="0">
+            <a:spAutoFit/>
+          </a:bodyPr>
+          <a:lstStyle/>
+          <a:p>
+            <a:pPr algn="r"/>
+            <a:r>
+              <a:rPr sz="1000" b="0" i="0">
+                <a:solidFill>
+                  <a:srgbClr val="787878"/>
+                </a:solidFill>
+                <a:latin typeface="Calibri"/>
+              </a:rPr>
+              <a:t>12</a:t>
+            </a:r>
+          </a:p>
+        </p:txBody>
+      </p:sp>
+      <p:sp>
+        <p:nvSpPr>
+          <p:cNvPr id="9" name="TextBox 8"/>
+          <p:cNvSpPr txBox="1"/>
+          <p:nvPr/>
+        </p:nvSpPr>
+        <p:spPr>
+          <a:xfrm>
+            <a:off x="502920" y="1554480"/>
+            <a:ext cx="11185855" cy="4892040"/>
           </a:xfrm>
           <a:prstGeom prst="rect">
             <a:avLst/>
@@ -6078,46 +6480,51 @@
           </a:bodyPr>
           <a:lstStyle/>
           <a:p>
-            <a:pPr>
+            <a:pPr marL="0" indent="0">
               <a:spcAft>
                 <a:spcPts val="1000"/>
               </a:spcAft>
             </a:pPr>
             <a:r>
-              <a:rPr sz="1500" b="1" i="0">
-                <a:solidFill>
-                  <a:srgbClr val="FFD2D2"/>
-                </a:solidFill>
-                <a:latin typeface="Calibri"/>
-              </a:rPr>
-              <a:t>SHORT BREAK</a:t>
-            </a:r>
-          </a:p>
-          <a:p>
-            <a:r>
-              <a:rPr sz="3400" b="1" i="0">
-                <a:solidFill>
-                  <a:srgbClr val="FFFFFF"/>
-                </a:solidFill>
-                <a:latin typeface="Calibri"/>
-              </a:rPr>
-              <a:t>15 minutes</a:t>
-            </a:r>
-          </a:p>
-          <a:p>
-            <a:pPr>
-              <a:spcBef>
-                <a:spcPts val="1400"/>
-              </a:spcBef>
+              <a:rPr sz="1700" b="0" i="0">
+                <a:solidFill>
+                  <a:srgbClr val="232323"/>
+                </a:solidFill>
+                <a:latin typeface="Calibri"/>
+              </a:rPr>
+              <a:t>•  Changing a data input (e.g. a sectoral value-added share): edit the calibration workbook in ExcelFiles/, then re-run the pipeline and re-check validation/audit outputs</a:t>
+            </a:r>
+          </a:p>
+          <a:p>
+            <a:pPr marL="0" indent="0">
+              <a:spcAft>
+                <a:spcPts val="1000"/>
+              </a:spcAft>
             </a:pPr>
             <a:r>
               <a:rPr sz="1700" b="0" i="0">
                 <a:solidFill>
-                  <a:srgbClr val="FFFFFF"/>
-                </a:solidFill>
-                <a:latin typeface="Calibri"/>
-              </a:rPr>
-              <a:t>Next: sensitivity analysis method</a:t>
+                  <a:srgbClr val="232323"/>
+                </a:solidFill>
+                <a:latin typeface="Calibri"/>
+              </a:rPr>
+              <a:t>•  Changing a structural parameter (e.g. an elasticity of substitution): typically set via a Functions/ helper or a named range in the workbook — confirm the exact location before editing</a:t>
+            </a:r>
+          </a:p>
+          <a:p>
+            <a:pPr marL="0" indent="0">
+              <a:spcAft>
+                <a:spcPts val="1000"/>
+              </a:spcAft>
+            </a:pPr>
+            <a:r>
+              <a:rPr sz="1700" b="1" i="0">
+                <a:solidFill>
+                  <a:srgbClr val="232323"/>
+                </a:solidFill>
+                <a:latin typeface="Calibri"/>
+              </a:rPr>
+              <a:t>•  Either change requires re-running the full calibration-to-baseline chain and re-validating accounting coherence</a:t>
             </a:r>
           </a:p>
         </p:txBody>
@@ -6131,7 +6538,7 @@
 </file>
 
 <file path=ppt/slides/slide16.xml><?xml version="1.0" encoding="utf-8"?>
-<p:sld xmlns:a="http://schemas.openxmlformats.org/drawingml/2006/main" xmlns:p="http://schemas.openxmlformats.org/presentationml/2006/main" xmlns:r="http://schemas.openxmlformats.org/officeDocument/2006/relationships">
+<p:sld xmlns:a="http://schemas.openxmlformats.org/drawingml/2006/main" xmlns:r="http://schemas.openxmlformats.org/officeDocument/2006/relationships" xmlns:p="http://schemas.openxmlformats.org/presentationml/2006/main">
   <p:cSld>
     <p:spTree>
       <p:nvGrpSpPr>
@@ -6139,7 +6546,14 @@
         <p:cNvGrpSpPr/>
         <p:nvPr/>
       </p:nvGrpSpPr>
-      <p:grpSpPr/>
+      <p:grpSpPr>
+        <a:xfrm>
+          <a:off x="0" y="0"/>
+          <a:ext cx="0" cy="0"/>
+          <a:chOff x="0" y="0"/>
+          <a:chExt cx="0" cy="0"/>
+        </a:xfrm>
+      </p:grpSpPr>
       <p:sp>
         <p:nvSpPr>
           <p:cNvPr id="2" name="Rectangle 1"/>
@@ -6150,50 +6564,6 @@
           <a:xfrm>
             <a:off x="0" y="0"/>
             <a:ext cx="12191695" cy="6858000"/>
-          </a:xfrm>
-          <a:prstGeom prst="rect">
-            <a:avLst/>
-          </a:prstGeom>
-          <a:solidFill>
-            <a:srgbClr val="FFFFFF"/>
-          </a:solidFill>
-          <a:ln>
-            <a:noFill/>
-          </a:ln>
-          <a:effectLst/>
-        </p:spPr>
-        <p:style>
-          <a:lnRef idx="1">
-            <a:schemeClr val="accent1"/>
-          </a:lnRef>
-          <a:fillRef idx="3">
-            <a:schemeClr val="accent1"/>
-          </a:fillRef>
-          <a:effectRef idx="2">
-            <a:schemeClr val="accent1"/>
-          </a:effectRef>
-          <a:fontRef idx="minor">
-            <a:schemeClr val="lt1"/>
-          </a:fontRef>
-        </p:style>
-        <p:txBody>
-          <a:bodyPr rtlCol="0" anchor="ctr"/>
-          <a:lstStyle/>
-          <a:p>
-            <a:pPr algn="ctr"/>
-          </a:p>
-        </p:txBody>
-      </p:sp>
-      <p:sp>
-        <p:nvSpPr>
-          <p:cNvPr id="3" name="Rectangle 2"/>
-          <p:cNvSpPr/>
-          <p:nvPr/>
-        </p:nvSpPr>
-        <p:spPr>
-          <a:xfrm>
-            <a:off x="0" y="0"/>
-            <a:ext cx="12191695" cy="1280160"/>
           </a:xfrm>
           <a:prstGeom prst="rect">
             <a:avLst/>
@@ -6225,62 +6595,13 @@
           <a:lstStyle/>
           <a:p>
             <a:pPr algn="ctr"/>
-          </a:p>
-        </p:txBody>
-      </p:sp>
-      <p:sp>
-        <p:nvSpPr>
-          <p:cNvPr id="4" name="TextBox 3"/>
-          <p:cNvSpPr txBox="1"/>
-          <p:nvPr/>
-        </p:nvSpPr>
-        <p:spPr>
-          <a:xfrm>
-            <a:off x="502920" y="91440"/>
-            <a:ext cx="8778240" cy="1097280"/>
-          </a:xfrm>
-          <a:prstGeom prst="rect">
-            <a:avLst/>
-          </a:prstGeom>
-          <a:noFill/>
-        </p:spPr>
-        <p:txBody>
-          <a:bodyPr wrap="square" anchor="ctr">
-            <a:spAutoFit/>
-          </a:bodyPr>
-          <a:lstStyle/>
-          <a:p>
-            <a:pPr>
-              <a:spcAft>
-                <a:spcPts val="1400"/>
-              </a:spcAft>
-            </a:pPr>
-            <a:r>
-              <a:rPr sz="1100" b="1" i="0">
-                <a:solidFill>
-                  <a:srgbClr val="FFD2D2"/>
-                </a:solidFill>
-                <a:latin typeface="Calibri"/>
-              </a:rPr>
-              <a:t>BLOCK 4 · 30 MIN</a:t>
-            </a:r>
-          </a:p>
-          <a:p>
-            <a:r>
-              <a:rPr sz="2400" b="1" i="0">
-                <a:solidFill>
-                  <a:srgbClr val="FFFFFF"/>
-                </a:solidFill>
-                <a:latin typeface="Calibri"/>
-              </a:rPr>
-              <a:t>Sensitivity Analysis Method</a:t>
-            </a:r>
+            <a:endParaRPr/>
           </a:p>
         </p:txBody>
       </p:sp>
       <p:pic>
         <p:nvPicPr>
-          <p:cNvPr id="5" name="Picture 4" descr="GIZ_Logo.png"/>
+          <p:cNvPr id="3" name="Picture 2" descr="GIZ_Logo.png"/>
           <p:cNvPicPr>
             <a:picLocks noChangeAspect="1"/>
           </p:cNvPicPr>
@@ -6294,8 +6615,8 @@
         </p:blipFill>
         <p:spPr>
           <a:xfrm>
-            <a:off x="10454335" y="420624"/>
-            <a:ext cx="1590261" cy="438912"/>
+            <a:off x="10088575" y="457200"/>
+            <a:ext cx="1656522" cy="457200"/>
           </a:xfrm>
           <a:prstGeom prst="rect">
             <a:avLst/>
@@ -6304,127 +6625,14 @@
       </p:pic>
       <p:sp>
         <p:nvSpPr>
-          <p:cNvPr id="6" name="Rectangle 5"/>
-          <p:cNvSpPr/>
-          <p:nvPr/>
-        </p:nvSpPr>
-        <p:spPr>
-          <a:xfrm>
-            <a:off x="0" y="6565392"/>
-            <a:ext cx="12191695" cy="292608"/>
-          </a:xfrm>
-          <a:prstGeom prst="rect">
-            <a:avLst/>
-          </a:prstGeom>
-          <a:solidFill>
-            <a:srgbClr val="FFFFFF"/>
-          </a:solidFill>
-          <a:ln>
-            <a:noFill/>
-          </a:ln>
-          <a:effectLst/>
-        </p:spPr>
-        <p:style>
-          <a:lnRef idx="1">
-            <a:schemeClr val="accent1"/>
-          </a:lnRef>
-          <a:fillRef idx="3">
-            <a:schemeClr val="accent1"/>
-          </a:fillRef>
-          <a:effectRef idx="2">
-            <a:schemeClr val="accent1"/>
-          </a:effectRef>
-          <a:fontRef idx="minor">
-            <a:schemeClr val="lt1"/>
-          </a:fontRef>
-        </p:style>
-        <p:txBody>
-          <a:bodyPr rtlCol="0" anchor="ctr"/>
-          <a:lstStyle/>
-          <a:p>
-            <a:pPr algn="ctr"/>
-          </a:p>
-        </p:txBody>
-      </p:sp>
-      <p:sp>
-        <p:nvSpPr>
-          <p:cNvPr id="7" name="TextBox 6"/>
+          <p:cNvPr id="4" name="TextBox 3"/>
           <p:cNvSpPr txBox="1"/>
           <p:nvPr/>
         </p:nvSpPr>
         <p:spPr>
           <a:xfrm>
-            <a:off x="457200" y="6547104"/>
-            <a:ext cx="7315200" cy="274320"/>
-          </a:xfrm>
-          <a:prstGeom prst="rect">
-            <a:avLst/>
-          </a:prstGeom>
-          <a:noFill/>
-        </p:spPr>
-        <p:txBody>
-          <a:bodyPr wrap="none" tIns="0" bIns="0">
-            <a:spAutoFit/>
-          </a:bodyPr>
-          <a:lstStyle/>
-          <a:p>
-            <a:r>
-              <a:rPr sz="1000" b="0" i="0">
-                <a:solidFill>
-                  <a:srgbClr val="787878"/>
-                </a:solidFill>
-                <a:latin typeface="Calibri"/>
-              </a:rPr>
-              <a:t>DGE-METRIC Online Training — Online Day 3 — Fri 24 Jul 2026</a:t>
-            </a:r>
-          </a:p>
-        </p:txBody>
-      </p:sp>
-      <p:sp>
-        <p:nvSpPr>
-          <p:cNvPr id="8" name="TextBox 7"/>
-          <p:cNvSpPr txBox="1"/>
-          <p:nvPr/>
-        </p:nvSpPr>
-        <p:spPr>
-          <a:xfrm>
-            <a:off x="11002975" y="6547104"/>
-            <a:ext cx="822960" cy="274320"/>
-          </a:xfrm>
-          <a:prstGeom prst="rect">
-            <a:avLst/>
-          </a:prstGeom>
-          <a:noFill/>
-        </p:spPr>
-        <p:txBody>
-          <a:bodyPr wrap="none" tIns="0">
-            <a:spAutoFit/>
-          </a:bodyPr>
-          <a:lstStyle/>
-          <a:p>
-            <a:pPr algn="r"/>
-            <a:r>
-              <a:rPr sz="1000" b="0" i="0">
-                <a:solidFill>
-                  <a:srgbClr val="787878"/>
-                </a:solidFill>
-                <a:latin typeface="Calibri"/>
-              </a:rPr>
-              <a:t>12</a:t>
-            </a:r>
-          </a:p>
-        </p:txBody>
-      </p:sp>
-      <p:sp>
-        <p:nvSpPr>
-          <p:cNvPr id="9" name="TextBox 8"/>
-          <p:cNvSpPr txBox="1"/>
-          <p:nvPr/>
-        </p:nvSpPr>
-        <p:spPr>
-          <a:xfrm>
-            <a:off x="502920" y="1554480"/>
-            <a:ext cx="11185855" cy="4892040"/>
+            <a:off x="822960" y="2651760"/>
+            <a:ext cx="10058400" cy="2011680"/>
           </a:xfrm>
           <a:prstGeom prst="rect">
             <a:avLst/>
@@ -6437,83 +6645,46 @@
           </a:bodyPr>
           <a:lstStyle/>
           <a:p>
-            <a:pPr marL="0" indent="0">
+            <a:pPr>
               <a:spcAft>
                 <a:spcPts val="1000"/>
               </a:spcAft>
             </a:pPr>
             <a:r>
+              <a:rPr sz="1500" b="1" i="0">
+                <a:solidFill>
+                  <a:srgbClr val="FFD2D2"/>
+                </a:solidFill>
+                <a:latin typeface="Calibri"/>
+              </a:rPr>
+              <a:t>SHORT BREAK</a:t>
+            </a:r>
+          </a:p>
+          <a:p>
+            <a:r>
+              <a:rPr sz="3400" b="1" i="0">
+                <a:solidFill>
+                  <a:srgbClr val="FFFFFF"/>
+                </a:solidFill>
+                <a:latin typeface="Calibri"/>
+              </a:rPr>
+              <a:t>15 minutes</a:t>
+            </a:r>
+          </a:p>
+          <a:p>
+            <a:pPr>
+              <a:spcBef>
+                <a:spcPts val="1400"/>
+              </a:spcBef>
+            </a:pPr>
+            <a:r>
               <a:rPr sz="1700" b="0" i="0">
                 <a:solidFill>
-                  <a:srgbClr val="232323"/>
-                </a:solidFill>
-                <a:latin typeface="Calibri"/>
-              </a:rPr>
-              <a:t>•  One-at-a-time (OAT) parameter perturbation: pick one structural parameter, perturb it by a defined amount, re-run, compare against the unperturbed baseline</a:t>
-            </a:r>
-          </a:p>
-          <a:p>
-            <a:pPr marL="0" indent="0">
-              <a:spcAft>
-                <a:spcPts val="1000"/>
-              </a:spcAft>
-            </a:pPr>
-            <a:r>
-              <a:rPr sz="1700" b="1" i="0">
-                <a:solidFill>
-                  <a:srgbClr val="232323"/>
-                </a:solidFill>
-                <a:latin typeface="Calibri"/>
-              </a:rPr>
-              <a:t>•  Why isolate one parameter at a time: perturbing two at once means you can't attribute the output change to either individually</a:t>
-            </a:r>
-          </a:p>
-          <a:p>
-            <a:pPr marL="0" indent="0">
-              <a:spcAft>
-                <a:spcPts val="1000"/>
-              </a:spcAft>
-            </a:pPr>
-            <a:r>
-              <a:rPr sz="1700" b="0" i="0">
-                <a:solidFill>
-                  <a:srgbClr val="232323"/>
-                </a:solidFill>
-                <a:latin typeface="Calibri"/>
-              </a:rPr>
-              <a:t>•  What to check: the same accounting-coherence diagnostics, plus the output indicators most likely to respond to your chosen parameter</a:t>
-            </a:r>
-          </a:p>
-          <a:p>
-            <a:pPr marL="0" indent="0">
-              <a:spcAft>
-                <a:spcPts val="1000"/>
-              </a:spcAft>
-            </a:pPr>
-            <a:r>
-              <a:rPr sz="1700" b="0" i="0">
-                <a:solidFill>
-                  <a:srgbClr val="232323"/>
-                </a:solidFill>
-                <a:latin typeface="Calibri"/>
-              </a:rPr>
-              <a:t>•  Keep a sensitivity log: parameter, baseline value, perturbed value, diagnostic result, output difference</a:t>
-            </a:r>
-          </a:p>
-          <a:p>
-            <a:pPr marL="0" indent="0">
-              <a:spcAft>
-                <a:spcPts val="1000"/>
-              </a:spcAft>
-            </a:pPr>
-            <a:r>
-              <a:rPr sz="1700" b="1" i="0">
-                <a:solidFill>
-                  <a:srgbClr val="232323"/>
-                </a:solidFill>
-                <a:latin typeface="Calibri"/>
-              </a:rPr>
-              <a:t>•  General good-practice methodology — not itself a DGE-METRIC-specific procedure documented in the reviewed sources</a:t>
+                  <a:srgbClr val="FFFFFF"/>
+                </a:solidFill>
+                <a:latin typeface="Calibri"/>
+              </a:rPr>
+              <a:t>Next: sensitivity analysis method</a:t>
             </a:r>
           </a:p>
         </p:txBody>
@@ -6527,7 +6698,7 @@
 </file>
 
 <file path=ppt/slides/slide17.xml><?xml version="1.0" encoding="utf-8"?>
-<p:sld xmlns:a="http://schemas.openxmlformats.org/drawingml/2006/main" xmlns:p="http://schemas.openxmlformats.org/presentationml/2006/main" xmlns:r="http://schemas.openxmlformats.org/officeDocument/2006/relationships">
+<p:sld xmlns:a="http://schemas.openxmlformats.org/drawingml/2006/main" xmlns:r="http://schemas.openxmlformats.org/officeDocument/2006/relationships" xmlns:p="http://schemas.openxmlformats.org/presentationml/2006/main">
   <p:cSld>
     <p:spTree>
       <p:nvGrpSpPr>
@@ -6535,7 +6706,14 @@
         <p:cNvGrpSpPr/>
         <p:nvPr/>
       </p:nvGrpSpPr>
-      <p:grpSpPr/>
+      <p:grpSpPr>
+        <a:xfrm>
+          <a:off x="0" y="0"/>
+          <a:ext cx="0" cy="0"/>
+          <a:chOff x="0" y="0"/>
+          <a:chExt cx="0" cy="0"/>
+        </a:xfrm>
+      </p:grpSpPr>
       <p:sp>
         <p:nvSpPr>
           <p:cNvPr id="2" name="Rectangle 1"/>
@@ -6577,6 +6755,7 @@
           <a:lstStyle/>
           <a:p>
             <a:pPr algn="ctr"/>
+            <a:endParaRPr/>
           </a:p>
         </p:txBody>
       </p:sp>
@@ -6621,6 +6800,7 @@
           <a:lstStyle/>
           <a:p>
             <a:pPr algn="ctr"/>
+            <a:endParaRPr/>
           </a:p>
         </p:txBody>
       </p:sp>
@@ -6658,7 +6838,7 @@
                 </a:solidFill>
                 <a:latin typeface="Calibri"/>
               </a:rPr>
-              <a:t>BLOCKS 5–6 · 40 MIN</a:t>
+              <a:t>BLOCK 4 · 40 MIN</a:t>
             </a:r>
           </a:p>
           <a:p>
@@ -6669,7 +6849,7 @@
                 </a:solidFill>
                 <a:latin typeface="Calibri"/>
               </a:rPr>
-              <a:t>Draft Your Sensitivity-Analysis Plan</a:t>
+              <a:t>Sensitivity Analysis Method</a:t>
             </a:r>
           </a:p>
         </p:txBody>
@@ -6739,6 +6919,7 @@
           <a:lstStyle/>
           <a:p>
             <a:pPr algn="ctr"/>
+            <a:endParaRPr/>
           </a:p>
         </p:txBody>
       </p:sp>
@@ -6820,7 +7001,7 @@
         <p:spPr>
           <a:xfrm>
             <a:off x="502920" y="1554480"/>
-            <a:ext cx="11185855" cy="4892040"/>
+            <a:ext cx="11185855" cy="2698175"/>
           </a:xfrm>
           <a:prstGeom prst="rect">
             <a:avLst/>
@@ -6839,13 +7020,13 @@
               </a:spcAft>
             </a:pPr>
             <a:r>
-              <a:rPr sz="1700" b="0" i="0">
+              <a:rPr sz="1700" b="0" i="0" dirty="0">
                 <a:solidFill>
                   <a:srgbClr val="232323"/>
                 </a:solidFill>
                 <a:latin typeface="Calibri"/>
               </a:rPr>
-              <a:t>•  Pick one structural parameter from docs/calibration.md's list</a:t>
+              <a:t>•  One-at-a-time (OAT) parameter perturbation: pick one structural parameter, perturb it by a defined amount, re-run, compare against the unperturbed baseline</a:t>
             </a:r>
           </a:p>
           <a:p>
@@ -6855,13 +7036,13 @@
               </a:spcAft>
             </a:pPr>
             <a:r>
-              <a:rPr sz="1700" b="0" i="0">
+              <a:rPr sz="1700" b="1" i="0" dirty="0">
                 <a:solidFill>
                   <a:srgbClr val="232323"/>
                 </a:solidFill>
                 <a:latin typeface="Calibri"/>
               </a:rPr>
-              <a:t>•  Document: parameter and baseline value (or [SME REVIEW NEEDED]); the perturbation and why it's reasonable; expected effect with a mechanism, not just "it will change"; accounting-coherence checks you'd re-run</a:t>
+              <a:t>•  Why isolate one parameter at a time: perturbing two at once means you can't attribute the output change to either individually</a:t>
             </a:r>
           </a:p>
           <a:p>
@@ -6871,13 +7052,13 @@
               </a:spcAft>
             </a:pPr>
             <a:r>
-              <a:rPr sz="1700" b="1" i="0">
+              <a:rPr sz="1700" b="0" i="0" dirty="0">
                 <a:solidFill>
                   <a:srgbClr val="232323"/>
                 </a:solidFill>
                 <a:latin typeface="Calibri"/>
               </a:rPr>
-              <a:t>•  Only one parameter perturbed — not a combination</a:t>
+              <a:t>•  What to check: the same accounting-coherence diagnostics, plus the output indicators most likely to respond to your chosen parameter</a:t>
             </a:r>
           </a:p>
           <a:p>
@@ -6887,13 +7068,29 @@
               </a:spcAft>
             </a:pPr>
             <a:r>
-              <a:rPr sz="1700" b="0" i="0">
+              <a:rPr sz="1700" b="0" i="0" dirty="0">
                 <a:solidFill>
                   <a:srgbClr val="232323"/>
                 </a:solidFill>
                 <a:latin typeface="Calibri"/>
               </a:rPr>
-              <a:t>•  Fast report-out across groups</a:t>
+              <a:t>•  Keep a sensitivity log: parameter, baseline value, perturbed value, diagnostic result, output difference</a:t>
+            </a:r>
+          </a:p>
+          <a:p>
+            <a:pPr marL="0" indent="0">
+              <a:spcAft>
+                <a:spcPts val="1000"/>
+              </a:spcAft>
+            </a:pPr>
+            <a:r>
+              <a:rPr sz="1700" b="1" i="0" dirty="0">
+                <a:solidFill>
+                  <a:srgbClr val="232323"/>
+                </a:solidFill>
+                <a:latin typeface="Calibri"/>
+              </a:rPr>
+              <a:t>•  General good-practice methodology — not itself a DGE-METRIC-specific</a:t>
             </a:r>
           </a:p>
         </p:txBody>
@@ -6907,7 +7104,7 @@
 </file>
 
 <file path=ppt/slides/slide18.xml><?xml version="1.0" encoding="utf-8"?>
-<p:sld xmlns:a="http://schemas.openxmlformats.org/drawingml/2006/main" xmlns:p="http://schemas.openxmlformats.org/presentationml/2006/main" xmlns:r="http://schemas.openxmlformats.org/officeDocument/2006/relationships">
+<p:sld xmlns:a="http://schemas.openxmlformats.org/drawingml/2006/main" xmlns:r="http://schemas.openxmlformats.org/officeDocument/2006/relationships" xmlns:p="http://schemas.openxmlformats.org/presentationml/2006/main">
   <p:cSld>
     <p:spTree>
       <p:nvGrpSpPr>
@@ -6915,7 +7112,14 @@
         <p:cNvGrpSpPr/>
         <p:nvPr/>
       </p:nvGrpSpPr>
-      <p:grpSpPr/>
+      <p:grpSpPr>
+        <a:xfrm>
+          <a:off x="0" y="0"/>
+          <a:ext cx="0" cy="0"/>
+          <a:chOff x="0" y="0"/>
+          <a:chExt cx="0" cy="0"/>
+        </a:xfrm>
+      </p:grpSpPr>
       <p:sp>
         <p:nvSpPr>
           <p:cNvPr id="2" name="Rectangle 1"/>
@@ -6957,6 +7161,7 @@
           <a:lstStyle/>
           <a:p>
             <a:pPr algn="ctr"/>
+            <a:endParaRPr/>
           </a:p>
         </p:txBody>
       </p:sp>
@@ -7001,6 +7206,7 @@
           <a:lstStyle/>
           <a:p>
             <a:pPr algn="ctr"/>
+            <a:endParaRPr/>
           </a:p>
         </p:txBody>
       </p:sp>
@@ -7038,7 +7244,7 @@
                 </a:solidFill>
                 <a:latin typeface="Calibri"/>
               </a:rPr>
-              <a:t>BLOCK 7 · 30 MIN</a:t>
+              <a:t>BLOCKS 5–6 · 55 MIN</a:t>
             </a:r>
           </a:p>
           <a:p>
@@ -7049,7 +7255,7 @@
                 </a:solidFill>
                 <a:latin typeface="Calibri"/>
               </a:rPr>
-              <a:t>Course Close</a:t>
+              <a:t>Draft Your Sensitivity-Analysis Plan</a:t>
             </a:r>
           </a:p>
         </p:txBody>
@@ -7119,6 +7325,7 @@
           <a:lstStyle/>
           <a:p>
             <a:pPr algn="ctr"/>
+            <a:endParaRPr/>
           </a:p>
         </p:txBody>
       </p:sp>
@@ -7200,7 +7407,7 @@
         <p:spPr>
           <a:xfrm>
             <a:off x="502920" y="1554480"/>
-            <a:ext cx="11185855" cy="4892040"/>
+            <a:ext cx="11185855" cy="1785104"/>
           </a:xfrm>
           <a:prstGeom prst="rect">
             <a:avLst/>
@@ -7219,13 +7426,31 @@
               </a:spcAft>
             </a:pPr>
             <a:r>
-              <a:rPr sz="1700" b="0" i="0">
+              <a:rPr sz="1700" b="0" i="0" dirty="0">
                 <a:solidFill>
                   <a:srgbClr val="232323"/>
                 </a:solidFill>
                 <a:latin typeface="Calibri"/>
               </a:rPr>
-              <a:t>•  Independent-use checklist — a single combined self-assessment covering calibration/codebase, scenario design, reserve requirements, and reproducibility</a:t>
+              <a:t>•  Pick one structural parameter from docs/</a:t>
+            </a:r>
+            <a:r>
+              <a:rPr sz="1700" b="0" i="0" dirty="0" err="1">
+                <a:solidFill>
+                  <a:srgbClr val="232323"/>
+                </a:solidFill>
+                <a:latin typeface="Calibri"/>
+              </a:rPr>
+              <a:t>calibration.md's</a:t>
+            </a:r>
+            <a:r>
+              <a:rPr sz="1700" b="0" i="0" dirty="0">
+                <a:solidFill>
+                  <a:srgbClr val="232323"/>
+                </a:solidFill>
+                <a:latin typeface="Calibri"/>
+              </a:rPr>
+              <a:t> list</a:t>
             </a:r>
           </a:p>
           <a:p>
@@ -7235,77 +7460,31 @@
               </a:spcAft>
             </a:pPr>
             <a:r>
-              <a:rPr sz="1700" b="1" i="0">
+              <a:rPr sz="1700" b="0" i="0" dirty="0">
                 <a:solidFill>
                   <a:srgbClr val="232323"/>
                 </a:solidFill>
                 <a:latin typeface="Calibri"/>
               </a:rPr>
-              <a:t>•  Exit ticket — submit in writing:</a:t>
-            </a:r>
-          </a:p>
-          <a:p>
-            <a:pPr marL="320040" indent="0">
-              <a:spcAft>
-                <a:spcPts val="600"/>
-              </a:spcAft>
-            </a:pPr>
-            <a:r>
-              <a:rPr sz="1500" b="0" i="0">
+              <a:t>•  Document: parameter and </a:t>
+            </a:r>
+            <a:r>
+              <a:rPr sz="1700" b="0" i="0">
                 <a:solidFill>
                   <a:srgbClr val="232323"/>
                 </a:solidFill>
                 <a:latin typeface="Calibri"/>
               </a:rPr>
-              <a:t>–  One calibration insight you'll use going forward</a:t>
-            </a:r>
-          </a:p>
-          <a:p>
-            <a:pPr marL="320040" indent="0">
-              <a:spcAft>
-                <a:spcPts val="600"/>
-              </a:spcAft>
-            </a:pPr>
-            <a:r>
-              <a:rPr sz="1500" b="0" i="0">
+              <a:t>baseline value; </a:t>
+            </a:r>
+            <a:r>
+              <a:rPr sz="1700" b="0" i="0" dirty="0">
                 <a:solidFill>
                   <a:srgbClr val="232323"/>
                 </a:solidFill>
                 <a:latin typeface="Calibri"/>
               </a:rPr>
-              <a:t>–  One scenario-design practice you'll keep</a:t>
-            </a:r>
-          </a:p>
-          <a:p>
-            <a:pPr marL="320040" indent="0">
-              <a:spcAft>
-                <a:spcPts val="600"/>
-              </a:spcAft>
-            </a:pPr>
-            <a:r>
-              <a:rPr sz="1500" b="0" i="0">
-                <a:solidFill>
-                  <a:srgbClr val="232323"/>
-                </a:solidFill>
-                <a:latin typeface="Calibri"/>
-              </a:rPr>
-              <a:t>–  One reserve-requirement or policy-analysis habit you'll apply</a:t>
-            </a:r>
-          </a:p>
-          <a:p>
-            <a:pPr marL="320040" indent="0">
-              <a:spcAft>
-                <a:spcPts val="600"/>
-              </a:spcAft>
-            </a:pPr>
-            <a:r>
-              <a:rPr sz="1500" b="0" i="0">
-                <a:solidFill>
-                  <a:srgbClr val="232323"/>
-                </a:solidFill>
-                <a:latin typeface="Calibri"/>
-              </a:rPr>
-              <a:t>–  One remaining question for future support</a:t>
+              <a:t>the perturbation and why it's reasonable; expected effect with a mechanism, not just "it will change"; accounting-coherence checks you'd re-run</a:t>
             </a:r>
           </a:p>
           <a:p>
@@ -7315,13 +7494,29 @@
               </a:spcAft>
             </a:pPr>
             <a:r>
-              <a:rPr sz="1700" b="0" i="0">
+              <a:rPr sz="1700" b="1" i="0" dirty="0">
                 <a:solidFill>
                   <a:srgbClr val="232323"/>
                 </a:solidFill>
                 <a:latin typeface="Calibri"/>
               </a:rPr>
-              <a:t>•  Open institutional/SME questions are tracked in qa/sme-questions.md for asynchronous follow-up, not worked live here</a:t>
+              <a:t>•  Only one parameter perturbed — not a combination</a:t>
+            </a:r>
+          </a:p>
+          <a:p>
+            <a:pPr marL="0" indent="0">
+              <a:spcAft>
+                <a:spcPts val="1000"/>
+              </a:spcAft>
+            </a:pPr>
+            <a:r>
+              <a:rPr sz="1700" b="0" i="0" dirty="0">
+                <a:solidFill>
+                  <a:srgbClr val="232323"/>
+                </a:solidFill>
+                <a:latin typeface="Calibri"/>
+              </a:rPr>
+              <a:t>•  Fast report-out across groups</a:t>
             </a:r>
           </a:p>
         </p:txBody>
@@ -7335,7 +7530,7 @@
 </file>
 
 <file path=ppt/slides/slide19.xml><?xml version="1.0" encoding="utf-8"?>
-<p:sld xmlns:a="http://schemas.openxmlformats.org/drawingml/2006/main" xmlns:p="http://schemas.openxmlformats.org/presentationml/2006/main" xmlns:r="http://schemas.openxmlformats.org/officeDocument/2006/relationships">
+<p:sld xmlns:a="http://schemas.openxmlformats.org/drawingml/2006/main" xmlns:r="http://schemas.openxmlformats.org/officeDocument/2006/relationships" xmlns:p="http://schemas.openxmlformats.org/presentationml/2006/main">
   <p:cSld>
     <p:spTree>
       <p:nvGrpSpPr>
@@ -7343,7 +7538,14 @@
         <p:cNvGrpSpPr/>
         <p:nvPr/>
       </p:nvGrpSpPr>
-      <p:grpSpPr/>
+      <p:grpSpPr>
+        <a:xfrm>
+          <a:off x="0" y="0"/>
+          <a:ext cx="0" cy="0"/>
+          <a:chOff x="0" y="0"/>
+          <a:chExt cx="0" cy="0"/>
+        </a:xfrm>
+      </p:grpSpPr>
       <p:sp>
         <p:nvSpPr>
           <p:cNvPr id="2" name="Rectangle 1"/>
@@ -7354,6 +7556,51 @@
           <a:xfrm>
             <a:off x="0" y="0"/>
             <a:ext cx="12191695" cy="6858000"/>
+          </a:xfrm>
+          <a:prstGeom prst="rect">
+            <a:avLst/>
+          </a:prstGeom>
+          <a:solidFill>
+            <a:srgbClr val="FFFFFF"/>
+          </a:solidFill>
+          <a:ln>
+            <a:noFill/>
+          </a:ln>
+          <a:effectLst/>
+        </p:spPr>
+        <p:style>
+          <a:lnRef idx="1">
+            <a:schemeClr val="accent1"/>
+          </a:lnRef>
+          <a:fillRef idx="3">
+            <a:schemeClr val="accent1"/>
+          </a:fillRef>
+          <a:effectRef idx="2">
+            <a:schemeClr val="accent1"/>
+          </a:effectRef>
+          <a:fontRef idx="minor">
+            <a:schemeClr val="lt1"/>
+          </a:fontRef>
+        </p:style>
+        <p:txBody>
+          <a:bodyPr rtlCol="0" anchor="ctr"/>
+          <a:lstStyle/>
+          <a:p>
+            <a:pPr algn="ctr"/>
+            <a:endParaRPr/>
+          </a:p>
+        </p:txBody>
+      </p:sp>
+      <p:sp>
+        <p:nvSpPr>
+          <p:cNvPr id="3" name="Rectangle 2"/>
+          <p:cNvSpPr/>
+          <p:nvPr/>
+        </p:nvSpPr>
+        <p:spPr>
+          <a:xfrm>
+            <a:off x="0" y="0"/>
+            <a:ext cx="12191695" cy="1280160"/>
           </a:xfrm>
           <a:prstGeom prst="rect">
             <a:avLst/>
@@ -7385,12 +7632,63 @@
           <a:lstStyle/>
           <a:p>
             <a:pPr algn="ctr"/>
+            <a:endParaRPr/>
+          </a:p>
+        </p:txBody>
+      </p:sp>
+      <p:sp>
+        <p:nvSpPr>
+          <p:cNvPr id="4" name="TextBox 3"/>
+          <p:cNvSpPr txBox="1"/>
+          <p:nvPr/>
+        </p:nvSpPr>
+        <p:spPr>
+          <a:xfrm>
+            <a:off x="502920" y="91440"/>
+            <a:ext cx="8778240" cy="1097280"/>
+          </a:xfrm>
+          <a:prstGeom prst="rect">
+            <a:avLst/>
+          </a:prstGeom>
+          <a:noFill/>
+        </p:spPr>
+        <p:txBody>
+          <a:bodyPr wrap="square" anchor="ctr">
+            <a:spAutoFit/>
+          </a:bodyPr>
+          <a:lstStyle/>
+          <a:p>
+            <a:pPr>
+              <a:spcAft>
+                <a:spcPts val="1400"/>
+              </a:spcAft>
+            </a:pPr>
+            <a:r>
+              <a:rPr sz="1100" b="1" i="0">
+                <a:solidFill>
+                  <a:srgbClr val="FFD2D2"/>
+                </a:solidFill>
+                <a:latin typeface="Calibri"/>
+              </a:rPr>
+              <a:t>BLOCK 7 · 40 MIN</a:t>
+            </a:r>
+          </a:p>
+          <a:p>
+            <a:r>
+              <a:rPr sz="2400" b="1" i="0">
+                <a:solidFill>
+                  <a:srgbClr val="FFFFFF"/>
+                </a:solidFill>
+                <a:latin typeface="Calibri"/>
+              </a:rPr>
+              <a:t>Course Close</a:t>
+            </a:r>
           </a:p>
         </p:txBody>
       </p:sp>
       <p:pic>
         <p:nvPicPr>
-          <p:cNvPr id="3" name="Picture 2" descr="GIZ_Logo.png"/>
+          <p:cNvPr id="5" name="Picture 4" descr="GIZ_Logo.png"/>
           <p:cNvPicPr>
             <a:picLocks noChangeAspect="1"/>
           </p:cNvPicPr>
@@ -7404,8 +7702,8 @@
         </p:blipFill>
         <p:spPr>
           <a:xfrm>
-            <a:off x="10088575" y="457200"/>
-            <a:ext cx="1656522" cy="457200"/>
+            <a:off x="10454335" y="420624"/>
+            <a:ext cx="1590261" cy="438912"/>
           </a:xfrm>
           <a:prstGeom prst="rect">
             <a:avLst/>
@@ -7414,14 +7712,128 @@
       </p:pic>
       <p:sp>
         <p:nvSpPr>
-          <p:cNvPr id="4" name="TextBox 3"/>
+          <p:cNvPr id="6" name="Rectangle 5"/>
+          <p:cNvSpPr/>
+          <p:nvPr/>
+        </p:nvSpPr>
+        <p:spPr>
+          <a:xfrm>
+            <a:off x="0" y="6565392"/>
+            <a:ext cx="12191695" cy="292608"/>
+          </a:xfrm>
+          <a:prstGeom prst="rect">
+            <a:avLst/>
+          </a:prstGeom>
+          <a:solidFill>
+            <a:srgbClr val="FFFFFF"/>
+          </a:solidFill>
+          <a:ln>
+            <a:noFill/>
+          </a:ln>
+          <a:effectLst/>
+        </p:spPr>
+        <p:style>
+          <a:lnRef idx="1">
+            <a:schemeClr val="accent1"/>
+          </a:lnRef>
+          <a:fillRef idx="3">
+            <a:schemeClr val="accent1"/>
+          </a:fillRef>
+          <a:effectRef idx="2">
+            <a:schemeClr val="accent1"/>
+          </a:effectRef>
+          <a:fontRef idx="minor">
+            <a:schemeClr val="lt1"/>
+          </a:fontRef>
+        </p:style>
+        <p:txBody>
+          <a:bodyPr rtlCol="0" anchor="ctr"/>
+          <a:lstStyle/>
+          <a:p>
+            <a:pPr algn="ctr"/>
+            <a:endParaRPr/>
+          </a:p>
+        </p:txBody>
+      </p:sp>
+      <p:sp>
+        <p:nvSpPr>
+          <p:cNvPr id="7" name="TextBox 6"/>
           <p:cNvSpPr txBox="1"/>
           <p:nvPr/>
         </p:nvSpPr>
         <p:spPr>
           <a:xfrm>
-            <a:off x="822960" y="2651760"/>
-            <a:ext cx="10058400" cy="2011680"/>
+            <a:off x="457200" y="6547104"/>
+            <a:ext cx="7315200" cy="274320"/>
+          </a:xfrm>
+          <a:prstGeom prst="rect">
+            <a:avLst/>
+          </a:prstGeom>
+          <a:noFill/>
+        </p:spPr>
+        <p:txBody>
+          <a:bodyPr wrap="none" tIns="0" bIns="0">
+            <a:spAutoFit/>
+          </a:bodyPr>
+          <a:lstStyle/>
+          <a:p>
+            <a:r>
+              <a:rPr sz="1000" b="0" i="0">
+                <a:solidFill>
+                  <a:srgbClr val="787878"/>
+                </a:solidFill>
+                <a:latin typeface="Calibri"/>
+              </a:rPr>
+              <a:t>DGE-METRIC Online Training — Online Day 3 — Fri 24 Jul 2026</a:t>
+            </a:r>
+          </a:p>
+        </p:txBody>
+      </p:sp>
+      <p:sp>
+        <p:nvSpPr>
+          <p:cNvPr id="8" name="TextBox 7"/>
+          <p:cNvSpPr txBox="1"/>
+          <p:nvPr/>
+        </p:nvSpPr>
+        <p:spPr>
+          <a:xfrm>
+            <a:off x="11002975" y="6547104"/>
+            <a:ext cx="822960" cy="274320"/>
+          </a:xfrm>
+          <a:prstGeom prst="rect">
+            <a:avLst/>
+          </a:prstGeom>
+          <a:noFill/>
+        </p:spPr>
+        <p:txBody>
+          <a:bodyPr wrap="none" tIns="0">
+            <a:spAutoFit/>
+          </a:bodyPr>
+          <a:lstStyle/>
+          <a:p>
+            <a:pPr algn="r"/>
+            <a:r>
+              <a:rPr sz="1000" b="0" i="0">
+                <a:solidFill>
+                  <a:srgbClr val="787878"/>
+                </a:solidFill>
+                <a:latin typeface="Calibri"/>
+              </a:rPr>
+              <a:t>15</a:t>
+            </a:r>
+          </a:p>
+        </p:txBody>
+      </p:sp>
+      <p:sp>
+        <p:nvSpPr>
+          <p:cNvPr id="9" name="TextBox 8"/>
+          <p:cNvSpPr txBox="1"/>
+          <p:nvPr/>
+        </p:nvSpPr>
+        <p:spPr>
+          <a:xfrm>
+            <a:off x="502920" y="1554480"/>
+            <a:ext cx="11185855" cy="2287806"/>
           </a:xfrm>
           <a:prstGeom prst="rect">
             <a:avLst/>
@@ -7434,46 +7846,99 @@
           </a:bodyPr>
           <a:lstStyle/>
           <a:p>
-            <a:pPr>
+            <a:pPr marL="0" indent="0">
               <a:spcAft>
                 <a:spcPts val="1000"/>
               </a:spcAft>
             </a:pPr>
             <a:r>
-              <a:rPr sz="1500" b="1" i="0">
-                <a:solidFill>
-                  <a:srgbClr val="FFD2D2"/>
-                </a:solidFill>
-                <a:latin typeface="Calibri"/>
-              </a:rPr>
-              <a:t>THANK YOU</a:t>
-            </a:r>
-          </a:p>
-          <a:p>
-            <a:r>
-              <a:rPr sz="3400" b="1" i="0">
-                <a:solidFill>
-                  <a:srgbClr val="FFFFFF"/>
-                </a:solidFill>
-                <a:latin typeface="Calibri"/>
-              </a:rPr>
-              <a:t>Congratulations on completing DGE-METRIC Online Training</a:t>
-            </a:r>
-          </a:p>
-          <a:p>
-            <a:pPr>
-              <a:spcBef>
-                <a:spcPts val="1400"/>
-              </a:spcBef>
+              <a:rPr sz="1700" b="0" i="0" dirty="0">
+                <a:solidFill>
+                  <a:srgbClr val="232323"/>
+                </a:solidFill>
+                <a:latin typeface="Calibri"/>
+              </a:rPr>
+              <a:t>•  Independent-use checklist — a single combined self-assessment covering calibration/codebase, scenario design, reserve requirements, and reproducibility</a:t>
+            </a:r>
+          </a:p>
+          <a:p>
+            <a:pPr marL="0" indent="0">
+              <a:spcAft>
+                <a:spcPts val="1000"/>
+              </a:spcAft>
             </a:pPr>
             <a:r>
-              <a:rPr sz="1700" b="0" i="0">
-                <a:solidFill>
-                  <a:srgbClr val="FFFFFF"/>
-                </a:solidFill>
-                <a:latin typeface="Calibri"/>
-              </a:rPr>
-              <a:t>Questions and independent-use support: course contact to be confirmed</a:t>
+              <a:rPr sz="1700" b="1" i="0" dirty="0">
+                <a:solidFill>
+                  <a:srgbClr val="232323"/>
+                </a:solidFill>
+                <a:latin typeface="Calibri"/>
+              </a:rPr>
+              <a:t>•  Exit ticket — submit in writing:</a:t>
+            </a:r>
+          </a:p>
+          <a:p>
+            <a:pPr marL="320040" indent="0">
+              <a:spcAft>
+                <a:spcPts val="600"/>
+              </a:spcAft>
+            </a:pPr>
+            <a:r>
+              <a:rPr sz="1500" b="0" i="0" dirty="0">
+                <a:solidFill>
+                  <a:srgbClr val="232323"/>
+                </a:solidFill>
+                <a:latin typeface="Calibri"/>
+              </a:rPr>
+              <a:t>–  One calibration insight you'll use going forward</a:t>
+            </a:r>
+          </a:p>
+          <a:p>
+            <a:pPr marL="320040" indent="0">
+              <a:spcAft>
+                <a:spcPts val="600"/>
+              </a:spcAft>
+            </a:pPr>
+            <a:r>
+              <a:rPr sz="1500" b="0" i="0" dirty="0">
+                <a:solidFill>
+                  <a:srgbClr val="232323"/>
+                </a:solidFill>
+                <a:latin typeface="Calibri"/>
+              </a:rPr>
+              <a:t>–  One scenario-design practice you'll keep</a:t>
+            </a:r>
+          </a:p>
+          <a:p>
+            <a:pPr marL="320040" indent="0">
+              <a:spcAft>
+                <a:spcPts val="600"/>
+              </a:spcAft>
+            </a:pPr>
+            <a:r>
+              <a:rPr sz="1500" b="0" i="0" dirty="0">
+                <a:solidFill>
+                  <a:srgbClr val="232323"/>
+                </a:solidFill>
+                <a:latin typeface="Calibri"/>
+              </a:rPr>
+              <a:t>–  One reserve-requirement or policy-analysis habit you'll apply</a:t>
+            </a:r>
+          </a:p>
+          <a:p>
+            <a:pPr marL="320040" indent="0">
+              <a:spcAft>
+                <a:spcPts val="600"/>
+              </a:spcAft>
+            </a:pPr>
+            <a:r>
+              <a:rPr sz="1500" b="0" i="0" dirty="0">
+                <a:solidFill>
+                  <a:srgbClr val="232323"/>
+                </a:solidFill>
+                <a:latin typeface="Calibri"/>
+              </a:rPr>
+              <a:t>–  One remaining question for future support</a:t>
             </a:r>
           </a:p>
         </p:txBody>
@@ -7487,7 +7952,7 @@
 </file>
 
 <file path=ppt/slides/slide2.xml><?xml version="1.0" encoding="utf-8"?>
-<p:sld xmlns:a="http://schemas.openxmlformats.org/drawingml/2006/main" xmlns:p="http://schemas.openxmlformats.org/presentationml/2006/main" xmlns:r="http://schemas.openxmlformats.org/officeDocument/2006/relationships">
+<p:sld xmlns:a="http://schemas.openxmlformats.org/drawingml/2006/main" xmlns:r="http://schemas.openxmlformats.org/officeDocument/2006/relationships" xmlns:p="http://schemas.openxmlformats.org/presentationml/2006/main">
   <p:cSld>
     <p:spTree>
       <p:nvGrpSpPr>
@@ -7495,7 +7960,14 @@
         <p:cNvGrpSpPr/>
         <p:nvPr/>
       </p:nvGrpSpPr>
-      <p:grpSpPr/>
+      <p:grpSpPr>
+        <a:xfrm>
+          <a:off x="0" y="0"/>
+          <a:ext cx="0" cy="0"/>
+          <a:chOff x="0" y="0"/>
+          <a:chExt cx="0" cy="0"/>
+        </a:xfrm>
+      </p:grpSpPr>
       <p:sp>
         <p:nvSpPr>
           <p:cNvPr id="2" name="Rectangle 1"/>
@@ -7537,6 +8009,7 @@
           <a:lstStyle/>
           <a:p>
             <a:pPr algn="ctr"/>
+            <a:endParaRPr/>
           </a:p>
         </p:txBody>
       </p:sp>
@@ -7625,7 +8098,167 @@
                 </a:solidFill>
                 <a:latin typeface="Calibri"/>
               </a:rPr>
-              <a:t>Applying the reserve-requirement method · 180 minutes</a:t>
+              <a:t>Computing GDP losses under shortage scenarios · 180 minutes</a:t>
+            </a:r>
+          </a:p>
+        </p:txBody>
+      </p:sp>
+    </p:spTree>
+  </p:cSld>
+  <p:clrMapOvr>
+    <a:masterClrMapping/>
+  </p:clrMapOvr>
+</p:sld>
+</file>
+
+<file path=ppt/slides/slide20.xml><?xml version="1.0" encoding="utf-8"?>
+<p:sld xmlns:a="http://schemas.openxmlformats.org/drawingml/2006/main" xmlns:r="http://schemas.openxmlformats.org/officeDocument/2006/relationships" xmlns:p="http://schemas.openxmlformats.org/presentationml/2006/main">
+  <p:cSld>
+    <p:spTree>
+      <p:nvGrpSpPr>
+        <p:cNvPr id="1" name=""/>
+        <p:cNvGrpSpPr/>
+        <p:nvPr/>
+      </p:nvGrpSpPr>
+      <p:grpSpPr>
+        <a:xfrm>
+          <a:off x="0" y="0"/>
+          <a:ext cx="0" cy="0"/>
+          <a:chOff x="0" y="0"/>
+          <a:chExt cx="0" cy="0"/>
+        </a:xfrm>
+      </p:grpSpPr>
+      <p:sp>
+        <p:nvSpPr>
+          <p:cNvPr id="2" name="Rectangle 1"/>
+          <p:cNvSpPr/>
+          <p:nvPr/>
+        </p:nvSpPr>
+        <p:spPr>
+          <a:xfrm>
+            <a:off x="0" y="0"/>
+            <a:ext cx="12191695" cy="6858000"/>
+          </a:xfrm>
+          <a:prstGeom prst="rect">
+            <a:avLst/>
+          </a:prstGeom>
+          <a:solidFill>
+            <a:srgbClr val="CC071E"/>
+          </a:solidFill>
+          <a:ln>
+            <a:noFill/>
+          </a:ln>
+          <a:effectLst/>
+        </p:spPr>
+        <p:style>
+          <a:lnRef idx="1">
+            <a:schemeClr val="accent1"/>
+          </a:lnRef>
+          <a:fillRef idx="3">
+            <a:schemeClr val="accent1"/>
+          </a:fillRef>
+          <a:effectRef idx="2">
+            <a:schemeClr val="accent1"/>
+          </a:effectRef>
+          <a:fontRef idx="minor">
+            <a:schemeClr val="lt1"/>
+          </a:fontRef>
+        </p:style>
+        <p:txBody>
+          <a:bodyPr rtlCol="0" anchor="ctr"/>
+          <a:lstStyle/>
+          <a:p>
+            <a:pPr algn="ctr"/>
+            <a:endParaRPr/>
+          </a:p>
+        </p:txBody>
+      </p:sp>
+      <p:pic>
+        <p:nvPicPr>
+          <p:cNvPr id="3" name="Picture 2" descr="GIZ_Logo.png"/>
+          <p:cNvPicPr>
+            <a:picLocks noChangeAspect="1"/>
+          </p:cNvPicPr>
+          <p:nvPr/>
+        </p:nvPicPr>
+        <p:blipFill>
+          <a:blip r:embed="rId2"/>
+          <a:stretch>
+            <a:fillRect/>
+          </a:stretch>
+        </p:blipFill>
+        <p:spPr>
+          <a:xfrm>
+            <a:off x="10088575" y="457200"/>
+            <a:ext cx="1656522" cy="457200"/>
+          </a:xfrm>
+          <a:prstGeom prst="rect">
+            <a:avLst/>
+          </a:prstGeom>
+        </p:spPr>
+      </p:pic>
+      <p:sp>
+        <p:nvSpPr>
+          <p:cNvPr id="4" name="TextBox 3"/>
+          <p:cNvSpPr txBox="1"/>
+          <p:nvPr/>
+        </p:nvSpPr>
+        <p:spPr>
+          <a:xfrm>
+            <a:off x="822960" y="2651760"/>
+            <a:ext cx="10058400" cy="2011680"/>
+          </a:xfrm>
+          <a:prstGeom prst="rect">
+            <a:avLst/>
+          </a:prstGeom>
+          <a:noFill/>
+        </p:spPr>
+        <p:txBody>
+          <a:bodyPr wrap="square">
+            <a:spAutoFit/>
+          </a:bodyPr>
+          <a:lstStyle/>
+          <a:p>
+            <a:pPr>
+              <a:spcAft>
+                <a:spcPts val="1000"/>
+              </a:spcAft>
+            </a:pPr>
+            <a:r>
+              <a:rPr sz="1500" b="1" i="0">
+                <a:solidFill>
+                  <a:srgbClr val="FFD2D2"/>
+                </a:solidFill>
+                <a:latin typeface="Calibri"/>
+              </a:rPr>
+              <a:t>THANK YOU</a:t>
+            </a:r>
+          </a:p>
+          <a:p>
+            <a:r>
+              <a:rPr sz="3400" b="1" i="0">
+                <a:solidFill>
+                  <a:srgbClr val="FFFFFF"/>
+                </a:solidFill>
+                <a:latin typeface="Calibri"/>
+              </a:rPr>
+              <a:t>Congratulations on completing DGE-METRIC Online Training</a:t>
+            </a:r>
+          </a:p>
+          <a:p>
+            <a:pPr>
+              <a:spcBef>
+                <a:spcPts val="1400"/>
+              </a:spcBef>
+            </a:pPr>
+            <a:r>
+              <a:rPr sz="1700" b="0" i="0">
+                <a:solidFill>
+                  <a:srgbClr val="FFFFFF"/>
+                </a:solidFill>
+                <a:latin typeface="Calibri"/>
+              </a:rPr>
+              <a:t>Questions and independent-use support: course contact to be confirmed</a:t>
             </a:r>
           </a:p>
         </p:txBody>
@@ -7639,7 +8272,7 @@
 </file>
 
 <file path=ppt/slides/slide3.xml><?xml version="1.0" encoding="utf-8"?>
-<p:sld xmlns:a="http://schemas.openxmlformats.org/drawingml/2006/main" xmlns:p="http://schemas.openxmlformats.org/presentationml/2006/main" xmlns:r="http://schemas.openxmlformats.org/officeDocument/2006/relationships">
+<p:sld xmlns:a="http://schemas.openxmlformats.org/drawingml/2006/main" xmlns:r="http://schemas.openxmlformats.org/officeDocument/2006/relationships" xmlns:p="http://schemas.openxmlformats.org/presentationml/2006/main">
   <p:cSld>
     <p:spTree>
       <p:nvGrpSpPr>
@@ -7647,7 +8280,14 @@
         <p:cNvGrpSpPr/>
         <p:nvPr/>
       </p:nvGrpSpPr>
-      <p:grpSpPr/>
+      <p:grpSpPr>
+        <a:xfrm>
+          <a:off x="0" y="0"/>
+          <a:ext cx="0" cy="0"/>
+          <a:chOff x="0" y="0"/>
+          <a:chExt cx="0" cy="0"/>
+        </a:xfrm>
+      </p:grpSpPr>
       <p:sp>
         <p:nvSpPr>
           <p:cNvPr id="2" name="Rectangle 1"/>
@@ -7689,6 +8329,7 @@
           <a:lstStyle/>
           <a:p>
             <a:pPr algn="ctr"/>
+            <a:endParaRPr/>
           </a:p>
         </p:txBody>
       </p:sp>
@@ -7733,6 +8374,7 @@
           <a:lstStyle/>
           <a:p>
             <a:pPr algn="ctr"/>
+            <a:endParaRPr/>
           </a:p>
         </p:txBody>
       </p:sp>
@@ -7765,7 +8407,7 @@
                 </a:solidFill>
                 <a:latin typeface="Calibri"/>
               </a:rPr>
-              <a:t>This Morning's Agenda — 5 Blocks, 180 Minutes (+1 break)</a:t>
+              <a:t>This Morning's Agenda — 4 Blocks, 150 Minutes (+1 break)</a:t>
             </a:r>
           </a:p>
         </p:txBody>
@@ -7835,6 +8477,7 @@
           <a:lstStyle/>
           <a:p>
             <a:pPr algn="ctr"/>
+            <a:endParaRPr/>
           </a:p>
         </p:txBody>
       </p:sp>
@@ -7926,9 +8569,27 @@
                 <a:tableStyleId>{5C22544A-7EE6-4342-B048-85BDC9FD1C3A}</a:tableStyleId>
               </a:tblPr>
               <a:tblGrid>
-                <a:gridCol w="4238850"/>
-                <a:gridCol w="941966"/>
-                <a:gridCol w="6005037"/>
+                <a:gridCol w="4238850">
+                  <a:extLst>
+                    <a:ext uri="{9D8B030D-6E8A-4147-A177-3AD203B41FA5}">
+                      <a16:colId xmlns:a16="http://schemas.microsoft.com/office/drawing/2014/main" val="20000"/>
+                    </a:ext>
+                  </a:extLst>
+                </a:gridCol>
+                <a:gridCol w="941966">
+                  <a:extLst>
+                    <a:ext uri="{9D8B030D-6E8A-4147-A177-3AD203B41FA5}">
+                      <a16:colId xmlns:a16="http://schemas.microsoft.com/office/drawing/2014/main" val="20001"/>
+                    </a:ext>
+                  </a:extLst>
+                </a:gridCol>
+                <a:gridCol w="6005037">
+                  <a:extLst>
+                    <a:ext uri="{9D8B030D-6E8A-4147-A177-3AD203B41FA5}">
+                      <a16:colId xmlns:a16="http://schemas.microsoft.com/office/drawing/2014/main" val="20002"/>
+                    </a:ext>
+                  </a:extLst>
+                </a:gridCol>
               </a:tblGrid>
               <a:tr h="815340">
                 <a:tc>
@@ -7947,7 +8608,7 @@
                       </a:r>
                     </a:p>
                   </a:txBody>
-                  <a:tcPr anchor="ctr" marT="50800" marB="50800">
+                  <a:tcPr marT="50800" marB="50800" anchor="ctr">
                     <a:solidFill>
                       <a:srgbClr val="CC071E"/>
                     </a:solidFill>
@@ -7969,7 +8630,7 @@
                       </a:r>
                     </a:p>
                   </a:txBody>
-                  <a:tcPr anchor="ctr" marT="50800" marB="50800">
+                  <a:tcPr marT="50800" marB="50800" anchor="ctr">
                     <a:solidFill>
                       <a:srgbClr val="CC071E"/>
                     </a:solidFill>
@@ -7991,17 +8652,22 @@
                       </a:r>
                     </a:p>
                   </a:txBody>
-                  <a:tcPr anchor="ctr" marT="50800" marB="50800">
+                  <a:tcPr marT="50800" marB="50800" anchor="ctr">
                     <a:solidFill>
                       <a:srgbClr val="CC071E"/>
                     </a:solidFill>
                   </a:tcPr>
                 </a:tc>
+                <a:extLst>
+                  <a:ext uri="{0D108BD9-81ED-4DB2-BD59-A6C34878D82A}">
+                    <a16:rowId xmlns:a16="http://schemas.microsoft.com/office/drawing/2014/main" val="10000"/>
+                  </a:ext>
+                </a:extLst>
               </a:tr>
               <a:tr h="815340">
                 <a:tc>
                   <a:txBody>
-                    <a:bodyPr wrap="square"/>
+                    <a:bodyPr/>
                     <a:lstStyle/>
                     <a:p>
                       <a:r>
@@ -8011,11 +8677,11 @@
                           </a:solidFill>
                           <a:latin typeface="Calibri"/>
                         </a:rPr>
-                        <a:t>1. Recap method and implementation plan</a:t>
+                        <a:t>1. Recap and discussion</a:t>
                       </a:r>
                     </a:p>
                   </a:txBody>
-                  <a:tcPr anchor="ctr" marT="38100" marB="38100">
+                  <a:tcPr marT="38100" marB="38100" anchor="ctr">
                     <a:solidFill>
                       <a:srgbClr val="FFFFFF"/>
                     </a:solidFill>
@@ -8023,7 +8689,153 @@
                 </a:tc>
                 <a:tc>
                   <a:txBody>
-                    <a:bodyPr wrap="square"/>
+                    <a:bodyPr/>
+                    <a:lstStyle/>
+                    <a:p>
+                      <a:r>
+                        <a:rPr sz="1300" b="0" i="0">
+                          <a:solidFill>
+                            <a:srgbClr val="232323"/>
+                          </a:solidFill>
+                          <a:latin typeface="Calibri"/>
+                        </a:rPr>
+                        <a:t>60</a:t>
+                      </a:r>
+                    </a:p>
+                  </a:txBody>
+                  <a:tcPr marT="38100" marB="38100" anchor="ctr">
+                    <a:solidFill>
+                      <a:srgbClr val="FFFFFF"/>
+                    </a:solidFill>
+                  </a:tcPr>
+                </a:tc>
+                <a:tc>
+                  <a:txBody>
+                    <a:bodyPr/>
+                    <a:lstStyle/>
+                    <a:p>
+                      <a:r>
+                        <a:rPr sz="1300" b="0" i="0">
+                          <a:solidFill>
+                            <a:srgbClr val="232323"/>
+                          </a:solidFill>
+                          <a:latin typeface="Calibri"/>
+                        </a:rPr>
+                        <a:t>Restate today's outputs; discuss the shortage scenarios and GDP-loss metrics each group will use</a:t>
+                      </a:r>
+                    </a:p>
+                  </a:txBody>
+                  <a:tcPr marT="38100" marB="38100" anchor="ctr">
+                    <a:solidFill>
+                      <a:srgbClr val="FFFFFF"/>
+                    </a:solidFill>
+                  </a:tcPr>
+                </a:tc>
+                <a:extLst>
+                  <a:ext uri="{0D108BD9-81ED-4DB2-BD59-A6C34878D82A}">
+                    <a16:rowId xmlns:a16="http://schemas.microsoft.com/office/drawing/2014/main" val="10001"/>
+                  </a:ext>
+                </a:extLst>
+              </a:tr>
+              <a:tr h="815340">
+                <a:tc>
+                  <a:txBody>
+                    <a:bodyPr/>
+                    <a:lstStyle/>
+                    <a:p>
+                      <a:r>
+                        <a:rPr sz="1300" b="1" i="0">
+                          <a:solidFill>
+                            <a:srgbClr val="232323"/>
+                          </a:solidFill>
+                          <a:latin typeface="Calibri"/>
+                        </a:rPr>
+                        <a:t>2. Guided open lab, part 1</a:t>
+                      </a:r>
+                    </a:p>
+                  </a:txBody>
+                  <a:tcPr marT="38100" marB="38100" anchor="ctr">
+                    <a:solidFill>
+                      <a:srgbClr val="F5F5F5"/>
+                    </a:solidFill>
+                  </a:tcPr>
+                </a:tc>
+                <a:tc>
+                  <a:txBody>
+                    <a:bodyPr/>
+                    <a:lstStyle/>
+                    <a:p>
+                      <a:r>
+                        <a:rPr sz="1300" b="0" i="0">
+                          <a:solidFill>
+                            <a:srgbClr val="232323"/>
+                          </a:solidFill>
+                          <a:latin typeface="Calibri"/>
+                        </a:rPr>
+                        <a:t>25</a:t>
+                      </a:r>
+                    </a:p>
+                  </a:txBody>
+                  <a:tcPr marT="38100" marB="38100" anchor="ctr">
+                    <a:solidFill>
+                      <a:srgbClr val="F5F5F5"/>
+                    </a:solidFill>
+                  </a:tcPr>
+                </a:tc>
+                <a:tc>
+                  <a:txBody>
+                    <a:bodyPr/>
+                    <a:lstStyle/>
+                    <a:p>
+                      <a:r>
+                        <a:rPr sz="1300" b="0" i="0">
+                          <a:solidFill>
+                            <a:srgbClr val="232323"/>
+                          </a:solidFill>
+                          <a:latin typeface="Calibri"/>
+                        </a:rPr>
+                        <a:t>Work the scenario definition and GDP-loss extraction for the chosen shortage cases</a:t>
+                      </a:r>
+                    </a:p>
+                  </a:txBody>
+                  <a:tcPr marT="38100" marB="38100" anchor="ctr">
+                    <a:solidFill>
+                      <a:srgbClr val="F5F5F5"/>
+                    </a:solidFill>
+                  </a:tcPr>
+                </a:tc>
+                <a:extLst>
+                  <a:ext uri="{0D108BD9-81ED-4DB2-BD59-A6C34878D82A}">
+                    <a16:rowId xmlns:a16="http://schemas.microsoft.com/office/drawing/2014/main" val="10002"/>
+                  </a:ext>
+                </a:extLst>
+              </a:tr>
+              <a:tr h="815340">
+                <a:tc>
+                  <a:txBody>
+                    <a:bodyPr/>
+                    <a:lstStyle/>
+                    <a:p>
+                      <a:r>
+                        <a:rPr sz="1300" b="1" i="0">
+                          <a:solidFill>
+                            <a:srgbClr val="232323"/>
+                          </a:solidFill>
+                          <a:latin typeface="Calibri"/>
+                        </a:rPr>
+                        <a:t>— Break —</a:t>
+                      </a:r>
+                    </a:p>
+                  </a:txBody>
+                  <a:tcPr marT="38100" marB="38100" anchor="ctr">
+                    <a:solidFill>
+                      <a:srgbClr val="FFFFFF"/>
+                    </a:solidFill>
+                  </a:tcPr>
+                </a:tc>
+                <a:tc>
+                  <a:txBody>
+                    <a:bodyPr/>
                     <a:lstStyle/>
                     <a:p>
                       <a:r>
@@ -8037,7 +8849,7 @@
                       </a:r>
                     </a:p>
                   </a:txBody>
-                  <a:tcPr anchor="ctr" marT="38100" marB="38100">
+                  <a:tcPr marT="38100" marB="38100" anchor="ctr">
                     <a:solidFill>
                       <a:srgbClr val="FFFFFF"/>
                     </a:solidFill>
@@ -8045,7 +8857,50 @@
                 </a:tc>
                 <a:tc>
                   <a:txBody>
-                    <a:bodyPr wrap="square"/>
+                    <a:bodyPr/>
+                    <a:lstStyle/>
+                    <a:p>
+                      <a:endParaRPr/>
+                    </a:p>
+                  </a:txBody>
+                  <a:tcPr marT="38100" marB="38100" anchor="ctr">
+                    <a:solidFill>
+                      <a:srgbClr val="FFFFFF"/>
+                    </a:solidFill>
+                  </a:tcPr>
+                </a:tc>
+                <a:extLst>
+                  <a:ext uri="{0D108BD9-81ED-4DB2-BD59-A6C34878D82A}">
+                    <a16:rowId xmlns:a16="http://schemas.microsoft.com/office/drawing/2014/main" val="10003"/>
+                  </a:ext>
+                </a:extLst>
+              </a:tr>
+              <a:tr h="815340">
+                <a:tc>
+                  <a:txBody>
+                    <a:bodyPr/>
+                    <a:lstStyle/>
+                    <a:p>
+                      <a:r>
+                        <a:rPr sz="1300" b="1" i="0">
+                          <a:solidFill>
+                            <a:srgbClr val="232323"/>
+                          </a:solidFill>
+                          <a:latin typeface="Calibri"/>
+                        </a:rPr>
+                        <a:t>3. Guided open lab, part 2 — write it up</a:t>
+                      </a:r>
+                    </a:p>
+                  </a:txBody>
+                  <a:tcPr marT="38100" marB="38100" anchor="ctr">
+                    <a:solidFill>
+                      <a:srgbClr val="F5F5F5"/>
+                    </a:solidFill>
+                  </a:tcPr>
+                </a:tc>
+                <a:tc>
+                  <a:txBody>
+                    <a:bodyPr/>
                     <a:lstStyle/>
                     <a:p>
                       <a:r>
@@ -8055,21 +8910,48 @@
                           </a:solidFill>
                           <a:latin typeface="Calibri"/>
                         </a:rPr>
-                        <a:t>Recap yesterday's MC = MB logic and your implementation plan; confirm chosen carrier</a:t>
+                        <a:t>35</a:t>
                       </a:r>
                     </a:p>
                   </a:txBody>
-                  <a:tcPr anchor="ctr" marT="38100" marB="38100">
+                  <a:tcPr marT="38100" marB="38100" anchor="ctr">
                     <a:solidFill>
-                      <a:srgbClr val="FFFFFF"/>
+                      <a:srgbClr val="F5F5F5"/>
                     </a:solidFill>
                   </a:tcPr>
                 </a:tc>
+                <a:tc>
+                  <a:txBody>
+                    <a:bodyPr/>
+                    <a:lstStyle/>
+                    <a:p>
+                      <a:r>
+                        <a:rPr sz="1300" b="0" i="0">
+                          <a:solidFill>
+                            <a:srgbClr val="232323"/>
+                          </a:solidFill>
+                          <a:latin typeface="Calibri"/>
+                        </a:rPr>
+                        <a:t>Finish your shortage-scenario analysis note: inputs, GDP-loss estimates, comparison, open items</a:t>
+                      </a:r>
+                    </a:p>
+                  </a:txBody>
+                  <a:tcPr marT="38100" marB="38100" anchor="ctr">
+                    <a:solidFill>
+                      <a:srgbClr val="F5F5F5"/>
+                    </a:solidFill>
+                  </a:tcPr>
+                </a:tc>
+                <a:extLst>
+                  <a:ext uri="{0D108BD9-81ED-4DB2-BD59-A6C34878D82A}">
+                    <a16:rowId xmlns:a16="http://schemas.microsoft.com/office/drawing/2014/main" val="10004"/>
+                  </a:ext>
+                </a:extLst>
               </a:tr>
               <a:tr h="815340">
                 <a:tc>
                   <a:txBody>
-                    <a:bodyPr wrap="square"/>
+                    <a:bodyPr/>
                     <a:lstStyle/>
                     <a:p>
                       <a:r>
@@ -8079,79 +8961,11 @@
                           </a:solidFill>
                           <a:latin typeface="Calibri"/>
                         </a:rPr>
-                        <a:t>2. Guided open lab, part 1</a:t>
+                        <a:t>4. Report-out and debrief</a:t>
                       </a:r>
                     </a:p>
                   </a:txBody>
-                  <a:tcPr anchor="ctr" marT="38100" marB="38100">
-                    <a:solidFill>
-                      <a:srgbClr val="F5F5F5"/>
-                    </a:solidFill>
-                  </a:tcPr>
-                </a:tc>
-                <a:tc>
-                  <a:txBody>
-                    <a:bodyPr wrap="square"/>
-                    <a:lstStyle/>
-                    <a:p>
-                      <a:r>
-                        <a:rPr sz="1300" b="0" i="0">
-                          <a:solidFill>
-                            <a:srgbClr val="232323"/>
-                          </a:solidFill>
-                          <a:latin typeface="Calibri"/>
-                        </a:rPr>
-                        <a:t>90</a:t>
-                      </a:r>
-                    </a:p>
-                  </a:txBody>
-                  <a:tcPr anchor="ctr" marT="38100" marB="38100">
-                    <a:solidFill>
-                      <a:srgbClr val="F5F5F5"/>
-                    </a:solidFill>
-                  </a:tcPr>
-                </a:tc>
-                <a:tc>
-                  <a:txBody>
-                    <a:bodyPr wrap="square"/>
-                    <a:lstStyle/>
-                    <a:p>
-                      <a:r>
-                        <a:rPr sz="1300" b="0" i="0">
-                          <a:solidFill>
-                            <a:srgbClr val="232323"/>
-                          </a:solidFill>
-                          <a:latin typeface="Calibri"/>
-                        </a:rPr>
-                        <a:t>Work the break-even and validation logic by hand for your chosen carrier</a:t>
-                      </a:r>
-                    </a:p>
-                  </a:txBody>
-                  <a:tcPr anchor="ctr" marT="38100" marB="38100">
-                    <a:solidFill>
-                      <a:srgbClr val="F5F5F5"/>
-                    </a:solidFill>
-                  </a:tcPr>
-                </a:tc>
-              </a:tr>
-              <a:tr h="815340">
-                <a:tc>
-                  <a:txBody>
-                    <a:bodyPr wrap="square"/>
-                    <a:lstStyle/>
-                    <a:p>
-                      <a:r>
-                        <a:rPr sz="1300" b="1" i="0">
-                          <a:solidFill>
-                            <a:srgbClr val="232323"/>
-                          </a:solidFill>
-                          <a:latin typeface="Calibri"/>
-                        </a:rPr>
-                        <a:t>— Break —</a:t>
-                      </a:r>
-                    </a:p>
-                  </a:txBody>
-                  <a:tcPr anchor="ctr" marT="38100" marB="38100">
+                  <a:tcPr marT="38100" marB="38100" anchor="ctr">
                     <a:solidFill>
                       <a:srgbClr val="FFFFFF"/>
                     </a:solidFill>
@@ -8159,7 +8973,7 @@
                 </a:tc>
                 <a:tc>
                   <a:txBody>
-                    <a:bodyPr wrap="square"/>
+                    <a:bodyPr/>
                     <a:lstStyle/>
                     <a:p>
                       <a:r>
@@ -8173,7 +8987,7 @@
                       </a:r>
                     </a:p>
                   </a:txBody>
-                  <a:tcPr anchor="ctr" marT="38100" marB="38100">
+                  <a:tcPr marT="38100" marB="38100" anchor="ctr">
                     <a:solidFill>
                       <a:srgbClr val="FFFFFF"/>
                     </a:solidFill>
@@ -8181,143 +8995,7 @@
                 </a:tc>
                 <a:tc>
                   <a:txBody>
-                    <a:bodyPr wrap="square"/>
-                    <a:lstStyle/>
-                    <a:p>
-                      <a:r>
-                        <a:rPr sz="1300" b="0" i="0">
-                          <a:solidFill>
-                            <a:srgbClr val="232323"/>
-                          </a:solidFill>
-                          <a:latin typeface="Calibri"/>
-                        </a:rPr>
-                        <a:t/>
-                      </a:r>
-                    </a:p>
-                  </a:txBody>
-                  <a:tcPr anchor="ctr" marT="38100" marB="38100">
-                    <a:solidFill>
-                      <a:srgbClr val="FFFFFF"/>
-                    </a:solidFill>
-                  </a:tcPr>
-                </a:tc>
-              </a:tr>
-              <a:tr h="815340">
-                <a:tc>
-                  <a:txBody>
-                    <a:bodyPr wrap="square"/>
-                    <a:lstStyle/>
-                    <a:p>
-                      <a:r>
-                        <a:rPr sz="1300" b="1" i="0">
-                          <a:solidFill>
-                            <a:srgbClr val="232323"/>
-                          </a:solidFill>
-                          <a:latin typeface="Calibri"/>
-                        </a:rPr>
-                        <a:t>3. Guided open lab, part 2 — write it up</a:t>
-                      </a:r>
-                    </a:p>
-                  </a:txBody>
-                  <a:tcPr anchor="ctr" marT="38100" marB="38100">
-                    <a:solidFill>
-                      <a:srgbClr val="F5F5F5"/>
-                    </a:solidFill>
-                  </a:tcPr>
-                </a:tc>
-                <a:tc>
-                  <a:txBody>
-                    <a:bodyPr wrap="square"/>
-                    <a:lstStyle/>
-                    <a:p>
-                      <a:r>
-                        <a:rPr sz="1300" b="0" i="0">
-                          <a:solidFill>
-                            <a:srgbClr val="232323"/>
-                          </a:solidFill>
-                          <a:latin typeface="Calibri"/>
-                        </a:rPr>
-                        <a:t>45</a:t>
-                      </a:r>
-                    </a:p>
-                  </a:txBody>
-                  <a:tcPr anchor="ctr" marT="38100" marB="38100">
-                    <a:solidFill>
-                      <a:srgbClr val="F5F5F5"/>
-                    </a:solidFill>
-                  </a:tcPr>
-                </a:tc>
-                <a:tc>
-                  <a:txBody>
-                    <a:bodyPr wrap="square"/>
-                    <a:lstStyle/>
-                    <a:p>
-                      <a:r>
-                        <a:rPr sz="1300" b="0" i="0">
-                          <a:solidFill>
-                            <a:srgbClr val="232323"/>
-                          </a:solidFill>
-                          <a:latin typeface="Calibri"/>
-                        </a:rPr>
-                        <a:t>Finish your reserve-requirement analysis note: inputs, walkthrough, sensitivity, open items</a:t>
-                      </a:r>
-                    </a:p>
-                  </a:txBody>
-                  <a:tcPr anchor="ctr" marT="38100" marB="38100">
-                    <a:solidFill>
-                      <a:srgbClr val="F5F5F5"/>
-                    </a:solidFill>
-                  </a:tcPr>
-                </a:tc>
-              </a:tr>
-              <a:tr h="815340">
-                <a:tc>
-                  <a:txBody>
-                    <a:bodyPr wrap="square"/>
-                    <a:lstStyle/>
-                    <a:p>
-                      <a:r>
-                        <a:rPr sz="1300" b="1" i="0">
-                          <a:solidFill>
-                            <a:srgbClr val="232323"/>
-                          </a:solidFill>
-                          <a:latin typeface="Calibri"/>
-                        </a:rPr>
-                        <a:t>4. Report-out and debrief</a:t>
-                      </a:r>
-                    </a:p>
-                  </a:txBody>
-                  <a:tcPr anchor="ctr" marT="38100" marB="38100">
-                    <a:solidFill>
-                      <a:srgbClr val="FFFFFF"/>
-                    </a:solidFill>
-                  </a:tcPr>
-                </a:tc>
-                <a:tc>
-                  <a:txBody>
-                    <a:bodyPr wrap="square"/>
-                    <a:lstStyle/>
-                    <a:p>
-                      <a:r>
-                        <a:rPr sz="1300" b="0" i="0">
-                          <a:solidFill>
-                            <a:srgbClr val="232323"/>
-                          </a:solidFill>
-                          <a:latin typeface="Calibri"/>
-                        </a:rPr>
-                        <a:t>15</a:t>
-                      </a:r>
-                    </a:p>
-                  </a:txBody>
-                  <a:tcPr anchor="ctr" marT="38100" marB="38100">
-                    <a:solidFill>
-                      <a:srgbClr val="FFFFFF"/>
-                    </a:solidFill>
-                  </a:tcPr>
-                </a:tc>
-                <a:tc>
-                  <a:txBody>
-                    <a:bodyPr wrap="square"/>
+                    <a:bodyPr/>
                     <a:lstStyle/>
                     <a:p>
                       <a:r>
@@ -8331,12 +9009,17 @@
                       </a:r>
                     </a:p>
                   </a:txBody>
-                  <a:tcPr anchor="ctr" marT="38100" marB="38100">
+                  <a:tcPr marT="38100" marB="38100" anchor="ctr">
                     <a:solidFill>
                       <a:srgbClr val="FFFFFF"/>
                     </a:solidFill>
                   </a:tcPr>
                 </a:tc>
+                <a:extLst>
+                  <a:ext uri="{0D108BD9-81ED-4DB2-BD59-A6C34878D82A}">
+                    <a16:rowId xmlns:a16="http://schemas.microsoft.com/office/drawing/2014/main" val="10005"/>
+                  </a:ext>
+                </a:extLst>
               </a:tr>
             </a:tbl>
           </a:graphicData>
@@ -8351,7 +9034,7 @@
 </file>
 
 <file path=ppt/slides/slide4.xml><?xml version="1.0" encoding="utf-8"?>
-<p:sld xmlns:a="http://schemas.openxmlformats.org/drawingml/2006/main" xmlns:p="http://schemas.openxmlformats.org/presentationml/2006/main" xmlns:r="http://schemas.openxmlformats.org/officeDocument/2006/relationships">
+<p:sld xmlns:a="http://schemas.openxmlformats.org/drawingml/2006/main" xmlns:r="http://schemas.openxmlformats.org/officeDocument/2006/relationships" xmlns:p="http://schemas.openxmlformats.org/presentationml/2006/main">
   <p:cSld>
     <p:spTree>
       <p:nvGrpSpPr>
@@ -8359,7 +9042,14 @@
         <p:cNvGrpSpPr/>
         <p:nvPr/>
       </p:nvGrpSpPr>
-      <p:grpSpPr/>
+      <p:grpSpPr>
+        <a:xfrm>
+          <a:off x="0" y="0"/>
+          <a:ext cx="0" cy="0"/>
+          <a:chOff x="0" y="0"/>
+          <a:chExt cx="0" cy="0"/>
+        </a:xfrm>
+      </p:grpSpPr>
       <p:sp>
         <p:nvSpPr>
           <p:cNvPr id="2" name="Rectangle 1"/>
@@ -8401,6 +9091,7 @@
           <a:lstStyle/>
           <a:p>
             <a:pPr algn="ctr"/>
+            <a:endParaRPr/>
           </a:p>
         </p:txBody>
       </p:sp>
@@ -8445,6 +9136,7 @@
           <a:lstStyle/>
           <a:p>
             <a:pPr algn="ctr"/>
+            <a:endParaRPr/>
           </a:p>
         </p:txBody>
       </p:sp>
@@ -8563,6 +9255,7 @@
           <a:lstStyle/>
           <a:p>
             <a:pPr algn="ctr"/>
+            <a:endParaRPr/>
           </a:p>
         </p:txBody>
       </p:sp>
@@ -8674,7 +9367,7 @@
           </a:fontRef>
         </p:style>
         <p:txBody>
-          <a:bodyPr rtlCol="0" anchor="ctr" wrap="square" lIns="228600" rIns="228600"/>
+          <a:bodyPr wrap="square" lIns="228600" rIns="228600" rtlCol="0" anchor="ctr"/>
           <a:lstStyle/>
           <a:p>
             <a:pPr algn="ctr"/>
@@ -8685,7 +9378,7 @@
                 </a:solidFill>
                 <a:latin typeface="Calibri"/>
               </a:rPr>
-              <a:t>Today's numbers come from a separate illustrative toy model, not from DGE-METRIC.</a:t>
+              <a:t>Today's results should come from DGE-METRIC outputs or prepared stress-shock settings.</a:t>
             </a:r>
           </a:p>
         </p:txBody>
@@ -8718,13 +9411,13 @@
               </a:spcAft>
             </a:pPr>
             <a:r>
-              <a:rPr sz="1700" b="0" i="0">
+              <a:rPr sz="1700" b="0" i="0" dirty="0">
                 <a:solidFill>
                   <a:srgbClr val="232323"/>
                 </a:solidFill>
                 <a:latin typeface="Calibri"/>
               </a:rPr>
-              <a:t>•  DGE-METRIC's own reserve-requirement analysis has not yet been built — no new conceptual content today, this is guided practice</a:t>
+              <a:t>•  Any toy-model number is only a mechanism check, not the final DGE-METRIC answer</a:t>
             </a:r>
           </a:p>
           <a:p>
@@ -8734,13 +9427,13 @@
               </a:spcAft>
             </a:pPr>
             <a:r>
-              <a:rPr sz="1700" b="1" i="0">
+              <a:rPr sz="1700" b="1" i="0" dirty="0">
                 <a:solidFill>
                   <a:srgbClr val="232323"/>
                 </a:solidFill>
                 <a:latin typeface="Calibri"/>
               </a:rPr>
-              <a:t>•  If asked for "the" optimal reserve number for Vietnam: restate this caveat rather than answering with a toy-model figure as if it were final</a:t>
+              <a:t>•  If asked for a single GDP-loss ranking across all shortages: restate that the answer depends on the scenario definition, metric, and time window</a:t>
             </a:r>
           </a:p>
         </p:txBody>
@@ -8754,7 +9447,7 @@
 </file>
 
 <file path=ppt/slides/slide5.xml><?xml version="1.0" encoding="utf-8"?>
-<p:sld xmlns:a="http://schemas.openxmlformats.org/drawingml/2006/main" xmlns:p="http://schemas.openxmlformats.org/presentationml/2006/main" xmlns:r="http://schemas.openxmlformats.org/officeDocument/2006/relationships">
+<p:sld xmlns:a="http://schemas.openxmlformats.org/drawingml/2006/main" xmlns:r="http://schemas.openxmlformats.org/officeDocument/2006/relationships" xmlns:p="http://schemas.openxmlformats.org/presentationml/2006/main">
   <p:cSld>
     <p:spTree>
       <p:nvGrpSpPr>
@@ -8762,7 +9455,14 @@
         <p:cNvGrpSpPr/>
         <p:nvPr/>
       </p:nvGrpSpPr>
-      <p:grpSpPr/>
+      <p:grpSpPr>
+        <a:xfrm>
+          <a:off x="0" y="0"/>
+          <a:ext cx="0" cy="0"/>
+          <a:chOff x="0" y="0"/>
+          <a:chExt cx="0" cy="0"/>
+        </a:xfrm>
+      </p:grpSpPr>
       <p:sp>
         <p:nvSpPr>
           <p:cNvPr id="2" name="Rectangle 1"/>
@@ -8804,6 +9504,7 @@
           <a:lstStyle/>
           <a:p>
             <a:pPr algn="ctr"/>
+            <a:endParaRPr/>
           </a:p>
         </p:txBody>
       </p:sp>
@@ -8848,6 +9549,7 @@
           <a:lstStyle/>
           <a:p>
             <a:pPr algn="ctr"/>
+            <a:endParaRPr/>
           </a:p>
         </p:txBody>
       </p:sp>
@@ -8885,7 +9587,7 @@
                 </a:solidFill>
                 <a:latin typeface="Calibri"/>
               </a:rPr>
-              <a:t>BLOCK 1 · 15 MIN</a:t>
+              <a:t>BLOCK 2 · 25 MIN</a:t>
             </a:r>
           </a:p>
           <a:p>
@@ -8896,7 +9598,7 @@
                 </a:solidFill>
                 <a:latin typeface="Calibri"/>
               </a:rPr>
-              <a:t>Recap: Method and Implementation Plan</a:t>
+              <a:t>Toy Model Check — Transition Energy Losses</a:t>
             </a:r>
           </a:p>
         </p:txBody>
@@ -8966,6 +9668,7 @@
           <a:lstStyle/>
           <a:p>
             <a:pPr algn="ctr"/>
+            <a:endParaRPr/>
           </a:p>
         </p:txBody>
       </p:sp>
@@ -9033,7 +9736,7 @@
                 </a:solidFill>
                 <a:latin typeface="Calibri"/>
               </a:rPr>
-              <a:t>4</a:t>
+              <a:t>6</a:t>
             </a:r>
           </a:p>
         </p:txBody>
@@ -9047,7 +9750,7 @@
         <p:spPr>
           <a:xfrm>
             <a:off x="502920" y="1554480"/>
-            <a:ext cx="11185855" cy="4892040"/>
+            <a:ext cx="11185855" cy="1523494"/>
           </a:xfrm>
           <a:prstGeom prst="rect">
             <a:avLst/>
@@ -9066,13 +9769,13 @@
               </a:spcAft>
             </a:pPr>
             <a:r>
-              <a:rPr sz="1700" b="0" i="0">
+              <a:rPr sz="1700" b="0" i="0" dirty="0">
                 <a:solidFill>
                   <a:srgbClr val="232323"/>
                 </a:solidFill>
                 <a:latin typeface="Calibri"/>
               </a:rPr>
-              <a:t>•  Yesterday afternoon: the three-step MC = MB methodology (screen → validate → optimize) using illustrative Toy Model SOE MC numbers</a:t>
+              <a:t>•  Open Day 2/Toy Model/Exercise3_ScenarioTemplate.mod</a:t>
             </a:r>
           </a:p>
           <a:p>
@@ -9082,13 +9785,13 @@
               </a:spcAft>
             </a:pPr>
             <a:r>
-              <a:rPr sz="1700" b="0" i="0">
+              <a:rPr sz="1700" b="0" i="0" dirty="0">
                 <a:solidFill>
                   <a:srgbClr val="232323"/>
                 </a:solidFill>
                 <a:latin typeface="Calibri"/>
               </a:rPr>
-              <a:t>•  Baseline GDP (2024) USD 430,000m; crisis probability p = 0.04/yr; break-even divisor USD 172.0m</a:t>
+              <a:t>•  Activate Scenario 4 (offset case): dirty-energy loss is only partially offset by clean-energy gains, so total E falls</a:t>
             </a:r>
           </a:p>
           <a:p>
@@ -9098,13 +9801,13 @@
               </a:spcAft>
             </a:pPr>
             <a:r>
-              <a:rPr sz="1700" b="0" i="0">
+              <a:rPr sz="1700" b="0" i="0" dirty="0">
                 <a:solidFill>
                   <a:srgbClr val="232323"/>
                 </a:solidFill>
                 <a:latin typeface="Calibri"/>
               </a:rPr>
-              <a:t>•  Your group's implementation plan: chosen carrier, mechanism, DGE-METRIC outputs needed, codebase location</a:t>
+              <a:t>•  Compare Scenario 4 against Scenario 1 (balanced transition) for E, Y, and I</a:t>
             </a:r>
           </a:p>
           <a:p>
@@ -9114,13 +9817,13 @@
               </a:spcAft>
             </a:pPr>
             <a:r>
-              <a:rPr sz="1700" b="1" i="0">
+              <a:rPr sz="1700" b="0" i="0" dirty="0">
                 <a:solidFill>
                   <a:srgbClr val="232323"/>
                 </a:solidFill>
                 <a:latin typeface="Calibri"/>
               </a:rPr>
-              <a:t>•  Today: no new concepts — apply this by hand, in full, for your carrier</a:t>
+              <a:t>•  Write one-sentence mechanism check: E = E_D + E_C, so lower total E changes macro outcomes</a:t>
             </a:r>
           </a:p>
         </p:txBody>
@@ -9134,7 +9837,7 @@
 </file>
 
 <file path=ppt/slides/slide6.xml><?xml version="1.0" encoding="utf-8"?>
-<p:sld xmlns:a="http://schemas.openxmlformats.org/drawingml/2006/main" xmlns:p="http://schemas.openxmlformats.org/presentationml/2006/main" xmlns:r="http://schemas.openxmlformats.org/officeDocument/2006/relationships">
+<p:sld xmlns:a="http://schemas.openxmlformats.org/drawingml/2006/main" xmlns:r="http://schemas.openxmlformats.org/officeDocument/2006/relationships" xmlns:p="http://schemas.openxmlformats.org/presentationml/2006/main">
   <p:cSld>
     <p:spTree>
       <p:nvGrpSpPr>
@@ -9142,7 +9845,14 @@
         <p:cNvGrpSpPr/>
         <p:nvPr/>
       </p:nvGrpSpPr>
-      <p:grpSpPr/>
+      <p:grpSpPr>
+        <a:xfrm>
+          <a:off x="0" y="0"/>
+          <a:ext cx="0" cy="0"/>
+          <a:chOff x="0" y="0"/>
+          <a:chExt cx="0" cy="0"/>
+        </a:xfrm>
+      </p:grpSpPr>
       <p:sp>
         <p:nvSpPr>
           <p:cNvPr id="2" name="Rectangle 1"/>
@@ -9184,6 +9894,7 @@
           <a:lstStyle/>
           <a:p>
             <a:pPr algn="ctr"/>
+            <a:endParaRPr/>
           </a:p>
         </p:txBody>
       </p:sp>
@@ -9228,6 +9939,7 @@
           <a:lstStyle/>
           <a:p>
             <a:pPr algn="ctr"/>
+            <a:endParaRPr/>
           </a:p>
         </p:txBody>
       </p:sp>
@@ -9265,7 +9977,7 @@
                 </a:solidFill>
                 <a:latin typeface="Calibri"/>
               </a:rPr>
-              <a:t>BLOCK 2 · 90 MIN</a:t>
+              <a:t>BLOCK 1 · 60 MIN</a:t>
             </a:r>
           </a:p>
           <a:p>
@@ -9276,7 +9988,7 @@
                 </a:solidFill>
                 <a:latin typeface="Calibri"/>
               </a:rPr>
-              <a:t>Guided Open Lab — Work the Logic by Hand</a:t>
+              <a:t>Recap and Discussion</a:t>
             </a:r>
           </a:p>
         </p:txBody>
@@ -9346,6 +10058,7 @@
           <a:lstStyle/>
           <a:p>
             <a:pPr algn="ctr"/>
+            <a:endParaRPr/>
           </a:p>
         </p:txBody>
       </p:sp>
@@ -9413,7 +10126,7 @@
                 </a:solidFill>
                 <a:latin typeface="Calibri"/>
               </a:rPr>
-              <a:t>5</a:t>
+              <a:t>4</a:t>
             </a:r>
           </a:p>
         </p:txBody>
@@ -9452,7 +10165,7 @@
                 </a:solidFill>
                 <a:latin typeface="Calibri"/>
               </a:rPr>
-              <a:t>•  Confirm: Break-even GDP loss % ≈ Annual cost ÷ 172.0 for your carrier</a:t>
+              <a:t>•  Yesterday afternoon: the implementation plan for one or two shortage scenarios and the DGE-METRIC outputs needed</a:t>
             </a:r>
           </a:p>
           <a:p>
@@ -9468,7 +10181,7 @@
                 </a:solidFill>
                 <a:latin typeface="Calibri"/>
               </a:rPr>
-              <a:t>•  Confirm the Step-2 verdict (justified / marginal / not justified) at 20% and 50% shock sizes</a:t>
+              <a:t>•  Today's focus: compute GDP losses for each scenario and compare the results</a:t>
             </a:r>
           </a:p>
           <a:p>
@@ -9484,7 +10197,7 @@
                 </a:solidFill>
                 <a:latin typeface="Calibri"/>
               </a:rPr>
-              <a:t>•  If you have a Day 2 AM efficiency-scenario comparison: would it increase or decrease exposure to disruption in your carrier?</a:t>
+              <a:t>•  Your group's scenario choices: fossil-input shortage, renewable-production shortfall, or another shortage case approved by the facilitator</a:t>
             </a:r>
           </a:p>
           <a:p>
@@ -9500,7 +10213,7 @@
                 </a:solidFill>
                 <a:latin typeface="Calibri"/>
               </a:rPr>
-              <a:t>•  List two DGE-METRIC outputs that would be needed to redo Steps 1–2 properly, once a reserve module exists</a:t>
+              <a:t>•  Discuss open issues and questions before hands-on work starts</a:t>
             </a:r>
           </a:p>
           <a:p>
@@ -9510,29 +10223,13 @@
               </a:spcAft>
             </a:pPr>
             <a:r>
-              <a:rPr sz="1700" b="0" i="0">
+              <a:rPr sz="1700" b="1" i="0">
                 <a:solidFill>
                   <a:srgbClr val="232323"/>
                 </a:solidFill>
                 <a:latin typeface="Calibri"/>
               </a:rPr>
-              <a:t>•  Sensitivity: roughly how much larger would crisis probability or shock size need to be for the verdict to flip?</a:t>
-            </a:r>
-          </a:p>
-          <a:p>
-            <a:pPr marL="0" indent="0">
-              <a:spcAft>
-                <a:spcPts val="1000"/>
-              </a:spcAft>
-            </a:pPr>
-            <a:r>
-              <a:rPr sz="1700" b="1" i="0">
-                <a:solidFill>
-                  <a:srgbClr val="232323"/>
-                </a:solidFill>
-                <a:latin typeface="Calibri"/>
-              </a:rPr>
-              <a:t>•  Facilitator circulates rather than presenting one worked example — multiple carriers are in play at once</a:t>
+              <a:t>•  Today: no new theory — apply DGE-METRIC outputs or prepared settings to the scenarios you chose</a:t>
             </a:r>
           </a:p>
         </p:txBody>
@@ -9546,7 +10243,7 @@
 </file>
 
 <file path=ppt/slides/slide7.xml><?xml version="1.0" encoding="utf-8"?>
-<p:sld xmlns:a="http://schemas.openxmlformats.org/drawingml/2006/main" xmlns:p="http://schemas.openxmlformats.org/presentationml/2006/main" xmlns:r="http://schemas.openxmlformats.org/officeDocument/2006/relationships">
+<p:sld xmlns:a="http://schemas.openxmlformats.org/drawingml/2006/main" xmlns:r="http://schemas.openxmlformats.org/officeDocument/2006/relationships" xmlns:p="http://schemas.openxmlformats.org/presentationml/2006/main">
   <p:cSld>
     <p:spTree>
       <p:nvGrpSpPr>
@@ -9554,7 +10251,14 @@
         <p:cNvGrpSpPr/>
         <p:nvPr/>
       </p:nvGrpSpPr>
-      <p:grpSpPr/>
+      <p:grpSpPr>
+        <a:xfrm>
+          <a:off x="0" y="0"/>
+          <a:ext cx="0" cy="0"/>
+          <a:chOff x="0" y="0"/>
+          <a:chExt cx="0" cy="0"/>
+        </a:xfrm>
+      </p:grpSpPr>
       <p:sp>
         <p:nvSpPr>
           <p:cNvPr id="2" name="Rectangle 1"/>
@@ -9565,6 +10269,51 @@
           <a:xfrm>
             <a:off x="0" y="0"/>
             <a:ext cx="12191695" cy="6858000"/>
+          </a:xfrm>
+          <a:prstGeom prst="rect">
+            <a:avLst/>
+          </a:prstGeom>
+          <a:solidFill>
+            <a:srgbClr val="FFFFFF"/>
+          </a:solidFill>
+          <a:ln>
+            <a:noFill/>
+          </a:ln>
+          <a:effectLst/>
+        </p:spPr>
+        <p:style>
+          <a:lnRef idx="1">
+            <a:schemeClr val="accent1"/>
+          </a:lnRef>
+          <a:fillRef idx="3">
+            <a:schemeClr val="accent1"/>
+          </a:fillRef>
+          <a:effectRef idx="2">
+            <a:schemeClr val="accent1"/>
+          </a:effectRef>
+          <a:fontRef idx="minor">
+            <a:schemeClr val="lt1"/>
+          </a:fontRef>
+        </p:style>
+        <p:txBody>
+          <a:bodyPr rtlCol="0" anchor="ctr"/>
+          <a:lstStyle/>
+          <a:p>
+            <a:pPr algn="ctr"/>
+            <a:endParaRPr/>
+          </a:p>
+        </p:txBody>
+      </p:sp>
+      <p:sp>
+        <p:nvSpPr>
+          <p:cNvPr id="3" name="Rectangle 2"/>
+          <p:cNvSpPr/>
+          <p:nvPr/>
+        </p:nvSpPr>
+        <p:spPr>
+          <a:xfrm>
+            <a:off x="0" y="0"/>
+            <a:ext cx="12191695" cy="1280160"/>
           </a:xfrm>
           <a:prstGeom prst="rect">
             <a:avLst/>
@@ -9596,12 +10345,63 @@
           <a:lstStyle/>
           <a:p>
             <a:pPr algn="ctr"/>
+            <a:endParaRPr/>
+          </a:p>
+        </p:txBody>
+      </p:sp>
+      <p:sp>
+        <p:nvSpPr>
+          <p:cNvPr id="4" name="TextBox 3"/>
+          <p:cNvSpPr txBox="1"/>
+          <p:nvPr/>
+        </p:nvSpPr>
+        <p:spPr>
+          <a:xfrm>
+            <a:off x="502920" y="91440"/>
+            <a:ext cx="8778240" cy="1097280"/>
+          </a:xfrm>
+          <a:prstGeom prst="rect">
+            <a:avLst/>
+          </a:prstGeom>
+          <a:noFill/>
+        </p:spPr>
+        <p:txBody>
+          <a:bodyPr wrap="square" anchor="ctr">
+            <a:spAutoFit/>
+          </a:bodyPr>
+          <a:lstStyle/>
+          <a:p>
+            <a:pPr>
+              <a:spcAft>
+                <a:spcPts val="1400"/>
+              </a:spcAft>
+            </a:pPr>
+            <a:r>
+              <a:rPr sz="1100" b="1" i="0">
+                <a:solidFill>
+                  <a:srgbClr val="FFD2D2"/>
+                </a:solidFill>
+                <a:latin typeface="Calibri"/>
+              </a:rPr>
+              <a:t>BLOCK 2 · 25 MIN</a:t>
+            </a:r>
+          </a:p>
+          <a:p>
+            <a:r>
+              <a:rPr sz="2400" b="1" i="0">
+                <a:solidFill>
+                  <a:srgbClr val="FFFFFF"/>
+                </a:solidFill>
+                <a:latin typeface="Calibri"/>
+              </a:rPr>
+              <a:t>Guided Open Lab — Compute GDP Losses</a:t>
+            </a:r>
           </a:p>
         </p:txBody>
       </p:sp>
       <p:pic>
         <p:nvPicPr>
-          <p:cNvPr id="3" name="Picture 2" descr="GIZ_Logo.png"/>
+          <p:cNvPr id="5" name="Picture 4" descr="GIZ_Logo.png"/>
           <p:cNvPicPr>
             <a:picLocks noChangeAspect="1"/>
           </p:cNvPicPr>
@@ -9615,8 +10415,8 @@
         </p:blipFill>
         <p:spPr>
           <a:xfrm>
-            <a:off x="10088575" y="457200"/>
-            <a:ext cx="1656522" cy="457200"/>
+            <a:off x="10454335" y="420624"/>
+            <a:ext cx="1590261" cy="438912"/>
           </a:xfrm>
           <a:prstGeom prst="rect">
             <a:avLst/>
@@ -9625,14 +10425,128 @@
       </p:pic>
       <p:sp>
         <p:nvSpPr>
-          <p:cNvPr id="4" name="TextBox 3"/>
+          <p:cNvPr id="6" name="Rectangle 5"/>
+          <p:cNvSpPr/>
+          <p:nvPr/>
+        </p:nvSpPr>
+        <p:spPr>
+          <a:xfrm>
+            <a:off x="0" y="6565392"/>
+            <a:ext cx="12191695" cy="292608"/>
+          </a:xfrm>
+          <a:prstGeom prst="rect">
+            <a:avLst/>
+          </a:prstGeom>
+          <a:solidFill>
+            <a:srgbClr val="FFFFFF"/>
+          </a:solidFill>
+          <a:ln>
+            <a:noFill/>
+          </a:ln>
+          <a:effectLst/>
+        </p:spPr>
+        <p:style>
+          <a:lnRef idx="1">
+            <a:schemeClr val="accent1"/>
+          </a:lnRef>
+          <a:fillRef idx="3">
+            <a:schemeClr val="accent1"/>
+          </a:fillRef>
+          <a:effectRef idx="2">
+            <a:schemeClr val="accent1"/>
+          </a:effectRef>
+          <a:fontRef idx="minor">
+            <a:schemeClr val="lt1"/>
+          </a:fontRef>
+        </p:style>
+        <p:txBody>
+          <a:bodyPr rtlCol="0" anchor="ctr"/>
+          <a:lstStyle/>
+          <a:p>
+            <a:pPr algn="ctr"/>
+            <a:endParaRPr/>
+          </a:p>
+        </p:txBody>
+      </p:sp>
+      <p:sp>
+        <p:nvSpPr>
+          <p:cNvPr id="7" name="TextBox 6"/>
           <p:cNvSpPr txBox="1"/>
           <p:nvPr/>
         </p:nvSpPr>
         <p:spPr>
           <a:xfrm>
-            <a:off x="822960" y="2651760"/>
-            <a:ext cx="10058400" cy="2011680"/>
+            <a:off x="457200" y="6547104"/>
+            <a:ext cx="7315200" cy="274320"/>
+          </a:xfrm>
+          <a:prstGeom prst="rect">
+            <a:avLst/>
+          </a:prstGeom>
+          <a:noFill/>
+        </p:spPr>
+        <p:txBody>
+          <a:bodyPr wrap="none" tIns="0" bIns="0">
+            <a:spAutoFit/>
+          </a:bodyPr>
+          <a:lstStyle/>
+          <a:p>
+            <a:r>
+              <a:rPr sz="1000" b="0" i="0">
+                <a:solidFill>
+                  <a:srgbClr val="787878"/>
+                </a:solidFill>
+                <a:latin typeface="Calibri"/>
+              </a:rPr>
+              <a:t>DGE-METRIC Online Training — Online Day 3 — Fri 24 Jul 2026</a:t>
+            </a:r>
+          </a:p>
+        </p:txBody>
+      </p:sp>
+      <p:sp>
+        <p:nvSpPr>
+          <p:cNvPr id="8" name="TextBox 7"/>
+          <p:cNvSpPr txBox="1"/>
+          <p:nvPr/>
+        </p:nvSpPr>
+        <p:spPr>
+          <a:xfrm>
+            <a:off x="11002975" y="6547104"/>
+            <a:ext cx="822960" cy="274320"/>
+          </a:xfrm>
+          <a:prstGeom prst="rect">
+            <a:avLst/>
+          </a:prstGeom>
+          <a:noFill/>
+        </p:spPr>
+        <p:txBody>
+          <a:bodyPr wrap="none" tIns="0">
+            <a:spAutoFit/>
+          </a:bodyPr>
+          <a:lstStyle/>
+          <a:p>
+            <a:pPr algn="r"/>
+            <a:r>
+              <a:rPr sz="1000" b="0" i="0">
+                <a:solidFill>
+                  <a:srgbClr val="787878"/>
+                </a:solidFill>
+                <a:latin typeface="Calibri"/>
+              </a:rPr>
+              <a:t>5</a:t>
+            </a:r>
+          </a:p>
+        </p:txBody>
+      </p:sp>
+      <p:sp>
+        <p:nvSpPr>
+          <p:cNvPr id="9" name="TextBox 8"/>
+          <p:cNvSpPr txBox="1"/>
+          <p:nvPr/>
+        </p:nvSpPr>
+        <p:spPr>
+          <a:xfrm>
+            <a:off x="515620" y="1554480"/>
+            <a:ext cx="11185855" cy="2564805"/>
           </a:xfrm>
           <a:prstGeom prst="rect">
             <a:avLst/>
@@ -9645,46 +10559,99 @@
           </a:bodyPr>
           <a:lstStyle/>
           <a:p>
-            <a:pPr>
+            <a:pPr marL="0" indent="0">
               <a:spcAft>
                 <a:spcPts val="1000"/>
               </a:spcAft>
             </a:pPr>
             <a:r>
-              <a:rPr sz="1500" b="1" i="0">
-                <a:solidFill>
-                  <a:srgbClr val="FFD2D2"/>
-                </a:solidFill>
-                <a:latin typeface="Calibri"/>
-              </a:rPr>
-              <a:t>SHORT BREAK</a:t>
-            </a:r>
-          </a:p>
-          <a:p>
-            <a:r>
-              <a:rPr sz="3400" b="1" i="0">
-                <a:solidFill>
-                  <a:srgbClr val="FFFFFF"/>
-                </a:solidFill>
-                <a:latin typeface="Calibri"/>
-              </a:rPr>
-              <a:t>15 minutes</a:t>
-            </a:r>
-          </a:p>
-          <a:p>
-            <a:pPr>
-              <a:spcBef>
-                <a:spcPts val="1400"/>
-              </a:spcBef>
+              <a:rPr sz="1700" b="0" i="0" dirty="0">
+                <a:solidFill>
+                  <a:srgbClr val="232323"/>
+                </a:solidFill>
+                <a:latin typeface="Calibri"/>
+              </a:rPr>
+              <a:t>•  Define the shortage scenario: what is short, how large is the shock, and over what time window?</a:t>
+            </a:r>
+          </a:p>
+          <a:p>
+            <a:pPr marL="0" indent="0">
+              <a:spcAft>
+                <a:spcPts val="1000"/>
+              </a:spcAft>
             </a:pPr>
             <a:r>
-              <a:rPr sz="1700" b="0" i="0">
-                <a:solidFill>
-                  <a:srgbClr val="FFFFFF"/>
-                </a:solidFill>
-                <a:latin typeface="Calibri"/>
-              </a:rPr>
-              <a:t>Next: write up the full analysis note</a:t>
+              <a:rPr sz="1700" b="0" i="0" dirty="0">
+                <a:solidFill>
+                  <a:srgbClr val="232323"/>
+                </a:solidFill>
+                <a:latin typeface="Calibri"/>
+              </a:rPr>
+              <a:t>•  Identify the GDP-loss metric you will report: level change, cumulative loss, percentage loss, or another metric used by the model outputs</a:t>
+            </a:r>
+          </a:p>
+          <a:p>
+            <a:pPr marL="0" indent="0">
+              <a:spcAft>
+                <a:spcPts val="1000"/>
+              </a:spcAft>
+            </a:pPr>
+            <a:r>
+              <a:rPr sz="1700" b="0" i="0" dirty="0">
+                <a:solidFill>
+                  <a:srgbClr val="232323"/>
+                </a:solidFill>
+                <a:latin typeface="Calibri"/>
+              </a:rPr>
+              <a:t>•  Use DGE-METRIC stress-shock settings or prepared outputs to compute the GDP loss for each scenario</a:t>
+            </a:r>
+          </a:p>
+          <a:p>
+            <a:pPr marL="0" indent="0">
+              <a:spcAft>
+                <a:spcPts val="1000"/>
+              </a:spcAft>
+            </a:pPr>
+            <a:r>
+              <a:rPr sz="1700" b="0" i="0" dirty="0">
+                <a:solidFill>
+                  <a:srgbClr val="232323"/>
+                </a:solidFill>
+                <a:latin typeface="Calibri"/>
+              </a:rPr>
+              <a:t>•  If you have a Day 2 AM efficiency-scenario comparison: does it dampen or amplify the shortage shock's GDP loss?</a:t>
+            </a:r>
+          </a:p>
+          <a:p>
+            <a:pPr marL="0" indent="0">
+              <a:spcAft>
+                <a:spcPts val="1000"/>
+              </a:spcAft>
+            </a:pPr>
+            <a:r>
+              <a:rPr sz="1700" b="0" i="0" dirty="0">
+                <a:solidFill>
+                  <a:srgbClr val="232323"/>
+                </a:solidFill>
+                <a:latin typeface="Calibri"/>
+              </a:rPr>
+              <a:t>•  Compare the scenarios: which one gives the largest GDP loss, and what mechanism explains the difference?</a:t>
+            </a:r>
+          </a:p>
+          <a:p>
+            <a:pPr marL="0" indent="0">
+              <a:spcAft>
+                <a:spcPts val="1000"/>
+              </a:spcAft>
+            </a:pPr>
+            <a:r>
+              <a:rPr sz="1700" b="0" i="0" dirty="0">
+                <a:solidFill>
+                  <a:srgbClr val="232323"/>
+                </a:solidFill>
+                <a:latin typeface="Calibri"/>
+              </a:rPr>
+              <a:t>•  Sensitivity: what change in shock size, timing, or affected carrier would materially change the ranking?</a:t>
             </a:r>
           </a:p>
         </p:txBody>
@@ -9698,7 +10665,7 @@
 </file>
 
 <file path=ppt/slides/slide8.xml><?xml version="1.0" encoding="utf-8"?>
-<p:sld xmlns:a="http://schemas.openxmlformats.org/drawingml/2006/main" xmlns:p="http://schemas.openxmlformats.org/presentationml/2006/main" xmlns:r="http://schemas.openxmlformats.org/officeDocument/2006/relationships">
+<p:sld xmlns:a="http://schemas.openxmlformats.org/drawingml/2006/main" xmlns:r="http://schemas.openxmlformats.org/officeDocument/2006/relationships" xmlns:p="http://schemas.openxmlformats.org/presentationml/2006/main">
   <p:cSld>
     <p:spTree>
       <p:nvGrpSpPr>
@@ -9706,7 +10673,14 @@
         <p:cNvGrpSpPr/>
         <p:nvPr/>
       </p:nvGrpSpPr>
-      <p:grpSpPr/>
+      <p:grpSpPr>
+        <a:xfrm>
+          <a:off x="0" y="0"/>
+          <a:ext cx="0" cy="0"/>
+          <a:chOff x="0" y="0"/>
+          <a:chExt cx="0" cy="0"/>
+        </a:xfrm>
+      </p:grpSpPr>
       <p:sp>
         <p:nvSpPr>
           <p:cNvPr id="2" name="Rectangle 1"/>
@@ -9717,50 +10691,6 @@
           <a:xfrm>
             <a:off x="0" y="0"/>
             <a:ext cx="12191695" cy="6858000"/>
-          </a:xfrm>
-          <a:prstGeom prst="rect">
-            <a:avLst/>
-          </a:prstGeom>
-          <a:solidFill>
-            <a:srgbClr val="FFFFFF"/>
-          </a:solidFill>
-          <a:ln>
-            <a:noFill/>
-          </a:ln>
-          <a:effectLst/>
-        </p:spPr>
-        <p:style>
-          <a:lnRef idx="1">
-            <a:schemeClr val="accent1"/>
-          </a:lnRef>
-          <a:fillRef idx="3">
-            <a:schemeClr val="accent1"/>
-          </a:fillRef>
-          <a:effectRef idx="2">
-            <a:schemeClr val="accent1"/>
-          </a:effectRef>
-          <a:fontRef idx="minor">
-            <a:schemeClr val="lt1"/>
-          </a:fontRef>
-        </p:style>
-        <p:txBody>
-          <a:bodyPr rtlCol="0" anchor="ctr"/>
-          <a:lstStyle/>
-          <a:p>
-            <a:pPr algn="ctr"/>
-          </a:p>
-        </p:txBody>
-      </p:sp>
-      <p:sp>
-        <p:nvSpPr>
-          <p:cNvPr id="3" name="Rectangle 2"/>
-          <p:cNvSpPr/>
-          <p:nvPr/>
-        </p:nvSpPr>
-        <p:spPr>
-          <a:xfrm>
-            <a:off x="0" y="0"/>
-            <a:ext cx="12191695" cy="1280160"/>
           </a:xfrm>
           <a:prstGeom prst="rect">
             <a:avLst/>
@@ -9792,62 +10722,13 @@
           <a:lstStyle/>
           <a:p>
             <a:pPr algn="ctr"/>
-          </a:p>
-        </p:txBody>
-      </p:sp>
-      <p:sp>
-        <p:nvSpPr>
-          <p:cNvPr id="4" name="TextBox 3"/>
-          <p:cNvSpPr txBox="1"/>
-          <p:nvPr/>
-        </p:nvSpPr>
-        <p:spPr>
-          <a:xfrm>
-            <a:off x="502920" y="91440"/>
-            <a:ext cx="8778240" cy="1097280"/>
-          </a:xfrm>
-          <a:prstGeom prst="rect">
-            <a:avLst/>
-          </a:prstGeom>
-          <a:noFill/>
-        </p:spPr>
-        <p:txBody>
-          <a:bodyPr wrap="square" anchor="ctr">
-            <a:spAutoFit/>
-          </a:bodyPr>
-          <a:lstStyle/>
-          <a:p>
-            <a:pPr>
-              <a:spcAft>
-                <a:spcPts val="1400"/>
-              </a:spcAft>
-            </a:pPr>
-            <a:r>
-              <a:rPr sz="1100" b="1" i="0">
-                <a:solidFill>
-                  <a:srgbClr val="FFD2D2"/>
-                </a:solidFill>
-                <a:latin typeface="Calibri"/>
-              </a:rPr>
-              <a:t>BLOCK 3 · 45 MIN</a:t>
-            </a:r>
-          </a:p>
-          <a:p>
-            <a:r>
-              <a:rPr sz="2400" b="1" i="0">
-                <a:solidFill>
-                  <a:srgbClr val="FFFFFF"/>
-                </a:solidFill>
-                <a:latin typeface="Calibri"/>
-              </a:rPr>
-              <a:t>Write Up Your Reserve-Requirement Analysis Note</a:t>
-            </a:r>
+            <a:endParaRPr/>
           </a:p>
         </p:txBody>
       </p:sp>
       <p:pic>
         <p:nvPicPr>
-          <p:cNvPr id="5" name="Picture 4" descr="GIZ_Logo.png"/>
+          <p:cNvPr id="3" name="Picture 2" descr="GIZ_Logo.png"/>
           <p:cNvPicPr>
             <a:picLocks noChangeAspect="1"/>
           </p:cNvPicPr>
@@ -9861,8 +10742,8 @@
         </p:blipFill>
         <p:spPr>
           <a:xfrm>
-            <a:off x="10454335" y="420624"/>
-            <a:ext cx="1590261" cy="438912"/>
+            <a:off x="10088575" y="457200"/>
+            <a:ext cx="1656522" cy="457200"/>
           </a:xfrm>
           <a:prstGeom prst="rect">
             <a:avLst/>
@@ -9871,127 +10752,14 @@
       </p:pic>
       <p:sp>
         <p:nvSpPr>
-          <p:cNvPr id="6" name="Rectangle 5"/>
-          <p:cNvSpPr/>
-          <p:nvPr/>
-        </p:nvSpPr>
-        <p:spPr>
-          <a:xfrm>
-            <a:off x="0" y="6565392"/>
-            <a:ext cx="12191695" cy="292608"/>
-          </a:xfrm>
-          <a:prstGeom prst="rect">
-            <a:avLst/>
-          </a:prstGeom>
-          <a:solidFill>
-            <a:srgbClr val="FFFFFF"/>
-          </a:solidFill>
-          <a:ln>
-            <a:noFill/>
-          </a:ln>
-          <a:effectLst/>
-        </p:spPr>
-        <p:style>
-          <a:lnRef idx="1">
-            <a:schemeClr val="accent1"/>
-          </a:lnRef>
-          <a:fillRef idx="3">
-            <a:schemeClr val="accent1"/>
-          </a:fillRef>
-          <a:effectRef idx="2">
-            <a:schemeClr val="accent1"/>
-          </a:effectRef>
-          <a:fontRef idx="minor">
-            <a:schemeClr val="lt1"/>
-          </a:fontRef>
-        </p:style>
-        <p:txBody>
-          <a:bodyPr rtlCol="0" anchor="ctr"/>
-          <a:lstStyle/>
-          <a:p>
-            <a:pPr algn="ctr"/>
-          </a:p>
-        </p:txBody>
-      </p:sp>
-      <p:sp>
-        <p:nvSpPr>
-          <p:cNvPr id="7" name="TextBox 6"/>
+          <p:cNvPr id="4" name="TextBox 3"/>
           <p:cNvSpPr txBox="1"/>
           <p:nvPr/>
         </p:nvSpPr>
         <p:spPr>
           <a:xfrm>
-            <a:off x="457200" y="6547104"/>
-            <a:ext cx="7315200" cy="274320"/>
-          </a:xfrm>
-          <a:prstGeom prst="rect">
-            <a:avLst/>
-          </a:prstGeom>
-          <a:noFill/>
-        </p:spPr>
-        <p:txBody>
-          <a:bodyPr wrap="none" tIns="0" bIns="0">
-            <a:spAutoFit/>
-          </a:bodyPr>
-          <a:lstStyle/>
-          <a:p>
-            <a:r>
-              <a:rPr sz="1000" b="0" i="0">
-                <a:solidFill>
-                  <a:srgbClr val="787878"/>
-                </a:solidFill>
-                <a:latin typeface="Calibri"/>
-              </a:rPr>
-              <a:t>DGE-METRIC Online Training — Online Day 3 — Fri 24 Jul 2026</a:t>
-            </a:r>
-          </a:p>
-        </p:txBody>
-      </p:sp>
-      <p:sp>
-        <p:nvSpPr>
-          <p:cNvPr id="8" name="TextBox 7"/>
-          <p:cNvSpPr txBox="1"/>
-          <p:nvPr/>
-        </p:nvSpPr>
-        <p:spPr>
-          <a:xfrm>
-            <a:off x="11002975" y="6547104"/>
-            <a:ext cx="822960" cy="274320"/>
-          </a:xfrm>
-          <a:prstGeom prst="rect">
-            <a:avLst/>
-          </a:prstGeom>
-          <a:noFill/>
-        </p:spPr>
-        <p:txBody>
-          <a:bodyPr wrap="none" tIns="0">
-            <a:spAutoFit/>
-          </a:bodyPr>
-          <a:lstStyle/>
-          <a:p>
-            <a:pPr algn="r"/>
-            <a:r>
-              <a:rPr sz="1000" b="0" i="0">
-                <a:solidFill>
-                  <a:srgbClr val="787878"/>
-                </a:solidFill>
-                <a:latin typeface="Calibri"/>
-              </a:rPr>
-              <a:t>6</a:t>
-            </a:r>
-          </a:p>
-        </p:txBody>
-      </p:sp>
-      <p:sp>
-        <p:nvSpPr>
-          <p:cNvPr id="9" name="TextBox 8"/>
-          <p:cNvSpPr txBox="1"/>
-          <p:nvPr/>
-        </p:nvSpPr>
-        <p:spPr>
-          <a:xfrm>
-            <a:off x="502920" y="1554480"/>
-            <a:ext cx="11185855" cy="4892040"/>
+            <a:off x="822960" y="2651760"/>
+            <a:ext cx="10058400" cy="2011680"/>
           </a:xfrm>
           <a:prstGeom prst="rect">
             <a:avLst/>
@@ -10004,51 +10772,46 @@
           </a:bodyPr>
           <a:lstStyle/>
           <a:p>
-            <a:pPr marL="0" indent="0">
+            <a:pPr>
               <a:spcAft>
                 <a:spcPts val="1000"/>
               </a:spcAft>
             </a:pPr>
             <a:r>
+              <a:rPr sz="1500" b="1" i="0">
+                <a:solidFill>
+                  <a:srgbClr val="FFD2D2"/>
+                </a:solidFill>
+                <a:latin typeface="Calibri"/>
+              </a:rPr>
+              <a:t>SHORT BREAK</a:t>
+            </a:r>
+          </a:p>
+          <a:p>
+            <a:r>
+              <a:rPr sz="3400" b="1" i="0">
+                <a:solidFill>
+                  <a:srgbClr val="FFFFFF"/>
+                </a:solidFill>
+                <a:latin typeface="Calibri"/>
+              </a:rPr>
+              <a:t>15 minutes</a:t>
+            </a:r>
+          </a:p>
+          <a:p>
+            <a:pPr>
+              <a:spcBef>
+                <a:spcPts val="1400"/>
+              </a:spcBef>
+            </a:pPr>
+            <a:r>
               <a:rPr sz="1700" b="0" i="0">
                 <a:solidFill>
-                  <a:srgbClr val="232323"/>
-                </a:solidFill>
-                <a:latin typeface="Calibri"/>
-              </a:rPr>
-              <a:t>•  Combine: yesterday's implementation plan (mechanism, DGE-METRIC outputs, codebase location) + today's completed MC = MB walkthrough</a:t>
-            </a:r>
-          </a:p>
-          <a:p>
-            <a:pPr marL="0" indent="0">
-              <a:spcAft>
-                <a:spcPts val="1000"/>
-              </a:spcAft>
-            </a:pPr>
-            <a:r>
-              <a:rPr sz="1700" b="0" i="0">
-                <a:solidFill>
-                  <a:srgbClr val="232323"/>
-                </a:solidFill>
-                <a:latin typeface="Calibri"/>
-              </a:rPr>
-              <a:t>•  Add: an explicit list of what is still [SME REVIEW NEEDED] before this could inform an actual decision</a:t>
-            </a:r>
-          </a:p>
-          <a:p>
-            <a:pPr marL="0" indent="0">
-              <a:spcAft>
-                <a:spcPts val="1000"/>
-              </a:spcAft>
-            </a:pPr>
-            <a:r>
-              <a:rPr sz="1700" b="1" i="0">
-                <a:solidFill>
-                  <a:srgbClr val="232323"/>
-                </a:solidFill>
-                <a:latin typeface="Calibri"/>
-              </a:rPr>
-              <a:t>•  Every specific number must be labeled as an illustrative Toy Model SOE MC proxy result, not a DGE-METRIC output</a:t>
+                  <a:srgbClr val="FFFFFF"/>
+                </a:solidFill>
+                <a:latin typeface="Calibri"/>
+              </a:rPr>
+              <a:t>Next: write up the full analysis note</a:t>
             </a:r>
           </a:p>
         </p:txBody>
@@ -10062,7 +10825,7 @@
 </file>
 
 <file path=ppt/slides/slide9.xml><?xml version="1.0" encoding="utf-8"?>
-<p:sld xmlns:a="http://schemas.openxmlformats.org/drawingml/2006/main" xmlns:p="http://schemas.openxmlformats.org/presentationml/2006/main" xmlns:r="http://schemas.openxmlformats.org/officeDocument/2006/relationships">
+<p:sld xmlns:a="http://schemas.openxmlformats.org/drawingml/2006/main" xmlns:r="http://schemas.openxmlformats.org/officeDocument/2006/relationships" xmlns:p="http://schemas.openxmlformats.org/presentationml/2006/main">
   <p:cSld>
     <p:spTree>
       <p:nvGrpSpPr>
@@ -10070,7 +10833,14 @@
         <p:cNvGrpSpPr/>
         <p:nvPr/>
       </p:nvGrpSpPr>
-      <p:grpSpPr/>
+      <p:grpSpPr>
+        <a:xfrm>
+          <a:off x="0" y="0"/>
+          <a:ext cx="0" cy="0"/>
+          <a:chOff x="0" y="0"/>
+          <a:chExt cx="0" cy="0"/>
+        </a:xfrm>
+      </p:grpSpPr>
       <p:sp>
         <p:nvSpPr>
           <p:cNvPr id="2" name="Rectangle 1"/>
@@ -10112,6 +10882,7 @@
           <a:lstStyle/>
           <a:p>
             <a:pPr algn="ctr"/>
+            <a:endParaRPr/>
           </a:p>
         </p:txBody>
       </p:sp>
@@ -10156,6 +10927,7 @@
           <a:lstStyle/>
           <a:p>
             <a:pPr algn="ctr"/>
+            <a:endParaRPr/>
           </a:p>
         </p:txBody>
       </p:sp>
@@ -10193,7 +10965,7 @@
                 </a:solidFill>
                 <a:latin typeface="Calibri"/>
               </a:rPr>
-              <a:t>BLOCK 4 · 15 MIN</a:t>
+              <a:t>BLOCK 3 · 35 MIN</a:t>
             </a:r>
           </a:p>
           <a:p>
@@ -10204,7 +10976,7 @@
                 </a:solidFill>
                 <a:latin typeface="Calibri"/>
               </a:rPr>
-              <a:t>This Morning's Output &amp; Debrief</a:t>
+              <a:t>Write Up Your Shortage-Scenario Analysis Note</a:t>
             </a:r>
           </a:p>
         </p:txBody>
@@ -10274,6 +11046,7 @@
           <a:lstStyle/>
           <a:p>
             <a:pPr algn="ctr"/>
+            <a:endParaRPr/>
           </a:p>
         </p:txBody>
       </p:sp>
@@ -10355,7 +11128,7 @@
         <p:spPr>
           <a:xfrm>
             <a:off x="502920" y="1554480"/>
-            <a:ext cx="11185855" cy="4892040"/>
+            <a:ext cx="11185855" cy="743793"/>
           </a:xfrm>
           <a:prstGeom prst="rect">
             <a:avLst/>
@@ -10374,13 +11147,13 @@
               </a:spcAft>
             </a:pPr>
             <a:r>
-              <a:rPr sz="1700" b="0" i="0">
+              <a:rPr sz="1700" b="0" i="0" dirty="0">
                 <a:solidFill>
                   <a:srgbClr val="232323"/>
                 </a:solidFill>
                 <a:latin typeface="Calibri"/>
               </a:rPr>
-              <a:t>•  You leave with: one completed reserve-requirement analysis note per group, for your chosen carrier</a:t>
+              <a:t>•  Combine: yesterday's scenario definition and DGE-METRIC outputs needed + today's GDP-loss estimates and comparison</a:t>
             </a:r>
           </a:p>
           <a:p>
@@ -10390,29 +11163,13 @@
               </a:spcAft>
             </a:pPr>
             <a:r>
-              <a:rPr sz="1700" b="0" i="0">
+              <a:rPr sz="1700" b="1" i="0" dirty="0">
                 <a:solidFill>
                   <a:srgbClr val="232323"/>
                 </a:solidFill>
                 <a:latin typeface="Calibri"/>
               </a:rPr>
-              <a:t>•  Debrief: in your own words, what does MC = MB mean for a strategic reserve, using your carrier as an example?</a:t>
-            </a:r>
-          </a:p>
-          <a:p>
-            <a:pPr marL="0" indent="0">
-              <a:spcAft>
-                <a:spcPts val="1000"/>
-              </a:spcAft>
-            </a:pPr>
-            <a:r>
-              <a:rPr sz="1700" b="0" i="0">
-                <a:solidFill>
-                  <a:srgbClr val="232323"/>
-                </a:solidFill>
-                <a:latin typeface="Calibri"/>
-              </a:rPr>
-              <a:t>•  Debrief: why does the source material insist on calling the Step 2 "not justified" results illustrative rather than final?</a:t>
+              <a:t>•  Every specific number must be labeled as a DGE-METRIC output or, if used, as an illustrative proxy result</a:t>
             </a:r>
           </a:p>
         </p:txBody>
